--- a/rocky-mountain/teton-week2-not-week12.pptx
+++ b/rocky-mountain/teton-week2-not-week12.pptx
@@ -507,7 +507,7 @@
           <a:p>
             <a:r>
               <a:rPr lang="en-US" dirty="0"/>
-              <a:t>The opening frame is a workflow mismatch, not a product failure. Teton earned trust at night because fall alerts are urgent, concrete, and actionable, and the night team built its routine around them. But the app is barely opened during the day — and daytime is when resident needs are interpreted, documented, and explained to families. Renewal is still likely, but leadership is already asking for a clearer ROI story than fall response alone. That gap between where the product is used and where care decisions happen is the whole opportunity.</a:t>
+              <a:t>The opening frame is a workflow mismatch, not a product failure. Teton earned trust at night because fall alerts are urgent, concrete, and actionable, and the night team built its routine around them. The strategic problem is that the highest-value work — acuity decisions, family trust, the care record, the ROI defense — all happens during the day, when the app is barely opened. Renewal is still likely, but leadership is already asking for a clearer ROI story than fall response alone. That mismatch is the whole opportunity.</a:t>
             </a:r>
             <a:endParaRPr lang="en-US" dirty="0"/>
           </a:p>
@@ -595,7 +595,7 @@
           <a:p>
             <a:r>
               <a:rPr lang="en-US" dirty="0"/>
-              <a:t>One resident, twelve weeks. Teton recorded the rising pattern from around week two; the organization acted at week twelve, at crisis. The point is not that Teton is the only observer — it is that a visible pattern never became a care action because no one owned the review, nothing was documented, and no reassessment was triggered. Differentiation and sizing sit in the footnote and here: EHR flags read only what staff chart, and ~2/3 of clinical leaders report acuity is underreported (ASHA/August Health, 2025). The under-leveling dollar figure (~$90K/yr per building) is illustrative and is validated in Phase 1.</a:t>
+              <a:t>One resident, twelve weeks. Teton recorded the rising pattern from around week two; the organization acted at week twelve, at crisis, because no one owned the review, nothing was documented, and no reassessment was triggered. The bet has to pay for itself, so the slide keeps three proofs: the clinical cost, the illustrative financial cost of under-leveling (~$90K/yr per building, directional — Phase 1 validates prevalence and revenue impact), and the data advantage — EHR flags read only what staff chart, while Teton sees the unwitnessed night patterns. Market context: ~2/3 of clinical leaders report acuity is underreported; 75% report higher acuity than five years ago (ASHA/August Health, 2025).</a:t>
             </a:r>
             <a:endParaRPr lang="en-US" dirty="0"/>
           </a:p>
@@ -683,7 +683,7 @@
           <a:p>
             <a:r>
               <a:rPr lang="en-US" dirty="0"/>
-              <a:t>Engineering capacity buys one initiative. The alternatives split three ways: too narrow to reach the daytime decision workflow (fall accuracy, a generic adoption push); too risky before the clinical workflow is proven (a family live-view portal, and automated care-level recommendations that put Teton too close to billing); and too broad for a six-month bet (full multi-EHR integration). The chosen bet is a nurse-owned change-of-condition review. The guardrail is the important part: Teton identifies review-worthy evidence, and the care team makes the clinical and billing decision.</a:t>
+              <a:t>Engineering capacity buys one initiative, so the matrix shows the trade-off, not just the winner. Each rejected option was a real customer signal from the interview: false-alarm trust, Marcus asking for broader adoption, families asking to see rooms, the EHR as the record, care levels driving billing. Change-of-condition review is the only option that reaches the high-value daytime decision workflow without overreaching — a family portal or auto care-leveling would overreach clinically and on privacy, and multi-EHR is too broad for six months. The guardrail keeps Teton on the evidence side of the line; the billing rationale stays in the row, not the product promise.</a:t>
             </a:r>
             <a:endParaRPr lang="en-US" dirty="0"/>
           </a:p>
@@ -771,7 +771,7 @@
           <a:p>
             <a:r>
               <a:rPr lang="en-US" dirty="0"/>
-              <a:t>The user-facing loop is deliberately simple: detect a meaningful change, route it to a clinical owner, document the reviewed outcome, and explain it to families only after human confirmation. Prioritization matters but is internal product logic, so it stays off the visible loop. The review card is grounded in the real workflow rather than a SaaS demo: a resident, why they surfaced, the trend in plain numbers, the evidence period, the nurse's decision, and where documentation lands. The adoption argument is the quiet strength — one clinical owner inside one existing cadence, not a new dashboard for every floor caregiver.</a:t>
+              <a:t>The user-facing loop is deliberately simple: detect a meaningful change, route it to a clinical owner, document the reviewed outcome, and explain it to families only after human confirmation. The review card is the product — grounded in the real workflow rather than a demo. It shows a resident, why they surfaced in plain numbers, the evidence period, the nurse's decision, and where the confirmed review lands. The quiet strength is adoption: one clinical owner inside one existing cadence, two to three candidates per week, not a new dashboard for every floor caregiver.</a:t>
             </a:r>
             <a:endParaRPr lang="en-US" dirty="0"/>
           </a:p>
@@ -859,7 +859,7 @@
           <a:p>
             <a:r>
               <a:rPr lang="en-US" dirty="0"/>
-              <a:t>The gates are ranked and sequential. Signal quality gates everything — if Teton can't separate real decline from noise weeks early, a review workflow just routes noise to the most overloaded person in the building, so the retrospective study is first and cheap. Workflow fit decides the shape: one named owner reviewing a small shortlist inside a cadence that already exists. Behavior change decides value: reviewed evidence has to actually change what staff do. The on-slide 'proceed if' language is qualitative on purpose; the underlying numeric targets (roughly 60% of true declines detectable ≥2 weeks early, ~70% of candidates resolved) are placeholders I'd calibrate with clinical leadership, kept in notes so the room doesn't fight over invented precision.</a:t>
+              <a:t>The gates are ranked, and Gate 1 is the make-or-break: if Teton can't separate real decline from noise weeks early, a review workflow just routes noise to the most overloaded person in the building. So the retrospective study is first and cheap — no engineering, just replaying history. Gate 2 decides the product shape: one named owner reviewing a small shortlist inside an existing cadence. Gate 3 decides value: reviewed evidence must change what staff do. On-slide proceed-if language is qualitative; underlying numeric targets (~60% of true declines detectable ≥2 weeks early, ~70% of candidates resolved) are placeholders I'd calibrate with clinical leadership.</a:t>
             </a:r>
             <a:endParaRPr lang="en-US" dirty="0"/>
           </a:p>
@@ -947,7 +947,7 @@
           <a:p>
             <a:r>
               <a:rPr lang="en-US" dirty="0"/>
-              <a:t>The plan front-loads the cheapest, most falsifiable test and keeps engineering off the critical path until retrospective signal quality is proven. Adoption is earned the same way the night shift adopted falls — by fitting an existing ritual, with the design partners who described the problem as first users. The metric ladder is ordered so usage can't masquerade as value: reviewed, then acted on, then earlier. The single number worth putting on a wall is median weeks-earlier detection — the through-line back to week two, not week twelve. 'Earlier' is deliberately narrower than 'outcomes' to avoid overclaiming broad healthcare results.</a:t>
+              <a:t>The close leaves the room with what we're proving, how, and what success sounds like at renewal. The plan front-loads the cheapest falsifiable test and keeps engineering off the critical path until signal quality clears. The North Star is the single number worth putting on a wall — median weeks earlier that meaningful decline is reviewed, the through-line back to week two, not week twelve. The metric ladder is ordered so usage can't masquerade as value: reviewed, then acted on, then earlier. Incident/escalation movement is framed as an early directional signal, not a run-rate claim on a six-month MVP.</a:t>
             </a:r>
             <a:endParaRPr lang="en-US" dirty="0"/>
           </a:p>
@@ -1388,7 +1388,7 @@
         <p:spPr>
           <a:xfrm>
             <a:off x="777240" y="676656"/>
-            <a:ext cx="10332720" cy="822960"/>
+            <a:ext cx="10424160" cy="822960"/>
           </a:xfrm>
           <a:prstGeom prst="rect">
             <a:avLst/>
@@ -1407,7 +1407,7 @@
               <a:buNone/>
             </a:pPr>
             <a:r>
-              <a:rPr lang="en-US" sz="2500" b="1" dirty="0">
+              <a:rPr lang="en-US" sz="2400" b="1" dirty="0">
                 <a:solidFill>
                   <a:srgbClr val="1B1B18"/>
                 </a:solidFill>
@@ -1415,9 +1415,9 @@
                 <a:ea typeface="Calibri" pitchFamily="34" charset="-122"/>
                 <a:cs typeface="Calibri" pitchFamily="34" charset="-120"/>
               </a:rPr>
-              <a:t>Teton is trusted at night, but care decisions happen during the day</a:t>
-            </a:r>
-            <a:endParaRPr lang="en-US" sz="2500" dirty="0"/>
+              <a:t>Teton is trusted at night, but the valuable decisions happen during the day</a:t>
+            </a:r>
+            <a:endParaRPr lang="en-US" sz="2400" dirty="0"/>
           </a:p>
         </p:txBody>
       </p:sp>
@@ -1429,8 +1429,8 @@
         </p:nvSpPr>
         <p:spPr>
           <a:xfrm>
-            <a:off x="777240" y="1481328"/>
-            <a:ext cx="9875520" cy="502920"/>
+            <a:off x="777240" y="1463040"/>
+            <a:ext cx="10058400" cy="457200"/>
           </a:xfrm>
           <a:prstGeom prst="rect">
             <a:avLst/>
@@ -1449,7 +1449,7 @@
               <a:buNone/>
             </a:pPr>
             <a:r>
-              <a:rPr lang="en-US" sz="1300" dirty="0">
+              <a:rPr lang="en-US" sz="1250" dirty="0">
                 <a:solidFill>
                   <a:srgbClr val="83837B"/>
                 </a:solidFill>
@@ -1457,9 +1457,9 @@
                 <a:ea typeface="Calibri" pitchFamily="34" charset="-122"/>
                 <a:cs typeface="Calibri" pitchFamily="34" charset="-120"/>
               </a:rPr>
-              <a:t>Fall monitoring has earned the wedge. The next risk is that Teton's broader signal stays outside assessment, documentation, and family conversations.</a:t>
-            </a:r>
-            <a:endParaRPr lang="en-US" sz="1300" dirty="0"/>
+              <a:t>The fall wedge works. The next product risk is that Teton's broader signals stay outside assessment, documentation, and family conversations.</a:t>
+            </a:r>
+            <a:endParaRPr lang="en-US" sz="1250" dirty="0"/>
           </a:p>
         </p:txBody>
       </p:sp>
@@ -1471,12 +1471,12 @@
         </p:nvSpPr>
         <p:spPr>
           <a:xfrm>
-            <a:off x="777240" y="2148840"/>
-            <a:ext cx="10637215" cy="1024128"/>
+            <a:off x="777240" y="1938528"/>
+            <a:ext cx="6675120" cy="1097280"/>
           </a:xfrm>
           <a:prstGeom prst="roundRect">
             <a:avLst>
-              <a:gd name="adj" fmla="val 8929"/>
+              <a:gd name="adj" fmla="val 8333"/>
             </a:avLst>
           </a:prstGeom>
           <a:solidFill>
@@ -1493,8 +1493,61 @@
         </p:nvSpPr>
         <p:spPr>
           <a:xfrm>
-            <a:off x="1143000" y="2331720"/>
-            <a:ext cx="2194560" cy="365760"/>
+            <a:off x="1088136" y="2121408"/>
+            <a:ext cx="6126480" cy="274320"/>
+          </a:xfrm>
+          <a:prstGeom prst="rect">
+            <a:avLst/>
+          </a:prstGeom>
+          <a:noFill/>
+          <a:ln/>
+        </p:spPr>
+        <p:txBody>
+          <a:bodyPr wrap="square" lIns="0" tIns="0" rIns="0" bIns="0" rtlCol="0" anchor="ctr"/>
+          <a:lstStyle/>
+          <a:p>
+            <a:pPr algn="l" indent="0" marL="0">
+              <a:buNone/>
+            </a:pPr>
+            <a:r>
+              <a:rPr lang="en-US" sz="1500" b="1" dirty="0">
+                <a:solidFill>
+                  <a:srgbClr val="1B1B18"/>
+                </a:solidFill>
+                <a:latin typeface="Calibri" pitchFamily="34" charset="0"/>
+                <a:ea typeface="Calibri" pitchFamily="34" charset="-122"/>
+                <a:cs typeface="Calibri" pitchFamily="34" charset="-120"/>
+              </a:rPr>
+              <a:t>7 PM – 7 AM</a:t>
+            </a:r>
+            <a:pPr algn="l" indent="0" marL="0">
+              <a:buNone/>
+            </a:pPr>
+            <a:r>
+              <a:rPr lang="en-US" sz="1500" b="1" dirty="0">
+                <a:solidFill>
+                  <a:srgbClr val="5A6CE6"/>
+                </a:solidFill>
+                <a:latin typeface="Calibri" pitchFamily="34" charset="0"/>
+                <a:ea typeface="Calibri" pitchFamily="34" charset="-122"/>
+                <a:cs typeface="Calibri" pitchFamily="34" charset="-120"/>
+              </a:rPr>
+              <a:t>   ·   Teton is load-bearing</a:t>
+            </a:r>
+            <a:endParaRPr lang="en-US" sz="1500" dirty="0"/>
+          </a:p>
+        </p:txBody>
+      </p:sp>
+      <p:sp>
+        <p:nvSpPr>
+          <p:cNvPr id="8" name="Text 6"/>
+          <p:cNvSpPr/>
+          <p:nvPr/>
+        </p:nvSpPr>
+        <p:spPr>
+          <a:xfrm>
+            <a:off x="1088136" y="2505456"/>
+            <a:ext cx="6126480" cy="365760"/>
           </a:xfrm>
           <a:prstGeom prst="rect">
             <a:avLst/>
@@ -1510,7 +1563,7 @@
               <a:buNone/>
             </a:pPr>
             <a:r>
-              <a:rPr lang="en-US" sz="1600" b="1" dirty="0">
+              <a:rPr lang="en-US" sz="1250" dirty="0">
                 <a:solidFill>
                   <a:srgbClr val="1B1B18"/>
                 </a:solidFill>
@@ -1518,143 +1571,26 @@
                 <a:ea typeface="Calibri" pitchFamily="34" charset="-122"/>
                 <a:cs typeface="Calibri" pitchFamily="34" charset="-120"/>
               </a:rPr>
-              <a:t>7 PM – 7 AM</a:t>
-            </a:r>
-            <a:endParaRPr lang="en-US" sz="1600" dirty="0"/>
-          </a:p>
-        </p:txBody>
-      </p:sp>
-      <p:sp>
-        <p:nvSpPr>
-          <p:cNvPr id="8" name="Text 6"/>
-          <p:cNvSpPr/>
-          <p:nvPr/>
-        </p:nvSpPr>
-        <p:spPr>
-          <a:xfrm>
-            <a:off x="1143000" y="2724912"/>
-            <a:ext cx="2743200" cy="201168"/>
-          </a:xfrm>
-          <a:prstGeom prst="rect">
-            <a:avLst/>
-          </a:prstGeom>
-          <a:noFill/>
-          <a:ln/>
-        </p:spPr>
-        <p:txBody>
-          <a:bodyPr wrap="square" lIns="0" tIns="0" rIns="0" bIns="0" rtlCol="0" anchor="ctr"/>
-          <a:lstStyle/>
-          <a:p>
-            <a:pPr algn="l" indent="0" marL="0">
-              <a:buNone/>
-            </a:pPr>
-            <a:r>
-              <a:rPr lang="en-US" sz="950" b="1" spc="130" kern="0" dirty="0">
-                <a:solidFill>
-                  <a:srgbClr val="5A6CE6"/>
-                </a:solidFill>
-                <a:latin typeface="Calibri" pitchFamily="34" charset="0"/>
-                <a:ea typeface="Calibri" pitchFamily="34" charset="-122"/>
-                <a:cs typeface="Calibri" pitchFamily="34" charset="-120"/>
-              </a:rPr>
-              <a:t>TETON TRUSTED</a:t>
-            </a:r>
-            <a:endParaRPr lang="en-US" sz="950" dirty="0"/>
-          </a:p>
-        </p:txBody>
-      </p:sp>
-      <p:sp>
-        <p:nvSpPr>
-          <p:cNvPr id="9" name="Text 7"/>
-          <p:cNvSpPr/>
-          <p:nvPr/>
-        </p:nvSpPr>
-        <p:spPr>
-          <a:xfrm>
-            <a:off x="3977640" y="2359152"/>
-            <a:ext cx="6979615" cy="310896"/>
-          </a:xfrm>
-          <a:prstGeom prst="rect">
-            <a:avLst/>
-          </a:prstGeom>
-          <a:noFill/>
-          <a:ln/>
-        </p:spPr>
-        <p:txBody>
-          <a:bodyPr wrap="square" lIns="0" tIns="0" rIns="0" bIns="0" rtlCol="0" anchor="t"/>
-          <a:lstStyle/>
-          <a:p>
-            <a:pPr algn="l" indent="0" marL="0">
-              <a:buNone/>
-            </a:pPr>
-            <a:r>
-              <a:rPr lang="en-US" sz="1300" dirty="0">
-                <a:solidFill>
-                  <a:srgbClr val="1B1B18"/>
-                </a:solidFill>
-                <a:latin typeface="Calibri" pitchFamily="34" charset="0"/>
-                <a:ea typeface="Calibri" pitchFamily="34" charset="-122"/>
-                <a:cs typeface="Calibri" pitchFamily="34" charset="-120"/>
-              </a:rPr>
-              <a:t>Fall alerts  ·  digital rounds  ·  board watched  ·  night-team routine</a:t>
-            </a:r>
-            <a:endParaRPr lang="en-US" sz="1300" dirty="0"/>
-          </a:p>
-        </p:txBody>
-      </p:sp>
-      <p:sp>
-        <p:nvSpPr>
-          <p:cNvPr id="10" name="Text 8"/>
-          <p:cNvSpPr/>
-          <p:nvPr/>
-        </p:nvSpPr>
-        <p:spPr>
-          <a:xfrm>
-            <a:off x="3977640" y="2688336"/>
-            <a:ext cx="6979615" cy="274320"/>
-          </a:xfrm>
-          <a:prstGeom prst="rect">
-            <a:avLst/>
-          </a:prstGeom>
-          <a:noFill/>
-          <a:ln/>
-        </p:spPr>
-        <p:txBody>
-          <a:bodyPr wrap="square" lIns="0" tIns="0" rIns="0" bIns="0" rtlCol="0" anchor="t"/>
-          <a:lstStyle/>
-          <a:p>
-            <a:pPr algn="l" indent="0" marL="0">
-              <a:buNone/>
-            </a:pPr>
-            <a:r>
-              <a:rPr lang="en-US" sz="1050" i="1" dirty="0">
-                <a:solidFill>
-                  <a:srgbClr val="83837B"/>
-                </a:solidFill>
-                <a:latin typeface="Calibri" pitchFamily="34" charset="0"/>
-                <a:ea typeface="Calibri" pitchFamily="34" charset="-122"/>
-                <a:cs typeface="Calibri" pitchFamily="34" charset="-120"/>
-              </a:rPr>
-              <a:t>Alerts are urgent, concrete, and immediately actionable.</a:t>
-            </a:r>
-            <a:endParaRPr lang="en-US" sz="1050" dirty="0"/>
-          </a:p>
-        </p:txBody>
-      </p:sp>
-      <p:sp>
-        <p:nvSpPr>
-          <p:cNvPr id="11" name="Shape 9"/>
-          <p:cNvSpPr/>
-          <p:nvPr/>
-        </p:nvSpPr>
-        <p:spPr>
-          <a:xfrm>
-            <a:off x="777240" y="3319272"/>
-            <a:ext cx="10637215" cy="1024128"/>
+              <a:t>Fall alerts · digital rounds · board watched · night-team routine</a:t>
+            </a:r>
+            <a:endParaRPr lang="en-US" sz="1250" dirty="0"/>
+          </a:p>
+        </p:txBody>
+      </p:sp>
+      <p:sp>
+        <p:nvSpPr>
+          <p:cNvPr id="9" name="Shape 7"/>
+          <p:cNvSpPr/>
+          <p:nvPr/>
+        </p:nvSpPr>
+        <p:spPr>
+          <a:xfrm>
+            <a:off x="777240" y="3127248"/>
+            <a:ext cx="6675120" cy="1097280"/>
           </a:xfrm>
           <a:prstGeom prst="roundRect">
             <a:avLst>
-              <a:gd name="adj" fmla="val 8929"/>
+              <a:gd name="adj" fmla="val 8333"/>
             </a:avLst>
           </a:prstGeom>
           <a:solidFill>
@@ -1670,14 +1606,67 @@
       </p:sp>
       <p:sp>
         <p:nvSpPr>
-          <p:cNvPr id="12" name="Text 10"/>
-          <p:cNvSpPr/>
-          <p:nvPr/>
-        </p:nvSpPr>
-        <p:spPr>
-          <a:xfrm>
-            <a:off x="1143000" y="3502152"/>
-            <a:ext cx="2194560" cy="365760"/>
+          <p:cNvPr id="10" name="Text 8"/>
+          <p:cNvSpPr/>
+          <p:nvPr/>
+        </p:nvSpPr>
+        <p:spPr>
+          <a:xfrm>
+            <a:off x="1088136" y="3310128"/>
+            <a:ext cx="6126480" cy="274320"/>
+          </a:xfrm>
+          <a:prstGeom prst="rect">
+            <a:avLst/>
+          </a:prstGeom>
+          <a:noFill/>
+          <a:ln/>
+        </p:spPr>
+        <p:txBody>
+          <a:bodyPr wrap="square" lIns="0" tIns="0" rIns="0" bIns="0" rtlCol="0" anchor="ctr"/>
+          <a:lstStyle/>
+          <a:p>
+            <a:pPr algn="l" indent="0" marL="0">
+              <a:buNone/>
+            </a:pPr>
+            <a:r>
+              <a:rPr lang="en-US" sz="1500" b="1" dirty="0">
+                <a:solidFill>
+                  <a:srgbClr val="1B1B18"/>
+                </a:solidFill>
+                <a:latin typeface="Calibri" pitchFamily="34" charset="0"/>
+                <a:ea typeface="Calibri" pitchFamily="34" charset="-122"/>
+                <a:cs typeface="Calibri" pitchFamily="34" charset="-120"/>
+              </a:rPr>
+              <a:t>7 AM – 7 PM</a:t>
+            </a:r>
+            <a:pPr algn="l" indent="0" marL="0">
+              <a:buNone/>
+            </a:pPr>
+            <a:r>
+              <a:rPr lang="en-US" sz="1500" b="1" dirty="0">
+                <a:solidFill>
+                  <a:srgbClr val="83837B"/>
+                </a:solidFill>
+                <a:latin typeface="Calibri" pitchFamily="34" charset="0"/>
+                <a:ea typeface="Calibri" pitchFamily="34" charset="-122"/>
+                <a:cs typeface="Calibri" pitchFamily="34" charset="-120"/>
+              </a:rPr>
+              <a:t>   ·   Teton is mostly absent</a:t>
+            </a:r>
+            <a:endParaRPr lang="en-US" sz="1500" dirty="0"/>
+          </a:p>
+        </p:txBody>
+      </p:sp>
+      <p:sp>
+        <p:nvSpPr>
+          <p:cNvPr id="11" name="Text 9"/>
+          <p:cNvSpPr/>
+          <p:nvPr/>
+        </p:nvSpPr>
+        <p:spPr>
+          <a:xfrm>
+            <a:off x="1088136" y="3694176"/>
+            <a:ext cx="6126480" cy="365760"/>
           </a:xfrm>
           <a:prstGeom prst="rect">
             <a:avLst/>
@@ -1693,7 +1682,7 @@
               <a:buNone/>
             </a:pPr>
             <a:r>
-              <a:rPr lang="en-US" sz="1600" b="1" dirty="0">
+              <a:rPr lang="en-US" sz="1250" dirty="0">
                 <a:solidFill>
                   <a:srgbClr val="1B1B18"/>
                 </a:solidFill>
@@ -1701,249 +1690,22 @@
                 <a:ea typeface="Calibri" pitchFamily="34" charset="-122"/>
                 <a:cs typeface="Calibri" pitchFamily="34" charset="-120"/>
               </a:rPr>
-              <a:t>7 AM – 7 PM</a:t>
-            </a:r>
-            <a:endParaRPr lang="en-US" sz="1600" dirty="0"/>
-          </a:p>
-        </p:txBody>
-      </p:sp>
-      <p:sp>
-        <p:nvSpPr>
-          <p:cNvPr id="13" name="Text 11"/>
-          <p:cNvSpPr/>
-          <p:nvPr/>
-        </p:nvSpPr>
-        <p:spPr>
-          <a:xfrm>
-            <a:off x="1143000" y="3895344"/>
-            <a:ext cx="2743200" cy="201168"/>
-          </a:xfrm>
-          <a:prstGeom prst="rect">
-            <a:avLst/>
-          </a:prstGeom>
-          <a:noFill/>
-          <a:ln/>
-        </p:spPr>
-        <p:txBody>
-          <a:bodyPr wrap="square" lIns="0" tIns="0" rIns="0" bIns="0" rtlCol="0" anchor="ctr"/>
-          <a:lstStyle/>
-          <a:p>
-            <a:pPr algn="l" indent="0" marL="0">
-              <a:buNone/>
-            </a:pPr>
-            <a:r>
-              <a:rPr lang="en-US" sz="950" b="1" spc="130" kern="0" dirty="0">
-                <a:solidFill>
-                  <a:srgbClr val="83837B"/>
-                </a:solidFill>
-                <a:latin typeface="Calibri" pitchFamily="34" charset="0"/>
-                <a:ea typeface="Calibri" pitchFamily="34" charset="-122"/>
-                <a:cs typeface="Calibri" pitchFamily="34" charset="-120"/>
-              </a:rPr>
-              <a:t>BARELY USED</a:t>
-            </a:r>
-            <a:endParaRPr lang="en-US" sz="950" dirty="0"/>
-          </a:p>
-        </p:txBody>
-      </p:sp>
-      <p:sp>
-        <p:nvSpPr>
-          <p:cNvPr id="14" name="Text 12"/>
-          <p:cNvSpPr/>
-          <p:nvPr/>
-        </p:nvSpPr>
-        <p:spPr>
-          <a:xfrm>
-            <a:off x="3977640" y="3529584"/>
-            <a:ext cx="6979615" cy="310896"/>
-          </a:xfrm>
-          <a:prstGeom prst="rect">
-            <a:avLst/>
-          </a:prstGeom>
-          <a:noFill/>
-          <a:ln/>
-        </p:spPr>
-        <p:txBody>
-          <a:bodyPr wrap="square" lIns="0" tIns="0" rIns="0" bIns="0" rtlCol="0" anchor="t"/>
-          <a:lstStyle/>
-          <a:p>
-            <a:pPr algn="l" indent="0" marL="0">
-              <a:buNone/>
-            </a:pPr>
-            <a:r>
-              <a:rPr lang="en-US" sz="1300" dirty="0">
-                <a:solidFill>
-                  <a:srgbClr val="1B1B18"/>
-                </a:solidFill>
-                <a:latin typeface="Calibri" pitchFamily="34" charset="0"/>
-                <a:ea typeface="Calibri" pitchFamily="34" charset="-122"/>
-                <a:cs typeface="Calibri" pitchFamily="34" charset="-120"/>
-              </a:rPr>
-              <a:t>Assessments  ·  care conferences  ·  family visits  ·  care-level decisions</a:t>
-            </a:r>
-            <a:endParaRPr lang="en-US" sz="1300" dirty="0"/>
-          </a:p>
-        </p:txBody>
-      </p:sp>
-      <p:sp>
-        <p:nvSpPr>
-          <p:cNvPr id="15" name="Text 13"/>
-          <p:cNvSpPr/>
-          <p:nvPr/>
-        </p:nvSpPr>
-        <p:spPr>
-          <a:xfrm>
-            <a:off x="3977640" y="3858768"/>
-            <a:ext cx="6979615" cy="274320"/>
-          </a:xfrm>
-          <a:prstGeom prst="rect">
-            <a:avLst/>
-          </a:prstGeom>
-          <a:noFill/>
-          <a:ln/>
-        </p:spPr>
-        <p:txBody>
-          <a:bodyPr wrap="square" lIns="0" tIns="0" rIns="0" bIns="0" rtlCol="0" anchor="t"/>
-          <a:lstStyle/>
-          <a:p>
-            <a:pPr algn="l" indent="0" marL="0">
-              <a:buNone/>
-            </a:pPr>
-            <a:r>
-              <a:rPr lang="en-US" sz="1050" i="1" dirty="0">
-                <a:solidFill>
-                  <a:srgbClr val="83837B"/>
-                </a:solidFill>
-                <a:latin typeface="Calibri" pitchFamily="34" charset="0"/>
-                <a:ea typeface="Calibri" pitchFamily="34" charset="-122"/>
-                <a:cs typeface="Calibri" pitchFamily="34" charset="-120"/>
-              </a:rPr>
-              <a:t>When resident needs are interpreted and documented.</a:t>
-            </a:r>
-            <a:endParaRPr lang="en-US" sz="1050" dirty="0"/>
-          </a:p>
-        </p:txBody>
-      </p:sp>
-      <p:sp>
-        <p:nvSpPr>
-          <p:cNvPr id="16" name="Text 14"/>
-          <p:cNvSpPr/>
-          <p:nvPr/>
-        </p:nvSpPr>
-        <p:spPr>
-          <a:xfrm>
-            <a:off x="777240" y="4709160"/>
-            <a:ext cx="10637215" cy="365760"/>
-          </a:xfrm>
-          <a:prstGeom prst="rect">
-            <a:avLst/>
-          </a:prstGeom>
-          <a:noFill/>
-          <a:ln/>
-        </p:spPr>
-        <p:txBody>
-          <a:bodyPr wrap="square" lIns="0" tIns="0" rIns="0" bIns="0" rtlCol="0" anchor="ctr"/>
-          <a:lstStyle/>
-          <a:p>
-            <a:pPr algn="l" indent="0" marL="0">
-              <a:lnSpc>
-                <a:spcPct val="105000"/>
-              </a:lnSpc>
-              <a:buNone/>
-            </a:pPr>
-            <a:r>
-              <a:rPr lang="en-US" sz="1500" dirty="0">
-                <a:solidFill>
-                  <a:srgbClr val="1B1B18"/>
-                </a:solidFill>
-                <a:latin typeface="Calibri" pitchFamily="34" charset="0"/>
-                <a:ea typeface="Calibri" pitchFamily="34" charset="-122"/>
-                <a:cs typeface="Calibri" pitchFamily="34" charset="-120"/>
-              </a:rPr>
-              <a:t>Teton is used when </a:t>
-            </a:r>
-            <a:pPr algn="l" indent="0" marL="0">
-              <a:lnSpc>
-                <a:spcPct val="105000"/>
-              </a:lnSpc>
-              <a:buNone/>
-            </a:pPr>
-            <a:r>
-              <a:rPr lang="en-US" sz="1500" b="1" dirty="0">
-                <a:solidFill>
-                  <a:srgbClr val="5A6CE6"/>
-                </a:solidFill>
-                <a:latin typeface="Calibri" pitchFamily="34" charset="0"/>
-                <a:ea typeface="Calibri" pitchFamily="34" charset="-122"/>
-                <a:cs typeface="Calibri" pitchFamily="34" charset="-120"/>
-              </a:rPr>
-              <a:t>events</a:t>
-            </a:r>
-            <a:pPr algn="l" indent="0" marL="0">
-              <a:lnSpc>
-                <a:spcPct val="105000"/>
-              </a:lnSpc>
-              <a:buNone/>
-            </a:pPr>
-            <a:r>
-              <a:rPr lang="en-US" sz="1500" dirty="0">
-                <a:solidFill>
-                  <a:srgbClr val="1B1B18"/>
-                </a:solidFill>
-                <a:latin typeface="Calibri" pitchFamily="34" charset="0"/>
-                <a:ea typeface="Calibri" pitchFamily="34" charset="-122"/>
-                <a:cs typeface="Calibri" pitchFamily="34" charset="-120"/>
-              </a:rPr>
-              <a:t> happen. The opportunity is when </a:t>
-            </a:r>
-            <a:pPr algn="l" indent="0" marL="0">
-              <a:lnSpc>
-                <a:spcPct val="105000"/>
-              </a:lnSpc>
-              <a:buNone/>
-            </a:pPr>
-            <a:r>
-              <a:rPr lang="en-US" sz="1500" b="1" dirty="0">
-                <a:solidFill>
-                  <a:srgbClr val="5A6CE6"/>
-                </a:solidFill>
-                <a:latin typeface="Calibri" pitchFamily="34" charset="0"/>
-                <a:ea typeface="Calibri" pitchFamily="34" charset="-122"/>
-                <a:cs typeface="Calibri" pitchFamily="34" charset="-120"/>
-              </a:rPr>
-              <a:t>decisions</a:t>
-            </a:r>
-            <a:pPr algn="l" indent="0" marL="0">
-              <a:lnSpc>
-                <a:spcPct val="105000"/>
-              </a:lnSpc>
-              <a:buNone/>
-            </a:pPr>
-            <a:r>
-              <a:rPr lang="en-US" sz="1500" dirty="0">
-                <a:solidFill>
-                  <a:srgbClr val="1B1B18"/>
-                </a:solidFill>
-                <a:latin typeface="Calibri" pitchFamily="34" charset="0"/>
-                <a:ea typeface="Calibri" pitchFamily="34" charset="-122"/>
-                <a:cs typeface="Calibri" pitchFamily="34" charset="-120"/>
-              </a:rPr>
-              <a:t> happen.</a:t>
-            </a:r>
-            <a:endParaRPr lang="en-US" sz="1500" dirty="0"/>
-          </a:p>
-        </p:txBody>
-      </p:sp>
-      <p:sp>
-        <p:nvSpPr>
-          <p:cNvPr id="17" name="Shape 15"/>
-          <p:cNvSpPr/>
-          <p:nvPr/>
-        </p:nvSpPr>
-        <p:spPr>
-          <a:xfrm>
-            <a:off x="777240" y="5550408"/>
-            <a:ext cx="0" cy="581891"/>
+              <a:t>Assessments · family conferences · care-level changes · documentation</a:t>
+            </a:r>
+            <a:endParaRPr lang="en-US" sz="1250" dirty="0"/>
+          </a:p>
+        </p:txBody>
+      </p:sp>
+      <p:sp>
+        <p:nvSpPr>
+          <p:cNvPr id="12" name="Shape 10"/>
+          <p:cNvSpPr/>
+          <p:nvPr/>
+        </p:nvSpPr>
+        <p:spPr>
+          <a:xfrm>
+            <a:off x="777240" y="4581144"/>
+            <a:ext cx="0" cy="594360"/>
           </a:xfrm>
           <a:prstGeom prst="line">
             <a:avLst/>
@@ -1959,14 +1721,14 @@
       </p:sp>
       <p:sp>
         <p:nvSpPr>
-          <p:cNvPr id="18" name="Text 16"/>
-          <p:cNvSpPr/>
-          <p:nvPr/>
-        </p:nvSpPr>
-        <p:spPr>
-          <a:xfrm>
-            <a:off x="1033272" y="5532120"/>
-            <a:ext cx="10168128" cy="800100"/>
+          <p:cNvPr id="13" name="Text 11"/>
+          <p:cNvSpPr/>
+          <p:nvPr/>
+        </p:nvSpPr>
+        <p:spPr>
+          <a:xfrm>
+            <a:off x="1014984" y="4553712"/>
+            <a:ext cx="6437376" cy="792480"/>
           </a:xfrm>
           <a:prstGeom prst="rect">
             <a:avLst/>
@@ -1985,7 +1747,7 @@
               <a:buNone/>
             </a:pPr>
             <a:r>
-              <a:rPr lang="en-US" sz="1400" i="1" dirty="0">
+              <a:rPr lang="en-US" sz="1300" i="1" dirty="0">
                 <a:solidFill>
                   <a:srgbClr val="1B1B18"/>
                 </a:solidFill>
@@ -1993,22 +1755,22 @@
                 <a:ea typeface="Calibri" pitchFamily="34" charset="-122"/>
                 <a:cs typeface="Calibri" pitchFamily="34" charset="-120"/>
               </a:rPr>
-              <a:t>For the night falls alone, yeah. But I'd feel like I was leaving most of the value on the table.</a:t>
-            </a:r>
-            <a:endParaRPr lang="en-US" sz="1400" dirty="0"/>
-          </a:p>
-        </p:txBody>
-      </p:sp>
-      <p:sp>
-        <p:nvSpPr>
-          <p:cNvPr id="19" name="Text 17"/>
-          <p:cNvSpPr/>
-          <p:nvPr/>
-        </p:nvSpPr>
-        <p:spPr>
-          <a:xfrm>
-            <a:off x="1033272" y="5943600"/>
-            <a:ext cx="6400800" cy="237744"/>
+              <a:t>For the night falls alone, yeah.</a:t>
+            </a:r>
+            <a:endParaRPr lang="en-US" sz="1300" dirty="0"/>
+          </a:p>
+        </p:txBody>
+      </p:sp>
+      <p:sp>
+        <p:nvSpPr>
+          <p:cNvPr id="14" name="Text 12"/>
+          <p:cNvSpPr/>
+          <p:nvPr/>
+        </p:nvSpPr>
+        <p:spPr>
+          <a:xfrm>
+            <a:off x="1014984" y="4901184"/>
+            <a:ext cx="6437376" cy="274320"/>
           </a:xfrm>
           <a:prstGeom prst="rect">
             <a:avLst/>
@@ -2024,7 +1786,46 @@
               <a:buNone/>
             </a:pPr>
             <a:r>
-              <a:rPr lang="en-US" sz="1000" dirty="0">
+              <a:rPr lang="en-US" sz="1200" dirty="0">
+                <a:solidFill>
+                  <a:srgbClr val="1B1B18"/>
+                </a:solidFill>
+                <a:latin typeface="Calibri" pitchFamily="34" charset="0"/>
+                <a:ea typeface="Calibri" pitchFamily="34" charset="-122"/>
+                <a:cs typeface="Calibri" pitchFamily="34" charset="-120"/>
+              </a:rPr>
+              <a:t>But most of the value is still on the table.</a:t>
+            </a:r>
+            <a:endParaRPr lang="en-US" sz="1200" dirty="0"/>
+          </a:p>
+        </p:txBody>
+      </p:sp>
+      <p:sp>
+        <p:nvSpPr>
+          <p:cNvPr id="15" name="Text 13"/>
+          <p:cNvSpPr/>
+          <p:nvPr/>
+        </p:nvSpPr>
+        <p:spPr>
+          <a:xfrm>
+            <a:off x="1014984" y="5193792"/>
+            <a:ext cx="4572000" cy="219456"/>
+          </a:xfrm>
+          <a:prstGeom prst="rect">
+            <a:avLst/>
+          </a:prstGeom>
+          <a:noFill/>
+          <a:ln/>
+        </p:spPr>
+        <p:txBody>
+          <a:bodyPr wrap="square" lIns="0" tIns="0" rIns="0" bIns="0" rtlCol="0" anchor="t"/>
+          <a:lstStyle/>
+          <a:p>
+            <a:pPr algn="l" indent="0" marL="0">
+              <a:buNone/>
+            </a:pPr>
+            <a:r>
+              <a:rPr lang="en-US" sz="950" dirty="0">
                 <a:solidFill>
                   <a:srgbClr val="83837B"/>
                 </a:solidFill>
@@ -2034,13 +1835,604 @@
               </a:rPr>
               <a:t>— Marcus, Executive Director</a:t>
             </a:r>
-            <a:endParaRPr lang="en-US" sz="1000" dirty="0"/>
-          </a:p>
-        </p:txBody>
+            <a:endParaRPr lang="en-US" sz="950" dirty="0"/>
+          </a:p>
+        </p:txBody>
+      </p:sp>
+      <p:sp>
+        <p:nvSpPr>
+          <p:cNvPr id="16" name="Text 14"/>
+          <p:cNvSpPr/>
+          <p:nvPr/>
+        </p:nvSpPr>
+        <p:spPr>
+          <a:xfrm>
+            <a:off x="7772400" y="1938528"/>
+            <a:ext cx="3642055" cy="274320"/>
+          </a:xfrm>
+          <a:prstGeom prst="rect">
+            <a:avLst/>
+          </a:prstGeom>
+          <a:noFill/>
+          <a:ln/>
+        </p:spPr>
+        <p:txBody>
+          <a:bodyPr wrap="square" lIns="0" tIns="0" rIns="0" bIns="0" rtlCol="0" anchor="t"/>
+          <a:lstStyle/>
+          <a:p>
+            <a:pPr algn="l" indent="0" marL="0">
+              <a:buNone/>
+            </a:pPr>
+            <a:r>
+              <a:rPr lang="en-US" sz="1350" b="1" dirty="0">
+                <a:solidFill>
+                  <a:srgbClr val="1B1B18"/>
+                </a:solidFill>
+                <a:latin typeface="Calibri" pitchFamily="34" charset="0"/>
+                <a:ea typeface="Calibri" pitchFamily="34" charset="-122"/>
+                <a:cs typeface="Calibri" pitchFamily="34" charset="-120"/>
+              </a:rPr>
+              <a:t>Why this matters</a:t>
+            </a:r>
+            <a:endParaRPr lang="en-US" sz="1350" dirty="0"/>
+          </a:p>
+        </p:txBody>
+      </p:sp>
+      <p:sp>
+        <p:nvSpPr>
+          <p:cNvPr id="17" name="Shape 15"/>
+          <p:cNvSpPr/>
+          <p:nvPr/>
+        </p:nvSpPr>
+        <p:spPr>
+          <a:xfrm>
+            <a:off x="7790688" y="2404872"/>
+            <a:ext cx="73152" cy="73152"/>
+          </a:xfrm>
+          <a:prstGeom prst="ellipse">
+            <a:avLst/>
+          </a:prstGeom>
+          <a:solidFill>
+            <a:srgbClr val="5A6CE6"/>
+          </a:solidFill>
+          <a:ln/>
+        </p:spPr>
+      </p:sp>
+      <p:sp>
+        <p:nvSpPr>
+          <p:cNvPr id="18" name="Text 16"/>
+          <p:cNvSpPr/>
+          <p:nvPr/>
+        </p:nvSpPr>
+        <p:spPr>
+          <a:xfrm>
+            <a:off x="7991856" y="2340864"/>
+            <a:ext cx="3422599" cy="274320"/>
+          </a:xfrm>
+          <a:prstGeom prst="rect">
+            <a:avLst/>
+          </a:prstGeom>
+          <a:noFill/>
+          <a:ln/>
+        </p:spPr>
+        <p:txBody>
+          <a:bodyPr wrap="square" lIns="0" tIns="0" rIns="0" bIns="0" rtlCol="0" anchor="ctr"/>
+          <a:lstStyle/>
+          <a:p>
+            <a:pPr algn="l" indent="0" marL="0">
+              <a:buNone/>
+            </a:pPr>
+            <a:r>
+              <a:rPr lang="en-US" sz="1150" b="1" dirty="0">
+                <a:solidFill>
+                  <a:srgbClr val="1B1B18"/>
+                </a:solidFill>
+                <a:latin typeface="Calibri" pitchFamily="34" charset="0"/>
+                <a:ea typeface="Calibri" pitchFamily="34" charset="-122"/>
+                <a:cs typeface="Calibri" pitchFamily="34" charset="-120"/>
+              </a:rPr>
+              <a:t>Acuity </a:t>
+            </a:r>
+            <a:pPr algn="l" indent="0" marL="0">
+              <a:buNone/>
+            </a:pPr>
+            <a:r>
+              <a:rPr lang="en-US" sz="1150" dirty="0">
+                <a:solidFill>
+                  <a:srgbClr val="1B1B18"/>
+                </a:solidFill>
+                <a:latin typeface="Calibri" pitchFamily="34" charset="0"/>
+                <a:ea typeface="Calibri" pitchFamily="34" charset="-122"/>
+                <a:cs typeface="Calibri" pitchFamily="34" charset="-120"/>
+              </a:rPr>
+              <a:t>decisions happen during the day</a:t>
+            </a:r>
+            <a:endParaRPr lang="en-US" sz="1150" dirty="0"/>
+          </a:p>
+        </p:txBody>
+      </p:sp>
+      <p:sp>
+        <p:nvSpPr>
+          <p:cNvPr id="19" name="Shape 17"/>
+          <p:cNvSpPr/>
+          <p:nvPr/>
+        </p:nvSpPr>
+        <p:spPr>
+          <a:xfrm>
+            <a:off x="7790688" y="2734056"/>
+            <a:ext cx="73152" cy="73152"/>
+          </a:xfrm>
+          <a:prstGeom prst="ellipse">
+            <a:avLst/>
+          </a:prstGeom>
+          <a:solidFill>
+            <a:srgbClr val="5A6CE6"/>
+          </a:solidFill>
+          <a:ln/>
+        </p:spPr>
       </p:sp>
       <p:sp>
         <p:nvSpPr>
           <p:cNvPr id="20" name="Text 18"/>
+          <p:cNvSpPr/>
+          <p:nvPr/>
+        </p:nvSpPr>
+        <p:spPr>
+          <a:xfrm>
+            <a:off x="7991856" y="2670048"/>
+            <a:ext cx="3422599" cy="274320"/>
+          </a:xfrm>
+          <a:prstGeom prst="rect">
+            <a:avLst/>
+          </a:prstGeom>
+          <a:noFill/>
+          <a:ln/>
+        </p:spPr>
+        <p:txBody>
+          <a:bodyPr wrap="square" lIns="0" tIns="0" rIns="0" bIns="0" rtlCol="0" anchor="ctr"/>
+          <a:lstStyle/>
+          <a:p>
+            <a:pPr algn="l" indent="0" marL="0">
+              <a:buNone/>
+            </a:pPr>
+            <a:r>
+              <a:rPr lang="en-US" sz="1150" b="1" dirty="0">
+                <a:solidFill>
+                  <a:srgbClr val="1B1B18"/>
+                </a:solidFill>
+                <a:latin typeface="Calibri" pitchFamily="34" charset="0"/>
+                <a:ea typeface="Calibri" pitchFamily="34" charset="-122"/>
+                <a:cs typeface="Calibri" pitchFamily="34" charset="-120"/>
+              </a:rPr>
+              <a:t>Family trust </a:t>
+            </a:r>
+            <a:pPr algn="l" indent="0" marL="0">
+              <a:buNone/>
+            </a:pPr>
+            <a:r>
+              <a:rPr lang="en-US" sz="1150" dirty="0">
+                <a:solidFill>
+                  <a:srgbClr val="1B1B18"/>
+                </a:solidFill>
+                <a:latin typeface="Calibri" pitchFamily="34" charset="0"/>
+                <a:ea typeface="Calibri" pitchFamily="34" charset="-122"/>
+                <a:cs typeface="Calibri" pitchFamily="34" charset="-120"/>
+              </a:rPr>
+              <a:t>is built during the day</a:t>
+            </a:r>
+            <a:endParaRPr lang="en-US" sz="1150" dirty="0"/>
+          </a:p>
+        </p:txBody>
+      </p:sp>
+      <p:sp>
+        <p:nvSpPr>
+          <p:cNvPr id="21" name="Shape 19"/>
+          <p:cNvSpPr/>
+          <p:nvPr/>
+        </p:nvSpPr>
+        <p:spPr>
+          <a:xfrm>
+            <a:off x="7790688" y="3063240"/>
+            <a:ext cx="73152" cy="73152"/>
+          </a:xfrm>
+          <a:prstGeom prst="ellipse">
+            <a:avLst/>
+          </a:prstGeom>
+          <a:solidFill>
+            <a:srgbClr val="5A6CE6"/>
+          </a:solidFill>
+          <a:ln/>
+        </p:spPr>
+      </p:sp>
+      <p:sp>
+        <p:nvSpPr>
+          <p:cNvPr id="22" name="Text 20"/>
+          <p:cNvSpPr/>
+          <p:nvPr/>
+        </p:nvSpPr>
+        <p:spPr>
+          <a:xfrm>
+            <a:off x="7991856" y="2999232"/>
+            <a:ext cx="3422599" cy="274320"/>
+          </a:xfrm>
+          <a:prstGeom prst="rect">
+            <a:avLst/>
+          </a:prstGeom>
+          <a:noFill/>
+          <a:ln/>
+        </p:spPr>
+        <p:txBody>
+          <a:bodyPr wrap="square" lIns="0" tIns="0" rIns="0" bIns="0" rtlCol="0" anchor="ctr"/>
+          <a:lstStyle/>
+          <a:p>
+            <a:pPr algn="l" indent="0" marL="0">
+              <a:buNone/>
+            </a:pPr>
+            <a:r>
+              <a:rPr lang="en-US" sz="1150" b="1" dirty="0">
+                <a:solidFill>
+                  <a:srgbClr val="1B1B18"/>
+                </a:solidFill>
+                <a:latin typeface="Calibri" pitchFamily="34" charset="0"/>
+                <a:ea typeface="Calibri" pitchFamily="34" charset="-122"/>
+                <a:cs typeface="Calibri" pitchFamily="34" charset="-120"/>
+              </a:rPr>
+              <a:t>The care record </a:t>
+            </a:r>
+            <a:pPr algn="l" indent="0" marL="0">
+              <a:buNone/>
+            </a:pPr>
+            <a:r>
+              <a:rPr lang="en-US" sz="1150" dirty="0">
+                <a:solidFill>
+                  <a:srgbClr val="1B1B18"/>
+                </a:solidFill>
+                <a:latin typeface="Calibri" pitchFamily="34" charset="0"/>
+                <a:ea typeface="Calibri" pitchFamily="34" charset="-122"/>
+                <a:cs typeface="Calibri" pitchFamily="34" charset="-120"/>
+              </a:rPr>
+              <a:t>is updated during the day</a:t>
+            </a:r>
+            <a:endParaRPr lang="en-US" sz="1150" dirty="0"/>
+          </a:p>
+        </p:txBody>
+      </p:sp>
+      <p:sp>
+        <p:nvSpPr>
+          <p:cNvPr id="23" name="Shape 21"/>
+          <p:cNvSpPr/>
+          <p:nvPr/>
+        </p:nvSpPr>
+        <p:spPr>
+          <a:xfrm>
+            <a:off x="7790688" y="3392424"/>
+            <a:ext cx="73152" cy="73152"/>
+          </a:xfrm>
+          <a:prstGeom prst="ellipse">
+            <a:avLst/>
+          </a:prstGeom>
+          <a:solidFill>
+            <a:srgbClr val="5A6CE6"/>
+          </a:solidFill>
+          <a:ln/>
+        </p:spPr>
+      </p:sp>
+      <p:sp>
+        <p:nvSpPr>
+          <p:cNvPr id="24" name="Text 22"/>
+          <p:cNvSpPr/>
+          <p:nvPr/>
+        </p:nvSpPr>
+        <p:spPr>
+          <a:xfrm>
+            <a:off x="7991856" y="3328416"/>
+            <a:ext cx="3422599" cy="274320"/>
+          </a:xfrm>
+          <a:prstGeom prst="rect">
+            <a:avLst/>
+          </a:prstGeom>
+          <a:noFill/>
+          <a:ln/>
+        </p:spPr>
+        <p:txBody>
+          <a:bodyPr wrap="square" lIns="0" tIns="0" rIns="0" bIns="0" rtlCol="0" anchor="ctr"/>
+          <a:lstStyle/>
+          <a:p>
+            <a:pPr algn="l" indent="0" marL="0">
+              <a:buNone/>
+            </a:pPr>
+            <a:r>
+              <a:rPr lang="en-US" sz="1150" b="1" dirty="0">
+                <a:solidFill>
+                  <a:srgbClr val="1B1B18"/>
+                </a:solidFill>
+                <a:latin typeface="Calibri" pitchFamily="34" charset="0"/>
+                <a:ea typeface="Calibri" pitchFamily="34" charset="-122"/>
+                <a:cs typeface="Calibri" pitchFamily="34" charset="-120"/>
+              </a:rPr>
+              <a:t>ROI </a:t>
+            </a:r>
+            <a:pPr algn="l" indent="0" marL="0">
+              <a:buNone/>
+            </a:pPr>
+            <a:r>
+              <a:rPr lang="en-US" sz="1150" dirty="0">
+                <a:solidFill>
+                  <a:srgbClr val="1B1B18"/>
+                </a:solidFill>
+                <a:latin typeface="Calibri" pitchFamily="34" charset="0"/>
+                <a:ea typeface="Calibri" pitchFamily="34" charset="-122"/>
+                <a:cs typeface="Calibri" pitchFamily="34" charset="-120"/>
+              </a:rPr>
+              <a:t>is defended during the day</a:t>
+            </a:r>
+            <a:endParaRPr lang="en-US" sz="1150" dirty="0"/>
+          </a:p>
+        </p:txBody>
+      </p:sp>
+      <p:sp>
+        <p:nvSpPr>
+          <p:cNvPr id="25" name="Shape 23"/>
+          <p:cNvSpPr/>
+          <p:nvPr/>
+        </p:nvSpPr>
+        <p:spPr>
+          <a:xfrm>
+            <a:off x="7772400" y="3767328"/>
+            <a:ext cx="3642055" cy="1188720"/>
+          </a:xfrm>
+          <a:prstGeom prst="roundRect">
+            <a:avLst>
+              <a:gd name="adj" fmla="val 7692"/>
+            </a:avLst>
+          </a:prstGeom>
+          <a:solidFill>
+            <a:srgbClr val="EEEEE9"/>
+          </a:solidFill>
+          <a:ln/>
+        </p:spPr>
+      </p:sp>
+      <p:sp>
+        <p:nvSpPr>
+          <p:cNvPr id="26" name="Text 24"/>
+          <p:cNvSpPr/>
+          <p:nvPr/>
+        </p:nvSpPr>
+        <p:spPr>
+          <a:xfrm>
+            <a:off x="8046720" y="3950208"/>
+            <a:ext cx="3642055" cy="201168"/>
+          </a:xfrm>
+          <a:prstGeom prst="rect">
+            <a:avLst/>
+          </a:prstGeom>
+          <a:noFill/>
+          <a:ln/>
+        </p:spPr>
+        <p:txBody>
+          <a:bodyPr wrap="square" lIns="0" tIns="0" rIns="0" bIns="0" rtlCol="0" anchor="ctr"/>
+          <a:lstStyle/>
+          <a:p>
+            <a:pPr algn="l" indent="0" marL="0">
+              <a:buNone/>
+            </a:pPr>
+            <a:r>
+              <a:rPr lang="en-US" sz="950" b="1" spc="40" kern="0" dirty="0">
+                <a:solidFill>
+                  <a:srgbClr val="83837B"/>
+                </a:solidFill>
+                <a:latin typeface="Calibri" pitchFamily="34" charset="0"/>
+                <a:ea typeface="Calibri" pitchFamily="34" charset="-122"/>
+                <a:cs typeface="Calibri" pitchFamily="34" charset="-120"/>
+              </a:rPr>
+              <a:t>Renewal signal</a:t>
+            </a:r>
+            <a:endParaRPr lang="en-US" sz="950" dirty="0"/>
+          </a:p>
+        </p:txBody>
+      </p:sp>
+      <p:sp>
+        <p:nvSpPr>
+          <p:cNvPr id="27" name="Text 25"/>
+          <p:cNvSpPr/>
+          <p:nvPr/>
+        </p:nvSpPr>
+        <p:spPr>
+          <a:xfrm>
+            <a:off x="8046720" y="4169664"/>
+            <a:ext cx="3093415" cy="310896"/>
+          </a:xfrm>
+          <a:prstGeom prst="rect">
+            <a:avLst/>
+          </a:prstGeom>
+          <a:noFill/>
+          <a:ln/>
+        </p:spPr>
+        <p:txBody>
+          <a:bodyPr wrap="square" lIns="0" tIns="0" rIns="0" bIns="0" rtlCol="0" anchor="t"/>
+          <a:lstStyle/>
+          <a:p>
+            <a:pPr algn="l" indent="0" marL="0">
+              <a:buNone/>
+            </a:pPr>
+            <a:r>
+              <a:rPr lang="en-US" sz="1350" i="1" dirty="0">
+                <a:solidFill>
+                  <a:srgbClr val="1B1B18"/>
+                </a:solidFill>
+                <a:latin typeface="Calibri" pitchFamily="34" charset="0"/>
+                <a:ea typeface="Calibri" pitchFamily="34" charset="-122"/>
+                <a:cs typeface="Calibri" pitchFamily="34" charset="-120"/>
+              </a:rPr>
+              <a:t>“Yes, but the clock's running.”</a:t>
+            </a:r>
+            <a:endParaRPr lang="en-US" sz="1350" dirty="0"/>
+          </a:p>
+        </p:txBody>
+      </p:sp>
+      <p:sp>
+        <p:nvSpPr>
+          <p:cNvPr id="28" name="Text 26"/>
+          <p:cNvSpPr/>
+          <p:nvPr/>
+        </p:nvSpPr>
+        <p:spPr>
+          <a:xfrm>
+            <a:off x="8046720" y="4535424"/>
+            <a:ext cx="3093415" cy="365760"/>
+          </a:xfrm>
+          <a:prstGeom prst="rect">
+            <a:avLst/>
+          </a:prstGeom>
+          <a:noFill/>
+          <a:ln/>
+        </p:spPr>
+        <p:txBody>
+          <a:bodyPr wrap="square" lIns="0" tIns="0" rIns="0" bIns="0" rtlCol="0" anchor="t"/>
+          <a:lstStyle/>
+          <a:p>
+            <a:pPr algn="l" indent="0" marL="0">
+              <a:lnSpc>
+                <a:spcPct val="108000"/>
+              </a:lnSpc>
+              <a:buNone/>
+            </a:pPr>
+            <a:r>
+              <a:rPr lang="en-US" sz="1050" dirty="0">
+                <a:solidFill>
+                  <a:srgbClr val="83837B"/>
+                </a:solidFill>
+                <a:latin typeface="Calibri" pitchFamily="34" charset="0"/>
+                <a:ea typeface="Calibri" pitchFamily="34" charset="-122"/>
+                <a:cs typeface="Calibri" pitchFamily="34" charset="-120"/>
+              </a:rPr>
+              <a:t>Owners are already asking for ROI beyond fall response.</a:t>
+            </a:r>
+            <a:endParaRPr lang="en-US" sz="1050" dirty="0"/>
+          </a:p>
+        </p:txBody>
+      </p:sp>
+      <p:sp>
+        <p:nvSpPr>
+          <p:cNvPr id="29" name="Shape 27"/>
+          <p:cNvSpPr/>
+          <p:nvPr/>
+        </p:nvSpPr>
+        <p:spPr>
+          <a:xfrm>
+            <a:off x="777240" y="5468112"/>
+            <a:ext cx="10637215" cy="0"/>
+          </a:xfrm>
+          <a:prstGeom prst="line">
+            <a:avLst/>
+          </a:prstGeom>
+          <a:noFill/>
+          <a:ln w="9525">
+            <a:solidFill>
+              <a:srgbClr val="E2E2DC"/>
+            </a:solidFill>
+            <a:prstDash val="solid"/>
+          </a:ln>
+        </p:spPr>
+      </p:sp>
+      <p:sp>
+        <p:nvSpPr>
+          <p:cNvPr id="30" name="Text 28"/>
+          <p:cNvSpPr/>
+          <p:nvPr/>
+        </p:nvSpPr>
+        <p:spPr>
+          <a:xfrm>
+            <a:off x="777240" y="5577840"/>
+            <a:ext cx="10637215" cy="365760"/>
+          </a:xfrm>
+          <a:prstGeom prst="rect">
+            <a:avLst/>
+          </a:prstGeom>
+          <a:noFill/>
+          <a:ln/>
+        </p:spPr>
+        <p:txBody>
+          <a:bodyPr wrap="square" lIns="0" tIns="0" rIns="0" bIns="0" rtlCol="0" anchor="ctr"/>
+          <a:lstStyle/>
+          <a:p>
+            <a:pPr algn="l" indent="0" marL="0">
+              <a:buNone/>
+            </a:pPr>
+            <a:r>
+              <a:rPr lang="en-US" sz="1500" dirty="0">
+                <a:solidFill>
+                  <a:srgbClr val="1B1B18"/>
+                </a:solidFill>
+                <a:latin typeface="Calibri" pitchFamily="34" charset="0"/>
+                <a:ea typeface="Calibri" pitchFamily="34" charset="-122"/>
+                <a:cs typeface="Calibri" pitchFamily="34" charset="-120"/>
+              </a:rPr>
+              <a:t>Teton is used when </a:t>
+            </a:r>
+            <a:pPr algn="l" indent="0" marL="0">
+              <a:buNone/>
+            </a:pPr>
+            <a:r>
+              <a:rPr lang="en-US" sz="1500" b="1" dirty="0">
+                <a:solidFill>
+                  <a:srgbClr val="5A6CE6"/>
+                </a:solidFill>
+                <a:latin typeface="Calibri" pitchFamily="34" charset="0"/>
+                <a:ea typeface="Calibri" pitchFamily="34" charset="-122"/>
+                <a:cs typeface="Calibri" pitchFamily="34" charset="-120"/>
+              </a:rPr>
+              <a:t>urgent events</a:t>
+            </a:r>
+            <a:pPr algn="l" indent="0" marL="0">
+              <a:buNone/>
+            </a:pPr>
+            <a:r>
+              <a:rPr lang="en-US" sz="1500" dirty="0">
+                <a:solidFill>
+                  <a:srgbClr val="1B1B18"/>
+                </a:solidFill>
+                <a:latin typeface="Calibri" pitchFamily="34" charset="0"/>
+                <a:ea typeface="Calibri" pitchFamily="34" charset="-122"/>
+                <a:cs typeface="Calibri" pitchFamily="34" charset="-120"/>
+              </a:rPr>
+              <a:t> happen. The opportunity is when </a:t>
+            </a:r>
+            <a:pPr algn="l" indent="0" marL="0">
+              <a:buNone/>
+            </a:pPr>
+            <a:r>
+              <a:rPr lang="en-US" sz="1500" b="1" dirty="0">
+                <a:solidFill>
+                  <a:srgbClr val="5A6CE6"/>
+                </a:solidFill>
+                <a:latin typeface="Calibri" pitchFamily="34" charset="0"/>
+                <a:ea typeface="Calibri" pitchFamily="34" charset="-122"/>
+                <a:cs typeface="Calibri" pitchFamily="34" charset="-120"/>
+              </a:rPr>
+              <a:t>care decisions</a:t>
+            </a:r>
+            <a:pPr algn="l" indent="0" marL="0">
+              <a:buNone/>
+            </a:pPr>
+            <a:r>
+              <a:rPr lang="en-US" sz="1500" dirty="0">
+                <a:solidFill>
+                  <a:srgbClr val="1B1B18"/>
+                </a:solidFill>
+                <a:latin typeface="Calibri" pitchFamily="34" charset="0"/>
+                <a:ea typeface="Calibri" pitchFamily="34" charset="-122"/>
+                <a:cs typeface="Calibri" pitchFamily="34" charset="-120"/>
+              </a:rPr>
+              <a:t> happen.</a:t>
+            </a:r>
+            <a:endParaRPr lang="en-US" sz="1500" dirty="0"/>
+          </a:p>
+        </p:txBody>
+      </p:sp>
+      <p:sp>
+        <p:nvSpPr>
+          <p:cNvPr id="31" name="Text 29"/>
           <p:cNvSpPr/>
           <p:nvPr/>
         </p:nvSpPr>
@@ -2079,7 +2471,7 @@
       </p:sp>
       <p:sp>
         <p:nvSpPr>
-          <p:cNvPr id="21" name="Text 19"/>
+          <p:cNvPr id="32" name="Text 30"/>
           <p:cNvSpPr/>
           <p:nvPr/>
         </p:nvSpPr>
@@ -2216,7 +2608,7 @@
         <p:spPr>
           <a:xfrm>
             <a:off x="777240" y="676656"/>
-            <a:ext cx="10332720" cy="822960"/>
+            <a:ext cx="10424160" cy="822960"/>
           </a:xfrm>
           <a:prstGeom prst="rect">
             <a:avLst/>
@@ -2235,7 +2627,7 @@
               <a:buNone/>
             </a:pPr>
             <a:r>
-              <a:rPr lang="en-US" sz="2500" b="1" dirty="0">
+              <a:rPr lang="en-US" sz="2400" b="1" dirty="0">
                 <a:solidFill>
                   <a:srgbClr val="1B1B18"/>
                 </a:solidFill>
@@ -2243,9 +2635,9 @@
                 <a:ea typeface="Calibri" pitchFamily="34" charset="-122"/>
                 <a:cs typeface="Calibri" pitchFamily="34" charset="-120"/>
               </a:rPr>
-              <a:t>The missed opportunity is gradual decline before crisis</a:t>
-            </a:r>
-            <a:endParaRPr lang="en-US" sz="2500" dirty="0"/>
+              <a:t>The missed opportunity is decline visible weeks before crisis</a:t>
+            </a:r>
+            <a:endParaRPr lang="en-US" sz="2400" dirty="0"/>
           </a:p>
         </p:txBody>
       </p:sp>
@@ -2257,8 +2649,8 @@
         </p:nvSpPr>
         <p:spPr>
           <a:xfrm>
-            <a:off x="777240" y="1481328"/>
-            <a:ext cx="9875520" cy="502920"/>
+            <a:off x="777240" y="1463040"/>
+            <a:ext cx="10058400" cy="457200"/>
           </a:xfrm>
           <a:prstGeom prst="rect">
             <a:avLst/>
@@ -2277,7 +2669,7 @@
               <a:buNone/>
             </a:pPr>
             <a:r>
-              <a:rPr lang="en-US" sz="1300" dirty="0">
+              <a:rPr lang="en-US" sz="1250" dirty="0">
                 <a:solidFill>
                   <a:srgbClr val="83837B"/>
                 </a:solidFill>
@@ -2285,9 +2677,9 @@
                 <a:ea typeface="Calibri" pitchFamily="34" charset="-122"/>
                 <a:cs typeface="Calibri" pitchFamily="34" charset="-120"/>
               </a:rPr>
-              <a:t>Teton may see the pattern weeks earlier, but the current workflow does not turn that pattern into review, documentation, or action.</a:t>
-            </a:r>
-            <a:endParaRPr lang="en-US" sz="1300" dirty="0"/>
+              <a:t>In the interview, the signal existed before the organization had a workflow to review, document, or act on it.</a:t>
+            </a:r>
+            <a:endParaRPr lang="en-US" sz="1250" dirty="0"/>
           </a:p>
         </p:txBody>
       </p:sp>
@@ -2299,8 +2691,8 @@
         </p:nvSpPr>
         <p:spPr>
           <a:xfrm>
-            <a:off x="3221182" y="2148840"/>
-            <a:ext cx="0" cy="1371600"/>
+            <a:off x="3125585" y="2048256"/>
+            <a:ext cx="0" cy="1188720"/>
           </a:xfrm>
           <a:prstGeom prst="line">
             <a:avLst/>
@@ -2322,8 +2714,8 @@
         </p:nvSpPr>
         <p:spPr>
           <a:xfrm>
-            <a:off x="11201400" y="2148840"/>
-            <a:ext cx="0" cy="1965960"/>
+            <a:off x="11064240" y="2048256"/>
+            <a:ext cx="0" cy="1572768"/>
           </a:xfrm>
           <a:prstGeom prst="line">
             <a:avLst/>
@@ -2345,7 +2737,7 @@
         </p:nvSpPr>
         <p:spPr>
           <a:xfrm>
-            <a:off x="777240" y="2487168"/>
+            <a:off x="777240" y="2286000"/>
             <a:ext cx="1463040" cy="201168"/>
           </a:xfrm>
           <a:prstGeom prst="rect">
@@ -2362,7 +2754,7 @@
               <a:buNone/>
             </a:pPr>
             <a:r>
-              <a:rPr lang="en-US" sz="900" b="1" spc="130" kern="0" dirty="0">
+              <a:rPr lang="en-US" sz="900" b="1" spc="40" kern="0" dirty="0">
                 <a:solidFill>
                   <a:srgbClr val="83837B"/>
                 </a:solidFill>
@@ -2370,7 +2762,7 @@
                 <a:ea typeface="Calibri" pitchFamily="34" charset="-122"/>
                 <a:cs typeface="Calibri" pitchFamily="34" charset="-120"/>
               </a:rPr>
-              <a:t>TETON SIGNAL</a:t>
+              <a:t>Teton signal</a:t>
             </a:r>
             <a:endParaRPr lang="en-US" sz="900" dirty="0"/>
           </a:p>
@@ -2384,7 +2776,7 @@
         </p:nvSpPr>
         <p:spPr>
           <a:xfrm>
-            <a:off x="777240" y="3346704"/>
+            <a:off x="777240" y="2999232"/>
             <a:ext cx="1463040" cy="201168"/>
           </a:xfrm>
           <a:prstGeom prst="rect">
@@ -2401,7 +2793,7 @@
               <a:buNone/>
             </a:pPr>
             <a:r>
-              <a:rPr lang="en-US" sz="900" b="1" spc="130" kern="0" dirty="0">
+              <a:rPr lang="en-US" sz="900" b="1" spc="40" kern="0" dirty="0">
                 <a:solidFill>
                   <a:srgbClr val="83837B"/>
                 </a:solidFill>
@@ -2409,7 +2801,7 @@
                 <a:ea typeface="Calibri" pitchFamily="34" charset="-122"/>
                 <a:cs typeface="Calibri" pitchFamily="34" charset="-120"/>
               </a:rPr>
-              <a:t>CARE TEAM</a:t>
+              <a:t>Care team</a:t>
             </a:r>
             <a:endParaRPr lang="en-US" sz="900" dirty="0"/>
           </a:p>
@@ -2423,7 +2815,7 @@
         </p:nvSpPr>
         <p:spPr>
           <a:xfrm>
-            <a:off x="777240" y="3913632"/>
+            <a:off x="777240" y="3493008"/>
             <a:ext cx="1463040" cy="201168"/>
           </a:xfrm>
           <a:prstGeom prst="rect">
@@ -2440,7 +2832,7 @@
               <a:buNone/>
             </a:pPr>
             <a:r>
-              <a:rPr lang="en-US" sz="900" b="1" spc="130" kern="0" dirty="0">
+              <a:rPr lang="en-US" sz="900" b="1" spc="40" kern="0" dirty="0">
                 <a:solidFill>
                   <a:srgbClr val="83837B"/>
                 </a:solidFill>
@@ -2448,7 +2840,7 @@
                 <a:ea typeface="Calibri" pitchFamily="34" charset="-122"/>
                 <a:cs typeface="Calibri" pitchFamily="34" charset="-120"/>
               </a:rPr>
-              <a:t>OUTCOME</a:t>
+              <a:t>Outcome</a:t>
             </a:r>
             <a:endParaRPr lang="en-US" sz="900" dirty="0"/>
           </a:p>
@@ -2462,8 +2854,8 @@
         </p:nvSpPr>
         <p:spPr>
           <a:xfrm flipV="1">
-            <a:off x="2423160" y="2684819"/>
-            <a:ext cx="798022" cy="100936"/>
+            <a:off x="2331720" y="2479431"/>
+            <a:ext cx="793865" cy="81241"/>
           </a:xfrm>
           <a:prstGeom prst="line">
             <a:avLst/>
@@ -2485,8 +2877,8 @@
         </p:nvSpPr>
         <p:spPr>
           <a:xfrm flipV="1">
-            <a:off x="3221182" y="2569464"/>
-            <a:ext cx="1596044" cy="115355"/>
+            <a:off x="3125585" y="2386584"/>
+            <a:ext cx="1587731" cy="92847"/>
           </a:xfrm>
           <a:prstGeom prst="line">
             <a:avLst/>
@@ -2508,8 +2900,8 @@
         </p:nvSpPr>
         <p:spPr>
           <a:xfrm flipV="1">
-            <a:off x="4817225" y="2454109"/>
-            <a:ext cx="1596044" cy="115355"/>
+            <a:off x="4713316" y="2293737"/>
+            <a:ext cx="1587731" cy="92847"/>
           </a:xfrm>
           <a:prstGeom prst="line">
             <a:avLst/>
@@ -2531,8 +2923,8 @@
         </p:nvSpPr>
         <p:spPr>
           <a:xfrm flipV="1">
-            <a:off x="6413269" y="2338754"/>
-            <a:ext cx="1596044" cy="115355"/>
+            <a:off x="6301047" y="2200890"/>
+            <a:ext cx="1587731" cy="92847"/>
           </a:xfrm>
           <a:prstGeom prst="line">
             <a:avLst/>
@@ -2554,8 +2946,8 @@
         </p:nvSpPr>
         <p:spPr>
           <a:xfrm flipV="1">
-            <a:off x="8009313" y="2252238"/>
-            <a:ext cx="1596044" cy="86516"/>
+            <a:off x="7888778" y="2131255"/>
+            <a:ext cx="1587731" cy="69635"/>
           </a:xfrm>
           <a:prstGeom prst="line">
             <a:avLst/>
@@ -2577,8 +2969,8 @@
         </p:nvSpPr>
         <p:spPr>
           <a:xfrm>
-            <a:off x="9605356" y="2252238"/>
-            <a:ext cx="1596044" cy="0"/>
+            <a:off x="9476509" y="2131255"/>
+            <a:ext cx="1587731" cy="0"/>
           </a:xfrm>
           <a:prstGeom prst="line">
             <a:avLst/>
@@ -2600,7 +2992,7 @@
         </p:nvSpPr>
         <p:spPr>
           <a:xfrm>
-            <a:off x="2382012" y="2744607"/>
+            <a:off x="2290572" y="2519524"/>
             <a:ext cx="82296" cy="82296"/>
           </a:xfrm>
           <a:prstGeom prst="ellipse">
@@ -2620,7 +3012,7 @@
         </p:nvSpPr>
         <p:spPr>
           <a:xfrm>
-            <a:off x="3180034" y="2643671"/>
+            <a:off x="3084437" y="2438283"/>
             <a:ext cx="82296" cy="82296"/>
           </a:xfrm>
           <a:prstGeom prst="ellipse">
@@ -2640,7 +3032,7 @@
         </p:nvSpPr>
         <p:spPr>
           <a:xfrm>
-            <a:off x="4776077" y="2528316"/>
+            <a:off x="4672168" y="2345436"/>
             <a:ext cx="82296" cy="82296"/>
           </a:xfrm>
           <a:prstGeom prst="ellipse">
@@ -2660,7 +3052,7 @@
         </p:nvSpPr>
         <p:spPr>
           <a:xfrm>
-            <a:off x="6372121" y="2412961"/>
+            <a:off x="6259899" y="2252589"/>
             <a:ext cx="82296" cy="82296"/>
           </a:xfrm>
           <a:prstGeom prst="ellipse">
@@ -2680,7 +3072,7 @@
         </p:nvSpPr>
         <p:spPr>
           <a:xfrm>
-            <a:off x="7968165" y="2297606"/>
+            <a:off x="7847630" y="2159742"/>
             <a:ext cx="82296" cy="82296"/>
           </a:xfrm>
           <a:prstGeom prst="ellipse">
@@ -2700,7 +3092,7 @@
         </p:nvSpPr>
         <p:spPr>
           <a:xfrm>
-            <a:off x="9564208" y="2211090"/>
+            <a:off x="9435361" y="2090107"/>
             <a:ext cx="82296" cy="82296"/>
           </a:xfrm>
           <a:prstGeom prst="ellipse">
@@ -2720,7 +3112,7 @@
         </p:nvSpPr>
         <p:spPr>
           <a:xfrm>
-            <a:off x="11160252" y="2211090"/>
+            <a:off x="11023092" y="2090107"/>
             <a:ext cx="82296" cy="82296"/>
           </a:xfrm>
           <a:prstGeom prst="ellipse">
@@ -2740,7 +3132,7 @@
         </p:nvSpPr>
         <p:spPr>
           <a:xfrm>
-            <a:off x="3143458" y="2607095"/>
+            <a:off x="3047861" y="2401707"/>
             <a:ext cx="155448" cy="155448"/>
           </a:xfrm>
           <a:prstGeom prst="ellipse">
@@ -2765,7 +3157,7 @@
         </p:nvSpPr>
         <p:spPr>
           <a:xfrm>
-            <a:off x="3385774" y="2231136"/>
+            <a:off x="3271889" y="2139696"/>
             <a:ext cx="3108960" cy="219456"/>
           </a:xfrm>
           <a:prstGeom prst="rect">
@@ -2804,12 +3196,12 @@
         </p:nvSpPr>
         <p:spPr>
           <a:xfrm>
-            <a:off x="3221182" y="3246120"/>
-            <a:ext cx="7980218" cy="310896"/>
+            <a:off x="3125585" y="2926080"/>
+            <a:ext cx="7938655" cy="292608"/>
           </a:xfrm>
           <a:prstGeom prst="roundRect">
             <a:avLst>
-              <a:gd name="adj" fmla="val 17647"/>
+              <a:gd name="adj" fmla="val 18750"/>
             </a:avLst>
           </a:prstGeom>
           <a:solidFill>
@@ -2826,8 +3218,8 @@
         </p:nvSpPr>
         <p:spPr>
           <a:xfrm>
-            <a:off x="3221182" y="3246120"/>
-            <a:ext cx="7980218" cy="310896"/>
+            <a:off x="3125585" y="2926080"/>
+            <a:ext cx="7938655" cy="292608"/>
           </a:xfrm>
           <a:prstGeom prst="rect">
             <a:avLst/>
@@ -2843,7 +3235,7 @@
               <a:buNone/>
             </a:pPr>
             <a:r>
-              <a:rPr lang="en-US" sz="1100" dirty="0">
+              <a:rPr lang="en-US" sz="1050" dirty="0">
                 <a:solidFill>
                   <a:srgbClr val="83837B"/>
                 </a:solidFill>
@@ -2853,7 +3245,7 @@
               </a:rPr>
               <a:t>No owner  ·  not documented  ·  no reassessment</a:t>
             </a:r>
-            <a:endParaRPr lang="en-US" sz="1100" dirty="0"/>
+            <a:endParaRPr lang="en-US" sz="1050" dirty="0"/>
           </a:p>
         </p:txBody>
       </p:sp>
@@ -2865,7 +3257,7 @@
         </p:nvSpPr>
         <p:spPr>
           <a:xfrm>
-            <a:off x="11128248" y="3877056"/>
+            <a:off x="10991088" y="3456432"/>
             <a:ext cx="146304" cy="146304"/>
           </a:xfrm>
           <a:prstGeom prst="ellipse">
@@ -2885,8 +3277,8 @@
         </p:nvSpPr>
         <p:spPr>
           <a:xfrm>
-            <a:off x="5669280" y="3840480"/>
-            <a:ext cx="5312664" cy="237744"/>
+            <a:off x="5486400" y="3419856"/>
+            <a:ext cx="5358384" cy="237744"/>
           </a:xfrm>
           <a:prstGeom prst="rect">
             <a:avLst/>
@@ -2902,7 +3294,7 @@
               <a:buNone/>
             </a:pPr>
             <a:r>
-              <a:rPr lang="en-US" sz="1150" b="1" dirty="0">
+              <a:rPr lang="en-US" sz="1100" b="1" dirty="0">
                 <a:solidFill>
                   <a:srgbClr val="B0574C"/>
                 </a:solidFill>
@@ -2912,7 +3304,7 @@
               </a:rPr>
               <a:t>Week 12 — fall, hospitalization, reassessment</a:t>
             </a:r>
-            <a:endParaRPr lang="en-US" sz="1150" dirty="0"/>
+            <a:endParaRPr lang="en-US" sz="1100" dirty="0"/>
           </a:p>
         </p:txBody>
       </p:sp>
@@ -2924,8 +3316,8 @@
         </p:nvSpPr>
         <p:spPr>
           <a:xfrm>
-            <a:off x="2423160" y="4261104"/>
-            <a:ext cx="8778240" cy="0"/>
+            <a:off x="2331720" y="3822192"/>
+            <a:ext cx="8732520" cy="0"/>
           </a:xfrm>
           <a:prstGeom prst="line">
             <a:avLst/>
@@ -2947,8 +3339,8 @@
         </p:nvSpPr>
         <p:spPr>
           <a:xfrm>
-            <a:off x="1783080" y="4297680"/>
-            <a:ext cx="1280160" cy="201168"/>
+            <a:off x="1691640" y="3858768"/>
+            <a:ext cx="1280160" cy="182880"/>
           </a:xfrm>
           <a:prstGeom prst="rect">
             <a:avLst/>
@@ -2986,8 +3378,8 @@
         </p:nvSpPr>
         <p:spPr>
           <a:xfrm>
-            <a:off x="5773189" y="4297680"/>
-            <a:ext cx="1280160" cy="201168"/>
+            <a:off x="5660967" y="3858768"/>
+            <a:ext cx="1280160" cy="182880"/>
           </a:xfrm>
           <a:prstGeom prst="rect">
             <a:avLst/>
@@ -3025,8 +3417,8 @@
         </p:nvSpPr>
         <p:spPr>
           <a:xfrm>
-            <a:off x="10561320" y="4297680"/>
-            <a:ext cx="1280160" cy="201168"/>
+            <a:off x="10424160" y="3858768"/>
+            <a:ext cx="1280160" cy="182880"/>
           </a:xfrm>
           <a:prstGeom prst="rect">
             <a:avLst/>
@@ -3058,67 +3450,14 @@
       </p:sp>
       <p:sp>
         <p:nvSpPr>
-          <p:cNvPr id="34" name="Text 32"/>
-          <p:cNvSpPr/>
-          <p:nvPr/>
-        </p:nvSpPr>
-        <p:spPr>
-          <a:xfrm>
-            <a:off x="777240" y="4681728"/>
-            <a:ext cx="10637215" cy="274320"/>
-          </a:xfrm>
-          <a:prstGeom prst="rect">
-            <a:avLst/>
-          </a:prstGeom>
-          <a:noFill/>
-          <a:ln/>
-        </p:spPr>
-        <p:txBody>
-          <a:bodyPr wrap="square" lIns="0" tIns="0" rIns="0" bIns="0" rtlCol="0" anchor="ctr"/>
-          <a:lstStyle/>
-          <a:p>
-            <a:pPr algn="l" indent="0" marL="0">
-              <a:buNone/>
-            </a:pPr>
-            <a:r>
-              <a:rPr lang="en-US" sz="1150" b="1" dirty="0">
-                <a:solidFill>
-                  <a:srgbClr val="1B1B18"/>
-                </a:solidFill>
-                <a:latin typeface="Calibri" pitchFamily="34" charset="0"/>
-                <a:ea typeface="Calibri" pitchFamily="34" charset="-122"/>
-                <a:cs typeface="Calibri" pitchFamily="34" charset="-120"/>
-              </a:rPr>
-              <a:t>What earlier review would have changed:  </a:t>
-            </a:r>
-            <a:pPr algn="l" indent="0" marL="0">
-              <a:buNone/>
-            </a:pPr>
-            <a:r>
-              <a:rPr lang="en-US" sz="1150" dirty="0">
-                <a:solidFill>
-                  <a:srgbClr val="83837B"/>
-                </a:solidFill>
-                <a:latin typeface="Calibri" pitchFamily="34" charset="0"/>
-                <a:ea typeface="Calibri" pitchFamily="34" charset="-122"/>
-                <a:cs typeface="Calibri" pitchFamily="34" charset="-120"/>
-              </a:rPr>
-              <a:t>care plan · family conversation · revenue alignment · renewal proof</a:t>
-            </a:r>
-            <a:endParaRPr lang="en-US" sz="1150" dirty="0"/>
-          </a:p>
-        </p:txBody>
-      </p:sp>
-      <p:sp>
-        <p:nvSpPr>
-          <p:cNvPr id="35" name="Shape 33"/>
-          <p:cNvSpPr/>
-          <p:nvPr/>
-        </p:nvSpPr>
-        <p:spPr>
-          <a:xfrm>
-            <a:off x="777240" y="5276088"/>
-            <a:ext cx="0" cy="581891"/>
+          <p:cNvPr id="34" name="Shape 32"/>
+          <p:cNvSpPr/>
+          <p:nvPr/>
+        </p:nvSpPr>
+        <p:spPr>
+          <a:xfrm>
+            <a:off x="777240" y="4197096"/>
+            <a:ext cx="0" cy="594360"/>
           </a:xfrm>
           <a:prstGeom prst="line">
             <a:avLst/>
@@ -3134,14 +3473,14 @@
       </p:sp>
       <p:sp>
         <p:nvSpPr>
-          <p:cNvPr id="36" name="Text 34"/>
-          <p:cNvSpPr/>
-          <p:nvPr/>
-        </p:nvSpPr>
-        <p:spPr>
-          <a:xfrm>
-            <a:off x="1033272" y="5257800"/>
-            <a:ext cx="10168128" cy="800100"/>
+          <p:cNvPr id="35" name="Text 33"/>
+          <p:cNvSpPr/>
+          <p:nvPr/>
+        </p:nvSpPr>
+        <p:spPr>
+          <a:xfrm>
+            <a:off x="1014984" y="4169664"/>
+            <a:ext cx="10186416" cy="792480"/>
           </a:xfrm>
           <a:prstGeom prst="rect">
             <a:avLst/>
@@ -3160,7 +3499,7 @@
               <a:buNone/>
             </a:pPr>
             <a:r>
-              <a:rPr lang="en-US" sz="1400" i="1" dirty="0">
+              <a:rPr lang="en-US" sz="1300" i="1" dirty="0">
                 <a:solidFill>
                   <a:srgbClr val="1B1B18"/>
                 </a:solidFill>
@@ -3168,11 +3507,33 @@
                 <a:ea typeface="Calibri" pitchFamily="34" charset="-122"/>
                 <a:cs typeface="Calibri" pitchFamily="34" charset="-120"/>
               </a:rPr>
-              <a:t>If we'd caught it in week two instead of week twelve, that's a different care plan, a different conversation with the family, a different revenue line.</a:t>
-            </a:r>
-            <a:endParaRPr lang="en-US" sz="1400" dirty="0"/>
-          </a:p>
-        </p:txBody>
+              <a:t>If we'd caught it in week two instead of week twelve, that's a different care plan, a different family conversation, a different revenue line. — Dana, VP Health Services</a:t>
+            </a:r>
+            <a:endParaRPr lang="en-US" sz="1300" dirty="0"/>
+          </a:p>
+        </p:txBody>
+      </p:sp>
+      <p:sp>
+        <p:nvSpPr>
+          <p:cNvPr id="36" name="Shape 34"/>
+          <p:cNvSpPr/>
+          <p:nvPr/>
+        </p:nvSpPr>
+        <p:spPr>
+          <a:xfrm>
+            <a:off x="777240" y="4828032"/>
+            <a:ext cx="3381146" cy="1207008"/>
+          </a:xfrm>
+          <a:prstGeom prst="roundRect">
+            <a:avLst>
+              <a:gd name="adj" fmla="val 7576"/>
+            </a:avLst>
+          </a:prstGeom>
+          <a:solidFill>
+            <a:srgbClr val="EEEEE9"/>
+          </a:solidFill>
+          <a:ln/>
+        </p:spPr>
       </p:sp>
       <p:sp>
         <p:nvSpPr>
@@ -3182,8 +3543,47 @@
         </p:nvSpPr>
         <p:spPr>
           <a:xfrm>
-            <a:off x="1033272" y="5943600"/>
-            <a:ext cx="6400800" cy="219456"/>
+            <a:off x="1033272" y="5010912"/>
+            <a:ext cx="3381146" cy="201168"/>
+          </a:xfrm>
+          <a:prstGeom prst="rect">
+            <a:avLst/>
+          </a:prstGeom>
+          <a:noFill/>
+          <a:ln/>
+        </p:spPr>
+        <p:txBody>
+          <a:bodyPr wrap="square" lIns="0" tIns="0" rIns="0" bIns="0" rtlCol="0" anchor="ctr"/>
+          <a:lstStyle/>
+          <a:p>
+            <a:pPr algn="l" indent="0" marL="0">
+              <a:buNone/>
+            </a:pPr>
+            <a:r>
+              <a:rPr lang="en-US" sz="950" b="1" spc="40" kern="0" dirty="0">
+                <a:solidFill>
+                  <a:srgbClr val="83837B"/>
+                </a:solidFill>
+                <a:latin typeface="Calibri" pitchFamily="34" charset="0"/>
+                <a:ea typeface="Calibri" pitchFamily="34" charset="-122"/>
+                <a:cs typeface="Calibri" pitchFamily="34" charset="-120"/>
+              </a:rPr>
+              <a:t>Clinical cost</a:t>
+            </a:r>
+            <a:endParaRPr lang="en-US" sz="950" dirty="0"/>
+          </a:p>
+        </p:txBody>
+      </p:sp>
+      <p:sp>
+        <p:nvSpPr>
+          <p:cNvPr id="38" name="Text 36"/>
+          <p:cNvSpPr/>
+          <p:nvPr/>
+        </p:nvSpPr>
+        <p:spPr>
+          <a:xfrm>
+            <a:off x="1033272" y="5266944"/>
+            <a:ext cx="2869082" cy="640080"/>
           </a:xfrm>
           <a:prstGeom prst="rect">
             <a:avLst/>
@@ -3196,6 +3596,148 @@
           <a:lstStyle/>
           <a:p>
             <a:pPr algn="l" indent="0" marL="0">
+              <a:lnSpc>
+                <a:spcPct val="110000"/>
+              </a:lnSpc>
+              <a:buNone/>
+            </a:pPr>
+            <a:r>
+              <a:rPr lang="en-US" sz="1100" dirty="0">
+                <a:solidFill>
+                  <a:srgbClr val="1B1B18"/>
+                </a:solidFill>
+                <a:latin typeface="Calibri" pitchFamily="34" charset="0"/>
+                <a:ea typeface="Calibri" pitchFamily="34" charset="-122"/>
+                <a:cs typeface="Calibri" pitchFamily="34" charset="-120"/>
+              </a:rPr>
+              <a:t>Fall, hospitalization, and a scramble reassessment after the week-12 crisis.</a:t>
+            </a:r>
+            <a:endParaRPr lang="en-US" sz="1100" dirty="0"/>
+          </a:p>
+        </p:txBody>
+      </p:sp>
+      <p:sp>
+        <p:nvSpPr>
+          <p:cNvPr id="39" name="Shape 37"/>
+          <p:cNvSpPr/>
+          <p:nvPr/>
+        </p:nvSpPr>
+        <p:spPr>
+          <a:xfrm>
+            <a:off x="4405274" y="4828032"/>
+            <a:ext cx="3381146" cy="1207008"/>
+          </a:xfrm>
+          <a:prstGeom prst="roundRect">
+            <a:avLst>
+              <a:gd name="adj" fmla="val 7576"/>
+            </a:avLst>
+          </a:prstGeom>
+          <a:solidFill>
+            <a:srgbClr val="EEEEE9"/>
+          </a:solidFill>
+          <a:ln/>
+        </p:spPr>
+      </p:sp>
+      <p:sp>
+        <p:nvSpPr>
+          <p:cNvPr id="40" name="Text 38"/>
+          <p:cNvSpPr/>
+          <p:nvPr/>
+        </p:nvSpPr>
+        <p:spPr>
+          <a:xfrm>
+            <a:off x="4661306" y="5010912"/>
+            <a:ext cx="3381146" cy="201168"/>
+          </a:xfrm>
+          <a:prstGeom prst="rect">
+            <a:avLst/>
+          </a:prstGeom>
+          <a:noFill/>
+          <a:ln/>
+        </p:spPr>
+        <p:txBody>
+          <a:bodyPr wrap="square" lIns="0" tIns="0" rIns="0" bIns="0" rtlCol="0" anchor="ctr"/>
+          <a:lstStyle/>
+          <a:p>
+            <a:pPr algn="l" indent="0" marL="0">
+              <a:buNone/>
+            </a:pPr>
+            <a:r>
+              <a:rPr lang="en-US" sz="950" b="1" spc="40" kern="0" dirty="0">
+                <a:solidFill>
+                  <a:srgbClr val="83837B"/>
+                </a:solidFill>
+                <a:latin typeface="Calibri" pitchFamily="34" charset="0"/>
+                <a:ea typeface="Calibri" pitchFamily="34" charset="-122"/>
+                <a:cs typeface="Calibri" pitchFamily="34" charset="-120"/>
+              </a:rPr>
+              <a:t>Financial cost</a:t>
+            </a:r>
+            <a:endParaRPr lang="en-US" sz="950" dirty="0"/>
+          </a:p>
+        </p:txBody>
+      </p:sp>
+      <p:sp>
+        <p:nvSpPr>
+          <p:cNvPr id="41" name="Text 39"/>
+          <p:cNvSpPr/>
+          <p:nvPr/>
+        </p:nvSpPr>
+        <p:spPr>
+          <a:xfrm>
+            <a:off x="4661306" y="5212080"/>
+            <a:ext cx="3015386" cy="365760"/>
+          </a:xfrm>
+          <a:prstGeom prst="rect">
+            <a:avLst/>
+          </a:prstGeom>
+          <a:noFill/>
+          <a:ln/>
+        </p:spPr>
+        <p:txBody>
+          <a:bodyPr wrap="square" lIns="0" tIns="0" rIns="0" bIns="0" rtlCol="0" anchor="t"/>
+          <a:lstStyle/>
+          <a:p>
+            <a:pPr algn="l" indent="0" marL="0">
+              <a:buNone/>
+            </a:pPr>
+            <a:r>
+              <a:rPr lang="en-US" sz="2500" b="1" dirty="0">
+                <a:solidFill>
+                  <a:srgbClr val="1B1B18"/>
+                </a:solidFill>
+                <a:latin typeface="Calibri" pitchFamily="34" charset="0"/>
+                <a:ea typeface="Calibri" pitchFamily="34" charset="-122"/>
+                <a:cs typeface="Calibri" pitchFamily="34" charset="-120"/>
+              </a:rPr>
+              <a:t>~$90K / yr</a:t>
+            </a:r>
+            <a:endParaRPr lang="en-US" sz="2500" dirty="0"/>
+          </a:p>
+        </p:txBody>
+      </p:sp>
+      <p:sp>
+        <p:nvSpPr>
+          <p:cNvPr id="42" name="Text 40"/>
+          <p:cNvSpPr/>
+          <p:nvPr/>
+        </p:nvSpPr>
+        <p:spPr>
+          <a:xfrm>
+            <a:off x="4661306" y="5614416"/>
+            <a:ext cx="2923946" cy="219456"/>
+          </a:xfrm>
+          <a:prstGeom prst="rect">
+            <a:avLst/>
+          </a:prstGeom>
+          <a:noFill/>
+          <a:ln/>
+        </p:spPr>
+        <p:txBody>
+          <a:bodyPr wrap="square" lIns="0" tIns="0" rIns="0" bIns="0" rtlCol="0" anchor="t"/>
+          <a:lstStyle/>
+          <a:p>
+            <a:pPr algn="l" indent="0" marL="0">
               <a:buNone/>
             </a:pPr>
             <a:r>
@@ -3207,7 +3749,7 @@
                 <a:ea typeface="Calibri" pitchFamily="34" charset="-122"/>
                 <a:cs typeface="Calibri" pitchFamily="34" charset="-120"/>
               </a:rPr>
-              <a:t>— Dana, VP Health Services</a:t>
+              <a:t>per building — illustrative</a:t>
             </a:r>
             <a:endParaRPr lang="en-US" sz="1000" dirty="0"/>
           </a:p>
@@ -3215,13 +3757,155 @@
       </p:sp>
       <p:sp>
         <p:nvSpPr>
-          <p:cNvPr id="38" name="Text 36"/>
-          <p:cNvSpPr/>
-          <p:nvPr/>
-        </p:nvSpPr>
-        <p:spPr>
-          <a:xfrm>
-            <a:off x="777240" y="6217920"/>
+          <p:cNvPr id="43" name="Text 41"/>
+          <p:cNvSpPr/>
+          <p:nvPr/>
+        </p:nvSpPr>
+        <p:spPr>
+          <a:xfrm>
+            <a:off x="4661306" y="5797296"/>
+            <a:ext cx="2923946" cy="201168"/>
+          </a:xfrm>
+          <a:prstGeom prst="rect">
+            <a:avLst/>
+          </a:prstGeom>
+          <a:noFill/>
+          <a:ln/>
+        </p:spPr>
+        <p:txBody>
+          <a:bodyPr wrap="square" lIns="0" tIns="0" rIns="0" bIns="0" rtlCol="0" anchor="t"/>
+          <a:lstStyle/>
+          <a:p>
+            <a:pPr algn="l" indent="0" marL="0">
+              <a:buNone/>
+            </a:pPr>
+            <a:r>
+              <a:rPr lang="en-US" sz="900" dirty="0">
+                <a:solidFill>
+                  <a:srgbClr val="83837B"/>
+                </a:solidFill>
+                <a:latin typeface="Calibri" pitchFamily="34" charset="0"/>
+                <a:ea typeface="Calibri" pitchFamily="34" charset="-122"/>
+                <a:cs typeface="Calibri" pitchFamily="34" charset="-120"/>
+              </a:rPr>
+              <a:t>10 under-leveled residents × ~$750/mo</a:t>
+            </a:r>
+            <a:endParaRPr lang="en-US" sz="900" dirty="0"/>
+          </a:p>
+        </p:txBody>
+      </p:sp>
+      <p:sp>
+        <p:nvSpPr>
+          <p:cNvPr id="44" name="Shape 42"/>
+          <p:cNvSpPr/>
+          <p:nvPr/>
+        </p:nvSpPr>
+        <p:spPr>
+          <a:xfrm>
+            <a:off x="8033309" y="4828032"/>
+            <a:ext cx="3381146" cy="1207008"/>
+          </a:xfrm>
+          <a:prstGeom prst="roundRect">
+            <a:avLst>
+              <a:gd name="adj" fmla="val 7576"/>
+            </a:avLst>
+          </a:prstGeom>
+          <a:solidFill>
+            <a:srgbClr val="EEEEE9"/>
+          </a:solidFill>
+          <a:ln/>
+        </p:spPr>
+      </p:sp>
+      <p:sp>
+        <p:nvSpPr>
+          <p:cNvPr id="45" name="Text 43"/>
+          <p:cNvSpPr/>
+          <p:nvPr/>
+        </p:nvSpPr>
+        <p:spPr>
+          <a:xfrm>
+            <a:off x="8289341" y="5010912"/>
+            <a:ext cx="3381146" cy="201168"/>
+          </a:xfrm>
+          <a:prstGeom prst="rect">
+            <a:avLst/>
+          </a:prstGeom>
+          <a:noFill/>
+          <a:ln/>
+        </p:spPr>
+        <p:txBody>
+          <a:bodyPr wrap="square" lIns="0" tIns="0" rIns="0" bIns="0" rtlCol="0" anchor="ctr"/>
+          <a:lstStyle/>
+          <a:p>
+            <a:pPr algn="l" indent="0" marL="0">
+              <a:buNone/>
+            </a:pPr>
+            <a:r>
+              <a:rPr lang="en-US" sz="950" b="1" spc="40" kern="0" dirty="0">
+                <a:solidFill>
+                  <a:srgbClr val="83837B"/>
+                </a:solidFill>
+                <a:latin typeface="Calibri" pitchFamily="34" charset="0"/>
+                <a:ea typeface="Calibri" pitchFamily="34" charset="-122"/>
+                <a:cs typeface="Calibri" pitchFamily="34" charset="-120"/>
+              </a:rPr>
+              <a:t>Data advantage</a:t>
+            </a:r>
+            <a:endParaRPr lang="en-US" sz="950" dirty="0"/>
+          </a:p>
+        </p:txBody>
+      </p:sp>
+      <p:sp>
+        <p:nvSpPr>
+          <p:cNvPr id="46" name="Text 44"/>
+          <p:cNvSpPr/>
+          <p:nvPr/>
+        </p:nvSpPr>
+        <p:spPr>
+          <a:xfrm>
+            <a:off x="8289341" y="5266944"/>
+            <a:ext cx="2869082" cy="640080"/>
+          </a:xfrm>
+          <a:prstGeom prst="rect">
+            <a:avLst/>
+          </a:prstGeom>
+          <a:noFill/>
+          <a:ln/>
+        </p:spPr>
+        <p:txBody>
+          <a:bodyPr wrap="square" lIns="0" tIns="0" rIns="0" bIns="0" rtlCol="0" anchor="t"/>
+          <a:lstStyle/>
+          <a:p>
+            <a:pPr algn="l" indent="0" marL="0">
+              <a:lnSpc>
+                <a:spcPct val="110000"/>
+              </a:lnSpc>
+              <a:buNone/>
+            </a:pPr>
+            <a:r>
+              <a:rPr lang="en-US" sz="1100" dirty="0">
+                <a:solidFill>
+                  <a:srgbClr val="1B1B18"/>
+                </a:solidFill>
+                <a:latin typeface="Calibri" pitchFamily="34" charset="0"/>
+                <a:ea typeface="Calibri" pitchFamily="34" charset="-122"/>
+                <a:cs typeface="Calibri" pitchFamily="34" charset="-120"/>
+              </a:rPr>
+              <a:t>EHR flags see only what staff chart. Teton sees the unwitnessed night patterns.</a:t>
+            </a:r>
+            <a:endParaRPr lang="en-US" sz="1100" dirty="0"/>
+          </a:p>
+        </p:txBody>
+      </p:sp>
+      <p:sp>
+        <p:nvSpPr>
+          <p:cNvPr id="47" name="Text 45"/>
+          <p:cNvSpPr/>
+          <p:nvPr/>
+        </p:nvSpPr>
+        <p:spPr>
+          <a:xfrm>
+            <a:off x="777240" y="6181344"/>
             <a:ext cx="10637215" cy="219456"/>
           </a:xfrm>
           <a:prstGeom prst="rect">
@@ -3246,7 +3930,7 @@
                 <a:ea typeface="Calibri" pitchFamily="34" charset="-122"/>
                 <a:cs typeface="Calibri" pitchFamily="34" charset="-120"/>
               </a:rPr>
-              <a:t>EHR flags reflect only what's charted; ~2/3 of clinical leaders report acuity is underreported (ASHA / August Health, 2025). Under-leveling sizing is illustrative.</a:t>
+              <a:t>Market context: ~2/3 of clinical leaders report acuity is underreported; 75% report higher acuity than five years ago (ASHA / August Health, 2025). Sizing is directional — Phase 1 validates.</a:t>
             </a:r>
             <a:endParaRPr lang="en-US" sz="800" dirty="0"/>
           </a:p>
@@ -3254,7 +3938,7 @@
       </p:sp>
       <p:sp>
         <p:nvSpPr>
-          <p:cNvPr id="39" name="Text 37"/>
+          <p:cNvPr id="48" name="Text 46"/>
           <p:cNvSpPr/>
           <p:nvPr/>
         </p:nvSpPr>
@@ -3293,7 +3977,7 @@
       </p:sp>
       <p:sp>
         <p:nvSpPr>
-          <p:cNvPr id="40" name="Text 38"/>
+          <p:cNvPr id="49" name="Text 47"/>
           <p:cNvSpPr/>
           <p:nvPr/>
         </p:nvSpPr>
@@ -3415,7 +4099,7 @@
                 <a:ea typeface="Calibri" pitchFamily="34" charset="-122"/>
                 <a:cs typeface="Calibri" pitchFamily="34" charset="-120"/>
               </a:rPr>
-              <a:t>THE BET</a:t>
+              <a:t>PRIORITIZATION</a:t>
             </a:r>
             <a:endParaRPr lang="en-US" sz="1050" dirty="0"/>
           </a:p>
@@ -3430,7 +4114,7 @@
         <p:spPr>
           <a:xfrm>
             <a:off x="777240" y="676656"/>
-            <a:ext cx="10332720" cy="822960"/>
+            <a:ext cx="10424160" cy="822960"/>
           </a:xfrm>
           <a:prstGeom prst="rect">
             <a:avLst/>
@@ -3449,7 +4133,7 @@
               <a:buNone/>
             </a:pPr>
             <a:r>
-              <a:rPr lang="en-US" sz="2500" b="1" dirty="0">
+              <a:rPr lang="en-US" sz="2400" b="1" dirty="0">
                 <a:solidFill>
                   <a:srgbClr val="1B1B18"/>
                 </a:solidFill>
@@ -3457,9 +4141,9 @@
                 <a:ea typeface="Calibri" pitchFamily="34" charset="-122"/>
                 <a:cs typeface="Calibri" pitchFamily="34" charset="-120"/>
               </a:rPr>
-              <a:t>The six-month bet should be change-of-condition review</a:t>
-            </a:r>
-            <a:endParaRPr lang="en-US" sz="2500" dirty="0"/>
+              <a:t>Why change-of-condition review is the six-month bet</a:t>
+            </a:r>
+            <a:endParaRPr lang="en-US" sz="2400" dirty="0"/>
           </a:p>
         </p:txBody>
       </p:sp>
@@ -3471,8 +4155,8 @@
         </p:nvSpPr>
         <p:spPr>
           <a:xfrm>
-            <a:off x="777240" y="1481328"/>
-            <a:ext cx="9875520" cy="502920"/>
+            <a:off x="777240" y="1463040"/>
+            <a:ext cx="10058400" cy="457200"/>
           </a:xfrm>
           <a:prstGeom prst="rect">
             <a:avLst/>
@@ -3491,7 +4175,7 @@
               <a:buNone/>
             </a:pPr>
             <a:r>
-              <a:rPr lang="en-US" sz="1300" dirty="0">
+              <a:rPr lang="en-US" sz="1250" dirty="0">
                 <a:solidFill>
                   <a:srgbClr val="83837B"/>
                 </a:solidFill>
@@ -3499,22 +4183,288 @@
                 <a:ea typeface="Calibri" pitchFamily="34" charset="-122"/>
                 <a:cs typeface="Calibri" pitchFamily="34" charset="-120"/>
               </a:rPr>
-              <a:t>One narrow workflow best fits the customer pain, the engineering constraint, and the adoption risk.</a:t>
-            </a:r>
-            <a:endParaRPr lang="en-US" sz="1300" dirty="0"/>
-          </a:p>
-        </p:txBody>
-      </p:sp>
-      <p:sp>
-        <p:nvSpPr>
-          <p:cNvPr id="6" name="Shape 4"/>
-          <p:cNvSpPr/>
-          <p:nvPr/>
-        </p:nvSpPr>
-        <p:spPr>
-          <a:xfrm>
-            <a:off x="777240" y="2121408"/>
-            <a:ext cx="3301898" cy="0"/>
+              <a:t>It is the only option that reaches the high-value decision workflow without overreaching clinically or technically.</a:t>
+            </a:r>
+            <a:endParaRPr lang="en-US" sz="1250" dirty="0"/>
+          </a:p>
+        </p:txBody>
+      </p:sp>
+      <p:sp>
+        <p:nvSpPr>
+          <p:cNvPr id="6" name="Text 4"/>
+          <p:cNvSpPr/>
+          <p:nvPr/>
+        </p:nvSpPr>
+        <p:spPr>
+          <a:xfrm>
+            <a:off x="923544" y="1874520"/>
+            <a:ext cx="2560320" cy="384048"/>
+          </a:xfrm>
+          <a:prstGeom prst="rect">
+            <a:avLst/>
+          </a:prstGeom>
+          <a:noFill/>
+          <a:ln/>
+        </p:spPr>
+        <p:txBody>
+          <a:bodyPr wrap="square" lIns="0" tIns="0" rIns="0" bIns="0" rtlCol="0" anchor="ctr"/>
+          <a:lstStyle/>
+          <a:p>
+            <a:pPr algn="l" indent="0" marL="0">
+              <a:buNone/>
+            </a:pPr>
+            <a:r>
+              <a:rPr lang="en-US" sz="1000" b="1" dirty="0">
+                <a:solidFill>
+                  <a:srgbClr val="83837B"/>
+                </a:solidFill>
+                <a:latin typeface="Calibri" pitchFamily="34" charset="0"/>
+                <a:ea typeface="Calibri" pitchFamily="34" charset="-122"/>
+                <a:cs typeface="Calibri" pitchFamily="34" charset="-120"/>
+              </a:rPr>
+              <a:t>Option</a:t>
+            </a:r>
+            <a:endParaRPr lang="en-US" sz="1000" dirty="0"/>
+          </a:p>
+        </p:txBody>
+      </p:sp>
+      <p:sp>
+        <p:nvSpPr>
+          <p:cNvPr id="7" name="Text 5"/>
+          <p:cNvSpPr/>
+          <p:nvPr/>
+        </p:nvSpPr>
+        <p:spPr>
+          <a:xfrm>
+            <a:off x="3666744" y="1874520"/>
+            <a:ext cx="3749040" cy="384048"/>
+          </a:xfrm>
+          <a:prstGeom prst="rect">
+            <a:avLst/>
+          </a:prstGeom>
+          <a:noFill/>
+          <a:ln/>
+        </p:spPr>
+        <p:txBody>
+          <a:bodyPr wrap="square" lIns="0" tIns="0" rIns="0" bIns="0" rtlCol="0" anchor="ctr"/>
+          <a:lstStyle/>
+          <a:p>
+            <a:pPr algn="l" indent="0" marL="0">
+              <a:buNone/>
+            </a:pPr>
+            <a:r>
+              <a:rPr lang="en-US" sz="1000" b="1" dirty="0">
+                <a:solidFill>
+                  <a:srgbClr val="83837B"/>
+                </a:solidFill>
+                <a:latin typeface="Calibri" pitchFamily="34" charset="0"/>
+                <a:ea typeface="Calibri" pitchFamily="34" charset="-122"/>
+                <a:cs typeface="Calibri" pitchFamily="34" charset="-120"/>
+              </a:rPr>
+              <a:t>Customer signal</a:t>
+            </a:r>
+            <a:endParaRPr lang="en-US" sz="1000" dirty="0"/>
+          </a:p>
+        </p:txBody>
+      </p:sp>
+      <p:sp>
+        <p:nvSpPr>
+          <p:cNvPr id="8" name="Text 6"/>
+          <p:cNvSpPr/>
+          <p:nvPr/>
+        </p:nvSpPr>
+        <p:spPr>
+          <a:xfrm>
+            <a:off x="7598664" y="1874520"/>
+            <a:ext cx="3776472" cy="384048"/>
+          </a:xfrm>
+          <a:prstGeom prst="rect">
+            <a:avLst/>
+          </a:prstGeom>
+          <a:noFill/>
+          <a:ln/>
+        </p:spPr>
+        <p:txBody>
+          <a:bodyPr wrap="square" lIns="0" tIns="0" rIns="0" bIns="0" rtlCol="0" anchor="ctr"/>
+          <a:lstStyle/>
+          <a:p>
+            <a:pPr algn="l" indent="0" marL="0">
+              <a:buNone/>
+            </a:pPr>
+            <a:r>
+              <a:rPr lang="en-US" sz="1000" b="1" dirty="0">
+                <a:solidFill>
+                  <a:srgbClr val="83837B"/>
+                </a:solidFill>
+                <a:latin typeface="Calibri" pitchFamily="34" charset="0"/>
+                <a:ea typeface="Calibri" pitchFamily="34" charset="-122"/>
+                <a:cs typeface="Calibri" pitchFamily="34" charset="-120"/>
+              </a:rPr>
+              <a:t>Why not the six-month bet</a:t>
+            </a:r>
+            <a:endParaRPr lang="en-US" sz="1000" dirty="0"/>
+          </a:p>
+        </p:txBody>
+      </p:sp>
+      <p:sp>
+        <p:nvSpPr>
+          <p:cNvPr id="9" name="Shape 7"/>
+          <p:cNvSpPr/>
+          <p:nvPr/>
+        </p:nvSpPr>
+        <p:spPr>
+          <a:xfrm>
+            <a:off x="777240" y="2258568"/>
+            <a:ext cx="10637215" cy="0"/>
+          </a:xfrm>
+          <a:prstGeom prst="line">
+            <a:avLst/>
+          </a:prstGeom>
+          <a:noFill/>
+          <a:ln w="12700">
+            <a:solidFill>
+              <a:srgbClr val="E2E2DC"/>
+            </a:solidFill>
+            <a:prstDash val="solid"/>
+          </a:ln>
+        </p:spPr>
+      </p:sp>
+      <p:sp>
+        <p:nvSpPr>
+          <p:cNvPr id="10" name="Text 8"/>
+          <p:cNvSpPr/>
+          <p:nvPr/>
+        </p:nvSpPr>
+        <p:spPr>
+          <a:xfrm>
+            <a:off x="923544" y="2258568"/>
+            <a:ext cx="2487168" cy="512064"/>
+          </a:xfrm>
+          <a:prstGeom prst="rect">
+            <a:avLst/>
+          </a:prstGeom>
+          <a:noFill/>
+          <a:ln/>
+        </p:spPr>
+        <p:txBody>
+          <a:bodyPr wrap="square" lIns="0" tIns="0" rIns="0" bIns="0" rtlCol="0" anchor="ctr"/>
+          <a:lstStyle/>
+          <a:p>
+            <a:pPr algn="l" indent="0" marL="0">
+              <a:lnSpc>
+                <a:spcPct val="103000"/>
+              </a:lnSpc>
+              <a:buNone/>
+            </a:pPr>
+            <a:r>
+              <a:rPr lang="en-US" sz="1050" dirty="0">
+                <a:solidFill>
+                  <a:srgbClr val="1B1B18"/>
+                </a:solidFill>
+                <a:latin typeface="Calibri" pitchFamily="34" charset="0"/>
+                <a:ea typeface="Calibri" pitchFamily="34" charset="-122"/>
+                <a:cs typeface="Calibri" pitchFamily="34" charset="-120"/>
+              </a:rPr>
+              <a:t>Fall accuracy</a:t>
+            </a:r>
+            <a:endParaRPr lang="en-US" sz="1050" dirty="0"/>
+          </a:p>
+        </p:txBody>
+      </p:sp>
+      <p:sp>
+        <p:nvSpPr>
+          <p:cNvPr id="11" name="Text 9"/>
+          <p:cNvSpPr/>
+          <p:nvPr/>
+        </p:nvSpPr>
+        <p:spPr>
+          <a:xfrm>
+            <a:off x="3666744" y="2258568"/>
+            <a:ext cx="3675888" cy="512064"/>
+          </a:xfrm>
+          <a:prstGeom prst="rect">
+            <a:avLst/>
+          </a:prstGeom>
+          <a:noFill/>
+          <a:ln/>
+        </p:spPr>
+        <p:txBody>
+          <a:bodyPr wrap="square" lIns="0" tIns="0" rIns="0" bIns="0" rtlCol="0" anchor="ctr"/>
+          <a:lstStyle/>
+          <a:p>
+            <a:pPr algn="l" indent="0" marL="0">
+              <a:lnSpc>
+                <a:spcPct val="103000"/>
+              </a:lnSpc>
+              <a:buNone/>
+            </a:pPr>
+            <a:r>
+              <a:rPr lang="en-US" sz="1050" dirty="0">
+                <a:solidFill>
+                  <a:srgbClr val="1B1B18"/>
+                </a:solidFill>
+                <a:latin typeface="Calibri" pitchFamily="34" charset="0"/>
+                <a:ea typeface="Calibri" pitchFamily="34" charset="-122"/>
+                <a:cs typeface="Calibri" pitchFamily="34" charset="-120"/>
+              </a:rPr>
+              <a:t>False alarms still affect trust</a:t>
+            </a:r>
+            <a:endParaRPr lang="en-US" sz="1050" dirty="0"/>
+          </a:p>
+        </p:txBody>
+      </p:sp>
+      <p:sp>
+        <p:nvSpPr>
+          <p:cNvPr id="12" name="Text 10"/>
+          <p:cNvSpPr/>
+          <p:nvPr/>
+        </p:nvSpPr>
+        <p:spPr>
+          <a:xfrm>
+            <a:off x="7598664" y="2258568"/>
+            <a:ext cx="3703320" cy="512064"/>
+          </a:xfrm>
+          <a:prstGeom prst="rect">
+            <a:avLst/>
+          </a:prstGeom>
+          <a:noFill/>
+          <a:ln/>
+        </p:spPr>
+        <p:txBody>
+          <a:bodyPr wrap="square" lIns="0" tIns="0" rIns="0" bIns="0" rtlCol="0" anchor="ctr"/>
+          <a:lstStyle/>
+          <a:p>
+            <a:pPr algn="l" indent="0" marL="0">
+              <a:lnSpc>
+                <a:spcPct val="103000"/>
+              </a:lnSpc>
+              <a:buNone/>
+            </a:pPr>
+            <a:r>
+              <a:rPr lang="en-US" sz="1050" dirty="0">
+                <a:solidFill>
+                  <a:srgbClr val="1B1B18"/>
+                </a:solidFill>
+                <a:latin typeface="Calibri" pitchFamily="34" charset="0"/>
+                <a:ea typeface="Calibri" pitchFamily="34" charset="-122"/>
+                <a:cs typeface="Calibri" pitchFamily="34" charset="-120"/>
+              </a:rPr>
+              <a:t>Improves the wedge, but doesn't reach daytime decisions</a:t>
+            </a:r>
+            <a:endParaRPr lang="en-US" sz="1050" dirty="0"/>
+          </a:p>
+        </p:txBody>
+      </p:sp>
+      <p:sp>
+        <p:nvSpPr>
+          <p:cNvPr id="13" name="Shape 11"/>
+          <p:cNvSpPr/>
+          <p:nvPr/>
+        </p:nvSpPr>
+        <p:spPr>
+          <a:xfrm>
+            <a:off x="777240" y="2770632"/>
+            <a:ext cx="10637215" cy="0"/>
           </a:xfrm>
           <a:prstGeom prst="line">
             <a:avLst/>
@@ -3530,14 +4480,14 @@
       </p:sp>
       <p:sp>
         <p:nvSpPr>
-          <p:cNvPr id="7" name="Text 5"/>
-          <p:cNvSpPr/>
-          <p:nvPr/>
-        </p:nvSpPr>
-        <p:spPr>
-          <a:xfrm>
-            <a:off x="777240" y="2231136"/>
-            <a:ext cx="3301898" cy="201168"/>
+          <p:cNvPr id="14" name="Text 12"/>
+          <p:cNvSpPr/>
+          <p:nvPr/>
+        </p:nvSpPr>
+        <p:spPr>
+          <a:xfrm>
+            <a:off x="923544" y="2770632"/>
+            <a:ext cx="2487168" cy="512064"/>
           </a:xfrm>
           <a:prstGeom prst="rect">
             <a:avLst/>
@@ -3550,52 +4500,13 @@
           <a:lstStyle/>
           <a:p>
             <a:pPr algn="l" indent="0" marL="0">
-              <a:buNone/>
-            </a:pPr>
-            <a:r>
-              <a:rPr lang="en-US" sz="950" b="1" spc="130" kern="0" dirty="0">
-                <a:solidFill>
-                  <a:srgbClr val="83837B"/>
-                </a:solidFill>
-                <a:latin typeface="Calibri" pitchFamily="34" charset="0"/>
-                <a:ea typeface="Calibri" pitchFamily="34" charset="-122"/>
-                <a:cs typeface="Calibri" pitchFamily="34" charset="-120"/>
-              </a:rPr>
-              <a:t>TOO NARROW</a:t>
-            </a:r>
-            <a:endParaRPr lang="en-US" sz="950" dirty="0"/>
-          </a:p>
-        </p:txBody>
-      </p:sp>
-      <p:sp>
-        <p:nvSpPr>
-          <p:cNvPr id="8" name="Text 6"/>
-          <p:cNvSpPr/>
-          <p:nvPr/>
-        </p:nvSpPr>
-        <p:spPr>
-          <a:xfrm>
-            <a:off x="777240" y="2468880"/>
-            <a:ext cx="3301898" cy="457200"/>
-          </a:xfrm>
-          <a:prstGeom prst="rect">
-            <a:avLst/>
-          </a:prstGeom>
-          <a:noFill/>
-          <a:ln/>
-        </p:spPr>
-        <p:txBody>
-          <a:bodyPr wrap="square" lIns="0" tIns="0" rIns="0" bIns="0" rtlCol="0" anchor="t"/>
-          <a:lstStyle/>
-          <a:p>
-            <a:pPr algn="l" indent="0" marL="0">
               <a:lnSpc>
-                <a:spcPct val="105000"/>
+                <a:spcPct val="103000"/>
               </a:lnSpc>
               <a:buNone/>
             </a:pPr>
             <a:r>
-              <a:rPr lang="en-US" sz="1200" b="1" dirty="0">
+              <a:rPr lang="en-US" sz="1050" dirty="0">
                 <a:solidFill>
                   <a:srgbClr val="1B1B18"/>
                 </a:solidFill>
@@ -3603,49 +4514,49 @@
                 <a:ea typeface="Calibri" pitchFamily="34" charset="-122"/>
                 <a:cs typeface="Calibri" pitchFamily="34" charset="-120"/>
               </a:rPr>
-              <a:t>Doesn't reach daytime decisions</a:t>
-            </a:r>
-            <a:endParaRPr lang="en-US" sz="1200" dirty="0"/>
-          </a:p>
-        </p:txBody>
-      </p:sp>
-      <p:sp>
-        <p:nvSpPr>
-          <p:cNvPr id="9" name="Text 7"/>
-          <p:cNvSpPr/>
-          <p:nvPr/>
-        </p:nvSpPr>
-        <p:spPr>
-          <a:xfrm>
-            <a:off x="777240" y="2962656"/>
-            <a:ext cx="3301898" cy="457200"/>
-          </a:xfrm>
-          <a:prstGeom prst="rect">
-            <a:avLst/>
-          </a:prstGeom>
-          <a:noFill/>
-          <a:ln/>
-        </p:spPr>
-        <p:txBody>
-          <a:bodyPr wrap="square" lIns="0" tIns="0" rIns="0" bIns="0" rtlCol="0" anchor="t"/>
+              <a:t>Day-shift adoption push</a:t>
+            </a:r>
+            <a:endParaRPr lang="en-US" sz="1050" dirty="0"/>
+          </a:p>
+        </p:txBody>
+      </p:sp>
+      <p:sp>
+        <p:nvSpPr>
+          <p:cNvPr id="15" name="Text 13"/>
+          <p:cNvSpPr/>
+          <p:nvPr/>
+        </p:nvSpPr>
+        <p:spPr>
+          <a:xfrm>
+            <a:off x="3666744" y="2770632"/>
+            <a:ext cx="3675888" cy="512064"/>
+          </a:xfrm>
+          <a:prstGeom prst="rect">
+            <a:avLst/>
+          </a:prstGeom>
+          <a:noFill/>
+          <a:ln/>
+        </p:spPr>
+        <p:txBody>
+          <a:bodyPr wrap="square" lIns="0" tIns="0" rIns="0" bIns="0" rtlCol="0" anchor="ctr"/>
           <a:lstStyle/>
           <a:p>
             <a:pPr algn="l" indent="0" marL="0">
               <a:lnSpc>
-                <a:spcPct val="108000"/>
+                <a:spcPct val="103000"/>
               </a:lnSpc>
               <a:buNone/>
             </a:pPr>
             <a:r>
               <a:rPr lang="en-US" sz="1050" dirty="0">
                 <a:solidFill>
-                  <a:srgbClr val="83837B"/>
-                </a:solidFill>
-                <a:latin typeface="Calibri" pitchFamily="34" charset="0"/>
-                <a:ea typeface="Calibri" pitchFamily="34" charset="-122"/>
-                <a:cs typeface="Calibri" pitchFamily="34" charset="-120"/>
-              </a:rPr>
-              <a:t>Fall-accuracy work · Day-shift adoption push</a:t>
+                  <a:srgbClr val="1B1B18"/>
+                </a:solidFill>
+                <a:latin typeface="Calibri" pitchFamily="34" charset="0"/>
+                <a:ea typeface="Calibri" pitchFamily="34" charset="-122"/>
+                <a:cs typeface="Calibri" pitchFamily="34" charset="-120"/>
+              </a:rPr>
+              <a:t>Marcus asks for broader usage</a:t>
             </a:r>
             <a:endParaRPr lang="en-US" sz="1050" dirty="0"/>
           </a:p>
@@ -3653,14 +4564,56 @@
       </p:sp>
       <p:sp>
         <p:nvSpPr>
-          <p:cNvPr id="10" name="Shape 8"/>
-          <p:cNvSpPr/>
-          <p:nvPr/>
-        </p:nvSpPr>
-        <p:spPr>
-          <a:xfrm>
-            <a:off x="4444898" y="2121408"/>
-            <a:ext cx="3301898" cy="0"/>
+          <p:cNvPr id="16" name="Text 14"/>
+          <p:cNvSpPr/>
+          <p:nvPr/>
+        </p:nvSpPr>
+        <p:spPr>
+          <a:xfrm>
+            <a:off x="7598664" y="2770632"/>
+            <a:ext cx="3703320" cy="512064"/>
+          </a:xfrm>
+          <a:prstGeom prst="rect">
+            <a:avLst/>
+          </a:prstGeom>
+          <a:noFill/>
+          <a:ln/>
+        </p:spPr>
+        <p:txBody>
+          <a:bodyPr wrap="square" lIns="0" tIns="0" rIns="0" bIns="0" rtlCol="0" anchor="ctr"/>
+          <a:lstStyle/>
+          <a:p>
+            <a:pPr algn="l" indent="0" marL="0">
+              <a:lnSpc>
+                <a:spcPct val="103000"/>
+              </a:lnSpc>
+              <a:buNone/>
+            </a:pPr>
+            <a:r>
+              <a:rPr lang="en-US" sz="1050" dirty="0">
+                <a:solidFill>
+                  <a:srgbClr val="1B1B18"/>
+                </a:solidFill>
+                <a:latin typeface="Calibri" pitchFamily="34" charset="0"/>
+                <a:ea typeface="Calibri" pitchFamily="34" charset="-122"/>
+                <a:cs typeface="Calibri" pitchFamily="34" charset="-120"/>
+              </a:rPr>
+              <a:t>More logins don't guarantee care action</a:t>
+            </a:r>
+            <a:endParaRPr lang="en-US" sz="1050" dirty="0"/>
+          </a:p>
+        </p:txBody>
+      </p:sp>
+      <p:sp>
+        <p:nvSpPr>
+          <p:cNvPr id="17" name="Shape 15"/>
+          <p:cNvSpPr/>
+          <p:nvPr/>
+        </p:nvSpPr>
+        <p:spPr>
+          <a:xfrm>
+            <a:off x="777240" y="3282696"/>
+            <a:ext cx="10637215" cy="0"/>
           </a:xfrm>
           <a:prstGeom prst="line">
             <a:avLst/>
@@ -3676,14 +4629,14 @@
       </p:sp>
       <p:sp>
         <p:nvSpPr>
-          <p:cNvPr id="11" name="Text 9"/>
-          <p:cNvSpPr/>
-          <p:nvPr/>
-        </p:nvSpPr>
-        <p:spPr>
-          <a:xfrm>
-            <a:off x="4444898" y="2231136"/>
-            <a:ext cx="3301898" cy="201168"/>
+          <p:cNvPr id="18" name="Text 16"/>
+          <p:cNvSpPr/>
+          <p:nvPr/>
+        </p:nvSpPr>
+        <p:spPr>
+          <a:xfrm>
+            <a:off x="923544" y="3282696"/>
+            <a:ext cx="2487168" cy="512064"/>
           </a:xfrm>
           <a:prstGeom prst="rect">
             <a:avLst/>
@@ -3696,52 +4649,13 @@
           <a:lstStyle/>
           <a:p>
             <a:pPr algn="l" indent="0" marL="0">
-              <a:buNone/>
-            </a:pPr>
-            <a:r>
-              <a:rPr lang="en-US" sz="950" b="1" spc="130" kern="0" dirty="0">
-                <a:solidFill>
-                  <a:srgbClr val="83837B"/>
-                </a:solidFill>
-                <a:latin typeface="Calibri" pitchFamily="34" charset="0"/>
-                <a:ea typeface="Calibri" pitchFamily="34" charset="-122"/>
-                <a:cs typeface="Calibri" pitchFamily="34" charset="-120"/>
-              </a:rPr>
-              <a:t>TOO RISKY</a:t>
-            </a:r>
-            <a:endParaRPr lang="en-US" sz="950" dirty="0"/>
-          </a:p>
-        </p:txBody>
-      </p:sp>
-      <p:sp>
-        <p:nvSpPr>
-          <p:cNvPr id="12" name="Text 10"/>
-          <p:cNvSpPr/>
-          <p:nvPr/>
-        </p:nvSpPr>
-        <p:spPr>
-          <a:xfrm>
-            <a:off x="4444898" y="2468880"/>
-            <a:ext cx="3301898" cy="457200"/>
-          </a:xfrm>
-          <a:prstGeom prst="rect">
-            <a:avLst/>
-          </a:prstGeom>
-          <a:noFill/>
-          <a:ln/>
-        </p:spPr>
-        <p:txBody>
-          <a:bodyPr wrap="square" lIns="0" tIns="0" rIns="0" bIns="0" rtlCol="0" anchor="t"/>
-          <a:lstStyle/>
-          <a:p>
-            <a:pPr algn="l" indent="0" marL="0">
               <a:lnSpc>
-                <a:spcPct val="105000"/>
+                <a:spcPct val="103000"/>
               </a:lnSpc>
               <a:buNone/>
             </a:pPr>
             <a:r>
-              <a:rPr lang="en-US" sz="1200" b="1" dirty="0">
+              <a:rPr lang="en-US" sz="1050" dirty="0">
                 <a:solidFill>
                   <a:srgbClr val="1B1B18"/>
                 </a:solidFill>
@@ -3749,49 +4663,49 @@
                 <a:ea typeface="Calibri" pitchFamily="34" charset="-122"/>
                 <a:cs typeface="Calibri" pitchFamily="34" charset="-120"/>
               </a:rPr>
-              <a:t>Trust &amp; privacy risk before the workflow is proven</a:t>
-            </a:r>
-            <a:endParaRPr lang="en-US" sz="1200" dirty="0"/>
-          </a:p>
-        </p:txBody>
-      </p:sp>
-      <p:sp>
-        <p:nvSpPr>
-          <p:cNvPr id="13" name="Text 11"/>
-          <p:cNvSpPr/>
-          <p:nvPr/>
-        </p:nvSpPr>
-        <p:spPr>
-          <a:xfrm>
-            <a:off x="4444898" y="2962656"/>
-            <a:ext cx="3301898" cy="457200"/>
-          </a:xfrm>
-          <a:prstGeom prst="rect">
-            <a:avLst/>
-          </a:prstGeom>
-          <a:noFill/>
-          <a:ln/>
-        </p:spPr>
-        <p:txBody>
-          <a:bodyPr wrap="square" lIns="0" tIns="0" rIns="0" bIns="0" rtlCol="0" anchor="t"/>
+              <a:t>Family live-view</a:t>
+            </a:r>
+            <a:endParaRPr lang="en-US" sz="1050" dirty="0"/>
+          </a:p>
+        </p:txBody>
+      </p:sp>
+      <p:sp>
+        <p:nvSpPr>
+          <p:cNvPr id="19" name="Text 17"/>
+          <p:cNvSpPr/>
+          <p:nvPr/>
+        </p:nvSpPr>
+        <p:spPr>
+          <a:xfrm>
+            <a:off x="3666744" y="3282696"/>
+            <a:ext cx="3675888" cy="512064"/>
+          </a:xfrm>
+          <a:prstGeom prst="rect">
+            <a:avLst/>
+          </a:prstGeom>
+          <a:noFill/>
+          <a:ln/>
+        </p:spPr>
+        <p:txBody>
+          <a:bodyPr wrap="square" lIns="0" tIns="0" rIns="0" bIns="0" rtlCol="0" anchor="ctr"/>
           <a:lstStyle/>
           <a:p>
             <a:pPr algn="l" indent="0" marL="0">
               <a:lnSpc>
-                <a:spcPct val="108000"/>
+                <a:spcPct val="103000"/>
               </a:lnSpc>
               <a:buNone/>
             </a:pPr>
             <a:r>
               <a:rPr lang="en-US" sz="1050" dirty="0">
                 <a:solidFill>
-                  <a:srgbClr val="83837B"/>
-                </a:solidFill>
-                <a:latin typeface="Calibri" pitchFamily="34" charset="0"/>
-                <a:ea typeface="Calibri" pitchFamily="34" charset="-122"/>
-                <a:cs typeface="Calibri" pitchFamily="34" charset="-120"/>
-              </a:rPr>
-              <a:t>Family live-view · Automated care-level</a:t>
+                  <a:srgbClr val="1B1B18"/>
+                </a:solidFill>
+                <a:latin typeface="Calibri" pitchFamily="34" charset="0"/>
+                <a:ea typeface="Calibri" pitchFamily="34" charset="-122"/>
+                <a:cs typeface="Calibri" pitchFamily="34" charset="-120"/>
+              </a:rPr>
+              <a:t>Families ask to see rooms</a:t>
             </a:r>
             <a:endParaRPr lang="en-US" sz="1050" dirty="0"/>
           </a:p>
@@ -3799,14 +4713,56 @@
       </p:sp>
       <p:sp>
         <p:nvSpPr>
-          <p:cNvPr id="14" name="Shape 12"/>
-          <p:cNvSpPr/>
-          <p:nvPr/>
-        </p:nvSpPr>
-        <p:spPr>
-          <a:xfrm>
-            <a:off x="8112557" y="2121408"/>
-            <a:ext cx="3301898" cy="0"/>
+          <p:cNvPr id="20" name="Text 18"/>
+          <p:cNvSpPr/>
+          <p:nvPr/>
+        </p:nvSpPr>
+        <p:spPr>
+          <a:xfrm>
+            <a:off x="7598664" y="3282696"/>
+            <a:ext cx="3703320" cy="512064"/>
+          </a:xfrm>
+          <a:prstGeom prst="rect">
+            <a:avLst/>
+          </a:prstGeom>
+          <a:noFill/>
+          <a:ln/>
+        </p:spPr>
+        <p:txBody>
+          <a:bodyPr wrap="square" lIns="0" tIns="0" rIns="0" bIns="0" rtlCol="0" anchor="ctr"/>
+          <a:lstStyle/>
+          <a:p>
+            <a:pPr algn="l" indent="0" marL="0">
+              <a:lnSpc>
+                <a:spcPct val="103000"/>
+              </a:lnSpc>
+              <a:buNone/>
+            </a:pPr>
+            <a:r>
+              <a:rPr lang="en-US" sz="1050" dirty="0">
+                <a:solidFill>
+                  <a:srgbClr val="1B1B18"/>
+                </a:solidFill>
+                <a:latin typeface="Calibri" pitchFamily="34" charset="0"/>
+                <a:ea typeface="Calibri" pitchFamily="34" charset="-122"/>
+                <a:cs typeface="Calibri" pitchFamily="34" charset="-120"/>
+              </a:rPr>
+              <a:t>Privacy &amp; surveillance risk before the workflow is proven</a:t>
+            </a:r>
+            <a:endParaRPr lang="en-US" sz="1050" dirty="0"/>
+          </a:p>
+        </p:txBody>
+      </p:sp>
+      <p:sp>
+        <p:nvSpPr>
+          <p:cNvPr id="21" name="Shape 19"/>
+          <p:cNvSpPr/>
+          <p:nvPr/>
+        </p:nvSpPr>
+        <p:spPr>
+          <a:xfrm>
+            <a:off x="777240" y="3794760"/>
+            <a:ext cx="10637215" cy="0"/>
           </a:xfrm>
           <a:prstGeom prst="line">
             <a:avLst/>
@@ -3822,14 +4778,14 @@
       </p:sp>
       <p:sp>
         <p:nvSpPr>
-          <p:cNvPr id="15" name="Text 13"/>
-          <p:cNvSpPr/>
-          <p:nvPr/>
-        </p:nvSpPr>
-        <p:spPr>
-          <a:xfrm>
-            <a:off x="8112557" y="2231136"/>
-            <a:ext cx="3301898" cy="201168"/>
+          <p:cNvPr id="22" name="Text 20"/>
+          <p:cNvSpPr/>
+          <p:nvPr/>
+        </p:nvSpPr>
+        <p:spPr>
+          <a:xfrm>
+            <a:off x="923544" y="3794760"/>
+            <a:ext cx="2487168" cy="512064"/>
           </a:xfrm>
           <a:prstGeom prst="rect">
             <a:avLst/>
@@ -3842,52 +4798,13 @@
           <a:lstStyle/>
           <a:p>
             <a:pPr algn="l" indent="0" marL="0">
-              <a:buNone/>
-            </a:pPr>
-            <a:r>
-              <a:rPr lang="en-US" sz="950" b="1" spc="130" kern="0" dirty="0">
-                <a:solidFill>
-                  <a:srgbClr val="83837B"/>
-                </a:solidFill>
-                <a:latin typeface="Calibri" pitchFamily="34" charset="0"/>
-                <a:ea typeface="Calibri" pitchFamily="34" charset="-122"/>
-                <a:cs typeface="Calibri" pitchFamily="34" charset="-120"/>
-              </a:rPr>
-              <a:t>TOO BROAD</a:t>
-            </a:r>
-            <a:endParaRPr lang="en-US" sz="950" dirty="0"/>
-          </a:p>
-        </p:txBody>
-      </p:sp>
-      <p:sp>
-        <p:nvSpPr>
-          <p:cNvPr id="16" name="Text 14"/>
-          <p:cNvSpPr/>
-          <p:nvPr/>
-        </p:nvSpPr>
-        <p:spPr>
-          <a:xfrm>
-            <a:off x="8112557" y="2468880"/>
-            <a:ext cx="3301898" cy="457200"/>
-          </a:xfrm>
-          <a:prstGeom prst="rect">
-            <a:avLst/>
-          </a:prstGeom>
-          <a:noFill/>
-          <a:ln/>
-        </p:spPr>
-        <p:txBody>
-          <a:bodyPr wrap="square" lIns="0" tIns="0" rIns="0" bIns="0" rtlCol="0" anchor="t"/>
-          <a:lstStyle/>
-          <a:p>
-            <a:pPr algn="l" indent="0" marL="0">
               <a:lnSpc>
-                <a:spcPct val="105000"/>
+                <a:spcPct val="103000"/>
               </a:lnSpc>
               <a:buNone/>
             </a:pPr>
             <a:r>
-              <a:rPr lang="en-US" sz="1200" b="1" dirty="0">
+              <a:rPr lang="en-US" sz="1050" dirty="0">
                 <a:solidFill>
                   <a:srgbClr val="1B1B18"/>
                 </a:solidFill>
@@ -3895,49 +4812,49 @@
                 <a:ea typeface="Calibri" pitchFamily="34" charset="-122"/>
                 <a:cs typeface="Calibri" pitchFamily="34" charset="-120"/>
               </a:rPr>
-              <a:t>Bigger than a six-month bet</a:t>
-            </a:r>
-            <a:endParaRPr lang="en-US" sz="1200" dirty="0"/>
-          </a:p>
-        </p:txBody>
-      </p:sp>
-      <p:sp>
-        <p:nvSpPr>
-          <p:cNvPr id="17" name="Text 15"/>
-          <p:cNvSpPr/>
-          <p:nvPr/>
-        </p:nvSpPr>
-        <p:spPr>
-          <a:xfrm>
-            <a:off x="8112557" y="2962656"/>
-            <a:ext cx="3301898" cy="457200"/>
-          </a:xfrm>
-          <a:prstGeom prst="rect">
-            <a:avLst/>
-          </a:prstGeom>
-          <a:noFill/>
-          <a:ln/>
-        </p:spPr>
-        <p:txBody>
-          <a:bodyPr wrap="square" lIns="0" tIns="0" rIns="0" bIns="0" rtlCol="0" anchor="t"/>
+              <a:t>Full EHR integration</a:t>
+            </a:r>
+            <a:endParaRPr lang="en-US" sz="1050" dirty="0"/>
+          </a:p>
+        </p:txBody>
+      </p:sp>
+      <p:sp>
+        <p:nvSpPr>
+          <p:cNvPr id="23" name="Text 21"/>
+          <p:cNvSpPr/>
+          <p:nvPr/>
+        </p:nvSpPr>
+        <p:spPr>
+          <a:xfrm>
+            <a:off x="3666744" y="3794760"/>
+            <a:ext cx="3675888" cy="512064"/>
+          </a:xfrm>
+          <a:prstGeom prst="rect">
+            <a:avLst/>
+          </a:prstGeom>
+          <a:noFill/>
+          <a:ln/>
+        </p:spPr>
+        <p:txBody>
+          <a:bodyPr wrap="square" lIns="0" tIns="0" rIns="0" bIns="0" rtlCol="0" anchor="ctr"/>
           <a:lstStyle/>
           <a:p>
             <a:pPr algn="l" indent="0" marL="0">
               <a:lnSpc>
-                <a:spcPct val="108000"/>
+                <a:spcPct val="103000"/>
               </a:lnSpc>
               <a:buNone/>
             </a:pPr>
             <a:r>
               <a:rPr lang="en-US" sz="1050" dirty="0">
                 <a:solidFill>
-                  <a:srgbClr val="83837B"/>
-                </a:solidFill>
-                <a:latin typeface="Calibri" pitchFamily="34" charset="0"/>
-                <a:ea typeface="Calibri" pitchFamily="34" charset="-122"/>
-                <a:cs typeface="Calibri" pitchFamily="34" charset="-120"/>
-              </a:rPr>
-              <a:t>Full multi-EHR integration</a:t>
+                  <a:srgbClr val="1B1B18"/>
+                </a:solidFill>
+                <a:latin typeface="Calibri" pitchFamily="34" charset="0"/>
+                <a:ea typeface="Calibri" pitchFamily="34" charset="-122"/>
+                <a:cs typeface="Calibri" pitchFamily="34" charset="-120"/>
+              </a:rPr>
+              <a:t>The EHR is the record</a:t>
             </a:r>
             <a:endParaRPr lang="en-US" sz="1050" dirty="0"/>
           </a:p>
@@ -3945,36 +4862,14 @@
       </p:sp>
       <p:sp>
         <p:nvSpPr>
-          <p:cNvPr id="18" name="Shape 16"/>
-          <p:cNvSpPr/>
-          <p:nvPr/>
-        </p:nvSpPr>
-        <p:spPr>
-          <a:xfrm>
-            <a:off x="777240" y="3840480"/>
-            <a:ext cx="10637215" cy="1371600"/>
-          </a:xfrm>
-          <a:prstGeom prst="roundRect">
-            <a:avLst>
-              <a:gd name="adj" fmla="val 8000"/>
-            </a:avLst>
-          </a:prstGeom>
-          <a:solidFill>
-            <a:srgbClr val="EDEFFB"/>
-          </a:solidFill>
-          <a:ln/>
-        </p:spPr>
-      </p:sp>
-      <p:sp>
-        <p:nvSpPr>
-          <p:cNvPr id="19" name="Text 17"/>
-          <p:cNvSpPr/>
-          <p:nvPr/>
-        </p:nvSpPr>
-        <p:spPr>
-          <a:xfrm>
-            <a:off x="1143000" y="4059936"/>
-            <a:ext cx="3657600" cy="201168"/>
+          <p:cNvPr id="24" name="Text 22"/>
+          <p:cNvSpPr/>
+          <p:nvPr/>
+        </p:nvSpPr>
+        <p:spPr>
+          <a:xfrm>
+            <a:off x="7598664" y="3794760"/>
+            <a:ext cx="3703320" cy="512064"/>
           </a:xfrm>
           <a:prstGeom prst="rect">
             <a:avLst/>
@@ -3987,49 +4882,13 @@
           <a:lstStyle/>
           <a:p>
             <a:pPr algn="l" indent="0" marL="0">
-              <a:buNone/>
-            </a:pPr>
-            <a:r>
-              <a:rPr lang="en-US" sz="1000" b="1" spc="130" kern="0" dirty="0">
-                <a:solidFill>
-                  <a:srgbClr val="5A6CE6"/>
-                </a:solidFill>
-                <a:latin typeface="Calibri" pitchFamily="34" charset="0"/>
-                <a:ea typeface="Calibri" pitchFamily="34" charset="-122"/>
-                <a:cs typeface="Calibri" pitchFamily="34" charset="-120"/>
-              </a:rPr>
-              <a:t>CHOSEN BET</a:t>
-            </a:r>
-            <a:endParaRPr lang="en-US" sz="1000" dirty="0"/>
-          </a:p>
-        </p:txBody>
-      </p:sp>
-      <p:sp>
-        <p:nvSpPr>
-          <p:cNvPr id="20" name="Text 18"/>
-          <p:cNvSpPr/>
-          <p:nvPr/>
-        </p:nvSpPr>
-        <p:spPr>
-          <a:xfrm>
-            <a:off x="1143000" y="4297680"/>
-            <a:ext cx="9905695" cy="411480"/>
-          </a:xfrm>
-          <a:prstGeom prst="rect">
-            <a:avLst/>
-          </a:prstGeom>
-          <a:noFill/>
-          <a:ln/>
-        </p:spPr>
-        <p:txBody>
-          <a:bodyPr wrap="square" lIns="0" tIns="0" rIns="0" bIns="0" rtlCol="0" anchor="t"/>
-          <a:lstStyle/>
-          <a:p>
-            <a:pPr algn="l" indent="0" marL="0">
-              <a:buNone/>
-            </a:pPr>
-            <a:r>
-              <a:rPr lang="en-US" sz="2200" b="1" dirty="0">
+              <a:lnSpc>
+                <a:spcPct val="103000"/>
+              </a:lnSpc>
+              <a:buNone/>
+            </a:pPr>
+            <a:r>
+              <a:rPr lang="en-US" sz="1050" dirty="0">
                 <a:solidFill>
                   <a:srgbClr val="1B1B18"/>
                 </a:solidFill>
@@ -4037,63 +4896,21 @@
                 <a:ea typeface="Calibri" pitchFamily="34" charset="-122"/>
                 <a:cs typeface="Calibri" pitchFamily="34" charset="-120"/>
               </a:rPr>
-              <a:t>Change-of-condition review</a:t>
-            </a:r>
-            <a:endParaRPr lang="en-US" sz="2200" dirty="0"/>
-          </a:p>
-        </p:txBody>
-      </p:sp>
-      <p:sp>
-        <p:nvSpPr>
-          <p:cNvPr id="21" name="Text 19"/>
-          <p:cNvSpPr/>
-          <p:nvPr/>
-        </p:nvSpPr>
-        <p:spPr>
-          <a:xfrm>
-            <a:off x="1143000" y="4791456"/>
-            <a:ext cx="9905695" cy="365760"/>
-          </a:xfrm>
-          <a:prstGeom prst="rect">
-            <a:avLst/>
-          </a:prstGeom>
-          <a:noFill/>
-          <a:ln/>
-        </p:spPr>
-        <p:txBody>
-          <a:bodyPr wrap="square" lIns="0" tIns="0" rIns="0" bIns="0" rtlCol="0" anchor="t"/>
-          <a:lstStyle/>
-          <a:p>
-            <a:pPr algn="l" indent="0" marL="0">
-              <a:lnSpc>
-                <a:spcPct val="105000"/>
-              </a:lnSpc>
-              <a:buNone/>
-            </a:pPr>
-            <a:r>
-              <a:rPr lang="en-US" sz="1400" dirty="0">
-                <a:solidFill>
-                  <a:srgbClr val="1B1B18"/>
-                </a:solidFill>
-                <a:latin typeface="Calibri" pitchFamily="34" charset="0"/>
-                <a:ea typeface="Calibri" pitchFamily="34" charset="-122"/>
-                <a:cs typeface="Calibri" pitchFamily="34" charset="-120"/>
-              </a:rPr>
-              <a:t>Surface evidence that a resident may need review. A nurse decides what happens next.</a:t>
-            </a:r>
-            <a:endParaRPr lang="en-US" sz="1400" dirty="0"/>
-          </a:p>
-        </p:txBody>
-      </p:sp>
-      <p:sp>
-        <p:nvSpPr>
-          <p:cNvPr id="22" name="Shape 20"/>
-          <p:cNvSpPr/>
-          <p:nvPr/>
-        </p:nvSpPr>
-        <p:spPr>
-          <a:xfrm>
-            <a:off x="777240" y="5614416"/>
+              <a:t>Too broad across a dozen EHRs for six months</a:t>
+            </a:r>
+            <a:endParaRPr lang="en-US" sz="1050" dirty="0"/>
+          </a:p>
+        </p:txBody>
+      </p:sp>
+      <p:sp>
+        <p:nvSpPr>
+          <p:cNvPr id="25" name="Shape 23"/>
+          <p:cNvSpPr/>
+          <p:nvPr/>
+        </p:nvSpPr>
+        <p:spPr>
+          <a:xfrm>
+            <a:off x="777240" y="4306824"/>
             <a:ext cx="10637215" cy="0"/>
           </a:xfrm>
           <a:prstGeom prst="line">
@@ -4110,7 +4927,304 @@
       </p:sp>
       <p:sp>
         <p:nvSpPr>
-          <p:cNvPr id="23" name="Text 21"/>
+          <p:cNvPr id="26" name="Text 24"/>
+          <p:cNvSpPr/>
+          <p:nvPr/>
+        </p:nvSpPr>
+        <p:spPr>
+          <a:xfrm>
+            <a:off x="923544" y="4306824"/>
+            <a:ext cx="2487168" cy="512064"/>
+          </a:xfrm>
+          <a:prstGeom prst="rect">
+            <a:avLst/>
+          </a:prstGeom>
+          <a:noFill/>
+          <a:ln/>
+        </p:spPr>
+        <p:txBody>
+          <a:bodyPr wrap="square" lIns="0" tIns="0" rIns="0" bIns="0" rtlCol="0" anchor="ctr"/>
+          <a:lstStyle/>
+          <a:p>
+            <a:pPr algn="l" indent="0" marL="0">
+              <a:lnSpc>
+                <a:spcPct val="103000"/>
+              </a:lnSpc>
+              <a:buNone/>
+            </a:pPr>
+            <a:r>
+              <a:rPr lang="en-US" sz="1050" dirty="0">
+                <a:solidFill>
+                  <a:srgbClr val="1B1B18"/>
+                </a:solidFill>
+                <a:latin typeface="Calibri" pitchFamily="34" charset="0"/>
+                <a:ea typeface="Calibri" pitchFamily="34" charset="-122"/>
+                <a:cs typeface="Calibri" pitchFamily="34" charset="-120"/>
+              </a:rPr>
+              <a:t>Auto care-level recommendation</a:t>
+            </a:r>
+            <a:endParaRPr lang="en-US" sz="1050" dirty="0"/>
+          </a:p>
+        </p:txBody>
+      </p:sp>
+      <p:sp>
+        <p:nvSpPr>
+          <p:cNvPr id="27" name="Text 25"/>
+          <p:cNvSpPr/>
+          <p:nvPr/>
+        </p:nvSpPr>
+        <p:spPr>
+          <a:xfrm>
+            <a:off x="3666744" y="4306824"/>
+            <a:ext cx="3675888" cy="512064"/>
+          </a:xfrm>
+          <a:prstGeom prst="rect">
+            <a:avLst/>
+          </a:prstGeom>
+          <a:noFill/>
+          <a:ln/>
+        </p:spPr>
+        <p:txBody>
+          <a:bodyPr wrap="square" lIns="0" tIns="0" rIns="0" bIns="0" rtlCol="0" anchor="ctr"/>
+          <a:lstStyle/>
+          <a:p>
+            <a:pPr algn="l" indent="0" marL="0">
+              <a:lnSpc>
+                <a:spcPct val="103000"/>
+              </a:lnSpc>
+              <a:buNone/>
+            </a:pPr>
+            <a:r>
+              <a:rPr lang="en-US" sz="1050" dirty="0">
+                <a:solidFill>
+                  <a:srgbClr val="1B1B18"/>
+                </a:solidFill>
+                <a:latin typeface="Calibri" pitchFamily="34" charset="0"/>
+                <a:ea typeface="Calibri" pitchFamily="34" charset="-122"/>
+                <a:cs typeface="Calibri" pitchFamily="34" charset="-120"/>
+              </a:rPr>
+              <a:t>Care levels drive billing &amp; care plans</a:t>
+            </a:r>
+            <a:endParaRPr lang="en-US" sz="1050" dirty="0"/>
+          </a:p>
+        </p:txBody>
+      </p:sp>
+      <p:sp>
+        <p:nvSpPr>
+          <p:cNvPr id="28" name="Text 26"/>
+          <p:cNvSpPr/>
+          <p:nvPr/>
+        </p:nvSpPr>
+        <p:spPr>
+          <a:xfrm>
+            <a:off x="7598664" y="4306824"/>
+            <a:ext cx="3703320" cy="512064"/>
+          </a:xfrm>
+          <a:prstGeom prst="rect">
+            <a:avLst/>
+          </a:prstGeom>
+          <a:noFill/>
+          <a:ln/>
+        </p:spPr>
+        <p:txBody>
+          <a:bodyPr wrap="square" lIns="0" tIns="0" rIns="0" bIns="0" rtlCol="0" anchor="ctr"/>
+          <a:lstStyle/>
+          <a:p>
+            <a:pPr algn="l" indent="0" marL="0">
+              <a:lnSpc>
+                <a:spcPct val="103000"/>
+              </a:lnSpc>
+              <a:buNone/>
+            </a:pPr>
+            <a:r>
+              <a:rPr lang="en-US" sz="1050" dirty="0">
+                <a:solidFill>
+                  <a:srgbClr val="1B1B18"/>
+                </a:solidFill>
+                <a:latin typeface="Calibri" pitchFamily="34" charset="0"/>
+                <a:ea typeface="Calibri" pitchFamily="34" charset="-122"/>
+                <a:cs typeface="Calibri" pitchFamily="34" charset="-120"/>
+              </a:rPr>
+              <a:t>Too close to automated billing decisions</a:t>
+            </a:r>
+            <a:endParaRPr lang="en-US" sz="1050" dirty="0"/>
+          </a:p>
+        </p:txBody>
+      </p:sp>
+      <p:sp>
+        <p:nvSpPr>
+          <p:cNvPr id="29" name="Shape 27"/>
+          <p:cNvSpPr/>
+          <p:nvPr/>
+        </p:nvSpPr>
+        <p:spPr>
+          <a:xfrm>
+            <a:off x="667512" y="4818888"/>
+            <a:ext cx="10856671" cy="512064"/>
+          </a:xfrm>
+          <a:prstGeom prst="roundRect">
+            <a:avLst>
+              <a:gd name="adj" fmla="val 14286"/>
+            </a:avLst>
+          </a:prstGeom>
+          <a:solidFill>
+            <a:srgbClr val="EBEEFB"/>
+          </a:solidFill>
+          <a:ln/>
+        </p:spPr>
+      </p:sp>
+      <p:sp>
+        <p:nvSpPr>
+          <p:cNvPr id="30" name="Text 28"/>
+          <p:cNvSpPr/>
+          <p:nvPr/>
+        </p:nvSpPr>
+        <p:spPr>
+          <a:xfrm>
+            <a:off x="923544" y="4818888"/>
+            <a:ext cx="2487168" cy="512064"/>
+          </a:xfrm>
+          <a:prstGeom prst="rect">
+            <a:avLst/>
+          </a:prstGeom>
+          <a:noFill/>
+          <a:ln/>
+        </p:spPr>
+        <p:txBody>
+          <a:bodyPr wrap="square" lIns="0" tIns="0" rIns="0" bIns="0" rtlCol="0" anchor="ctr"/>
+          <a:lstStyle/>
+          <a:p>
+            <a:pPr algn="l" indent="0" marL="0">
+              <a:lnSpc>
+                <a:spcPct val="103000"/>
+              </a:lnSpc>
+              <a:buNone/>
+            </a:pPr>
+            <a:r>
+              <a:rPr lang="en-US" sz="1050" b="1" dirty="0">
+                <a:solidFill>
+                  <a:srgbClr val="5A6CE6"/>
+                </a:solidFill>
+                <a:latin typeface="Calibri" pitchFamily="34" charset="0"/>
+                <a:ea typeface="Calibri" pitchFamily="34" charset="-122"/>
+                <a:cs typeface="Calibri" pitchFamily="34" charset="-120"/>
+              </a:rPr>
+              <a:t>Change-of-condition review</a:t>
+            </a:r>
+            <a:endParaRPr lang="en-US" sz="1050" dirty="0"/>
+          </a:p>
+        </p:txBody>
+      </p:sp>
+      <p:sp>
+        <p:nvSpPr>
+          <p:cNvPr id="31" name="Text 29"/>
+          <p:cNvSpPr/>
+          <p:nvPr/>
+        </p:nvSpPr>
+        <p:spPr>
+          <a:xfrm>
+            <a:off x="3666744" y="4818888"/>
+            <a:ext cx="3675888" cy="512064"/>
+          </a:xfrm>
+          <a:prstGeom prst="rect">
+            <a:avLst/>
+          </a:prstGeom>
+          <a:noFill/>
+          <a:ln/>
+        </p:spPr>
+        <p:txBody>
+          <a:bodyPr wrap="square" lIns="0" tIns="0" rIns="0" bIns="0" rtlCol="0" anchor="ctr"/>
+          <a:lstStyle/>
+          <a:p>
+            <a:pPr algn="l" indent="0" marL="0">
+              <a:lnSpc>
+                <a:spcPct val="103000"/>
+              </a:lnSpc>
+              <a:buNone/>
+            </a:pPr>
+            <a:r>
+              <a:rPr lang="en-US" sz="1050" dirty="0">
+                <a:solidFill>
+                  <a:srgbClr val="1B1B18"/>
+                </a:solidFill>
+                <a:latin typeface="Calibri" pitchFamily="34" charset="0"/>
+                <a:ea typeface="Calibri" pitchFamily="34" charset="-122"/>
+                <a:cs typeface="Calibri" pitchFamily="34" charset="-120"/>
+              </a:rPr>
+              <a:t>Gradual decline is missed and costly</a:t>
+            </a:r>
+            <a:endParaRPr lang="en-US" sz="1050" dirty="0"/>
+          </a:p>
+        </p:txBody>
+      </p:sp>
+      <p:sp>
+        <p:nvSpPr>
+          <p:cNvPr id="32" name="Text 30"/>
+          <p:cNvSpPr/>
+          <p:nvPr/>
+        </p:nvSpPr>
+        <p:spPr>
+          <a:xfrm>
+            <a:off x="7598664" y="4818888"/>
+            <a:ext cx="3703320" cy="512064"/>
+          </a:xfrm>
+          <a:prstGeom prst="rect">
+            <a:avLst/>
+          </a:prstGeom>
+          <a:noFill/>
+          <a:ln/>
+        </p:spPr>
+        <p:txBody>
+          <a:bodyPr wrap="square" lIns="0" tIns="0" rIns="0" bIns="0" rtlCol="0" anchor="ctr"/>
+          <a:lstStyle/>
+          <a:p>
+            <a:pPr algn="l" indent="0" marL="0">
+              <a:lnSpc>
+                <a:spcPct val="103000"/>
+              </a:lnSpc>
+              <a:buNone/>
+            </a:pPr>
+            <a:r>
+              <a:rPr lang="en-US" sz="1050" dirty="0">
+                <a:solidFill>
+                  <a:srgbClr val="1B1B18"/>
+                </a:solidFill>
+                <a:latin typeface="Calibri" pitchFamily="34" charset="0"/>
+                <a:ea typeface="Calibri" pitchFamily="34" charset="-122"/>
+                <a:cs typeface="Calibri" pitchFamily="34" charset="-120"/>
+              </a:rPr>
+              <a:t>Turns existing Teton signal into a nurse-owned review</a:t>
+            </a:r>
+            <a:endParaRPr lang="en-US" sz="1050" dirty="0"/>
+          </a:p>
+        </p:txBody>
+      </p:sp>
+      <p:sp>
+        <p:nvSpPr>
+          <p:cNvPr id="33" name="Shape 31"/>
+          <p:cNvSpPr/>
+          <p:nvPr/>
+        </p:nvSpPr>
+        <p:spPr>
+          <a:xfrm>
+            <a:off x="777240" y="5623560"/>
+            <a:ext cx="10637215" cy="0"/>
+          </a:xfrm>
+          <a:prstGeom prst="line">
+            <a:avLst/>
+          </a:prstGeom>
+          <a:noFill/>
+          <a:ln w="9525">
+            <a:solidFill>
+              <a:srgbClr val="E2E2DC"/>
+            </a:solidFill>
+            <a:prstDash val="solid"/>
+          </a:ln>
+        </p:spPr>
+      </p:sp>
+      <p:sp>
+        <p:nvSpPr>
+          <p:cNvPr id="34" name="Text 32"/>
           <p:cNvSpPr/>
           <p:nvPr/>
         </p:nvSpPr>
@@ -4133,7 +5247,7 @@
               <a:buNone/>
             </a:pPr>
             <a:r>
-              <a:rPr lang="en-US" sz="1200" b="1" dirty="0">
+              <a:rPr lang="en-US" sz="1250" b="1" dirty="0">
                 <a:solidFill>
                   <a:srgbClr val="5A6CE6"/>
                 </a:solidFill>
@@ -4147,7 +5261,7 @@
               <a:buNone/>
             </a:pPr>
             <a:r>
-              <a:rPr lang="en-US" sz="1200" dirty="0">
+              <a:rPr lang="en-US" sz="1250" dirty="0">
                 <a:solidFill>
                   <a:srgbClr val="1B1B18"/>
                 </a:solidFill>
@@ -4155,15 +5269,15 @@
                 <a:ea typeface="Calibri" pitchFamily="34" charset="-122"/>
                 <a:cs typeface="Calibri" pitchFamily="34" charset="-120"/>
               </a:rPr>
-              <a:t>Teton identifies review-worthy evidence. The care team makes the clinical and billing decision.</a:t>
-            </a:r>
-            <a:endParaRPr lang="en-US" sz="1200" dirty="0"/>
-          </a:p>
-        </p:txBody>
-      </p:sp>
-      <p:sp>
-        <p:nvSpPr>
-          <p:cNvPr id="24" name="Text 22"/>
+              <a:t>Teton surfaces review-worthy evidence. A nurse decides what happens next.</a:t>
+            </a:r>
+            <a:endParaRPr lang="en-US" sz="1250" dirty="0"/>
+          </a:p>
+        </p:txBody>
+      </p:sp>
+      <p:sp>
+        <p:nvSpPr>
+          <p:cNvPr id="35" name="Text 33"/>
           <p:cNvSpPr/>
           <p:nvPr/>
         </p:nvSpPr>
@@ -4202,7 +5316,7 @@
       </p:sp>
       <p:sp>
         <p:nvSpPr>
-          <p:cNvPr id="25" name="Text 23"/>
+          <p:cNvPr id="36" name="Text 34"/>
           <p:cNvSpPr/>
           <p:nvPr/>
         </p:nvSpPr>
@@ -4339,7 +5453,7 @@
         <p:spPr>
           <a:xfrm>
             <a:off x="777240" y="676656"/>
-            <a:ext cx="10332720" cy="822960"/>
+            <a:ext cx="10424160" cy="822960"/>
           </a:xfrm>
           <a:prstGeom prst="rect">
             <a:avLst/>
@@ -4358,7 +5472,7 @@
               <a:buNone/>
             </a:pPr>
             <a:r>
-              <a:rPr lang="en-US" sz="2500" b="1" dirty="0">
+              <a:rPr lang="en-US" sz="2400" b="1" dirty="0">
                 <a:solidFill>
                   <a:srgbClr val="1B1B18"/>
                 </a:solidFill>
@@ -4368,7 +5482,7 @@
               </a:rPr>
               <a:t>Turn ambient signals into reviewed care evidence</a:t>
             </a:r>
-            <a:endParaRPr lang="en-US" sz="2500" dirty="0"/>
+            <a:endParaRPr lang="en-US" sz="2400" dirty="0"/>
           </a:p>
         </p:txBody>
       </p:sp>
@@ -4380,8 +5494,8 @@
         </p:nvSpPr>
         <p:spPr>
           <a:xfrm>
-            <a:off x="777240" y="1481328"/>
-            <a:ext cx="9875520" cy="502920"/>
+            <a:off x="777240" y="1463040"/>
+            <a:ext cx="10058400" cy="457200"/>
           </a:xfrm>
           <a:prstGeom prst="rect">
             <a:avLst/>
@@ -4400,7 +5514,7 @@
               <a:buNone/>
             </a:pPr>
             <a:r>
-              <a:rPr lang="en-US" sz="1300" dirty="0">
+              <a:rPr lang="en-US" sz="1250" dirty="0">
                 <a:solidFill>
                   <a:srgbClr val="83837B"/>
                 </a:solidFill>
@@ -4410,20 +5524,59 @@
               </a:rPr>
               <a:t>Detect a meaningful change, route it to a clinical owner, and document the reviewed outcome.</a:t>
             </a:r>
+            <a:endParaRPr lang="en-US" sz="1250" dirty="0"/>
+          </a:p>
+        </p:txBody>
+      </p:sp>
+      <p:sp>
+        <p:nvSpPr>
+          <p:cNvPr id="6" name="Text 4"/>
+          <p:cNvSpPr/>
+          <p:nvPr/>
+        </p:nvSpPr>
+        <p:spPr>
+          <a:xfrm>
+            <a:off x="777240" y="1901952"/>
+            <a:ext cx="1280160" cy="274320"/>
+          </a:xfrm>
+          <a:prstGeom prst="rect">
+            <a:avLst/>
+          </a:prstGeom>
+          <a:noFill/>
+          <a:ln/>
+        </p:spPr>
+        <p:txBody>
+          <a:bodyPr wrap="square" lIns="0" tIns="0" rIns="0" bIns="0" rtlCol="0" anchor="t"/>
+          <a:lstStyle/>
+          <a:p>
+            <a:pPr algn="l" indent="0" marL="0">
+              <a:buNone/>
+            </a:pPr>
+            <a:r>
+              <a:rPr lang="en-US" sz="1300" b="1" dirty="0">
+                <a:solidFill>
+                  <a:srgbClr val="1B1B18"/>
+                </a:solidFill>
+                <a:latin typeface="Calibri" pitchFamily="34" charset="0"/>
+                <a:ea typeface="Calibri" pitchFamily="34" charset="-122"/>
+                <a:cs typeface="Calibri" pitchFamily="34" charset="-120"/>
+              </a:rPr>
+              <a:t>Detect</a:t>
+            </a:r>
             <a:endParaRPr lang="en-US" sz="1300" dirty="0"/>
           </a:p>
         </p:txBody>
       </p:sp>
       <p:sp>
         <p:nvSpPr>
-          <p:cNvPr id="6" name="Text 4"/>
-          <p:cNvSpPr/>
-          <p:nvPr/>
-        </p:nvSpPr>
-        <p:spPr>
-          <a:xfrm>
-            <a:off x="777240" y="1938528"/>
-            <a:ext cx="1371600" cy="274320"/>
+          <p:cNvPr id="7" name="Text 5"/>
+          <p:cNvSpPr/>
+          <p:nvPr/>
+        </p:nvSpPr>
+        <p:spPr>
+          <a:xfrm>
+            <a:off x="1837944" y="1901952"/>
+            <a:ext cx="365760" cy="274320"/>
           </a:xfrm>
           <a:prstGeom prst="rect">
             <a:avLst/>
@@ -4439,7 +5592,46 @@
               <a:buNone/>
             </a:pPr>
             <a:r>
-              <a:rPr lang="en-US" sz="1350" b="1" dirty="0">
+              <a:rPr lang="en-US" sz="1300" b="1" dirty="0">
+                <a:solidFill>
+                  <a:srgbClr val="5A6CE6"/>
+                </a:solidFill>
+                <a:latin typeface="Calibri" pitchFamily="34" charset="0"/>
+                <a:ea typeface="Calibri" pitchFamily="34" charset="-122"/>
+                <a:cs typeface="Calibri" pitchFamily="34" charset="-120"/>
+              </a:rPr>
+              <a:t>→</a:t>
+            </a:r>
+            <a:endParaRPr lang="en-US" sz="1300" dirty="0"/>
+          </a:p>
+        </p:txBody>
+      </p:sp>
+      <p:sp>
+        <p:nvSpPr>
+          <p:cNvPr id="8" name="Text 6"/>
+          <p:cNvSpPr/>
+          <p:nvPr/>
+        </p:nvSpPr>
+        <p:spPr>
+          <a:xfrm>
+            <a:off x="2203704" y="1901952"/>
+            <a:ext cx="1280160" cy="274320"/>
+          </a:xfrm>
+          <a:prstGeom prst="rect">
+            <a:avLst/>
+          </a:prstGeom>
+          <a:noFill/>
+          <a:ln/>
+        </p:spPr>
+        <p:txBody>
+          <a:bodyPr wrap="square" lIns="0" tIns="0" rIns="0" bIns="0" rtlCol="0" anchor="t"/>
+          <a:lstStyle/>
+          <a:p>
+            <a:pPr algn="l" indent="0" marL="0">
+              <a:buNone/>
+            </a:pPr>
+            <a:r>
+              <a:rPr lang="en-US" sz="1300" b="1" dirty="0">
                 <a:solidFill>
                   <a:srgbClr val="1B1B18"/>
                 </a:solidFill>
@@ -4447,22 +5639,22 @@
                 <a:ea typeface="Calibri" pitchFamily="34" charset="-122"/>
                 <a:cs typeface="Calibri" pitchFamily="34" charset="-120"/>
               </a:rPr>
-              <a:t>Detect</a:t>
-            </a:r>
-            <a:endParaRPr lang="en-US" sz="1350" dirty="0"/>
-          </a:p>
-        </p:txBody>
-      </p:sp>
-      <p:sp>
-        <p:nvSpPr>
-          <p:cNvPr id="7" name="Text 5"/>
-          <p:cNvSpPr/>
-          <p:nvPr/>
-        </p:nvSpPr>
-        <p:spPr>
-          <a:xfrm>
-            <a:off x="1947672" y="1938528"/>
-            <a:ext cx="457200" cy="274320"/>
+              <a:t>Review</a:t>
+            </a:r>
+            <a:endParaRPr lang="en-US" sz="1300" dirty="0"/>
+          </a:p>
+        </p:txBody>
+      </p:sp>
+      <p:sp>
+        <p:nvSpPr>
+          <p:cNvPr id="9" name="Text 7"/>
+          <p:cNvSpPr/>
+          <p:nvPr/>
+        </p:nvSpPr>
+        <p:spPr>
+          <a:xfrm>
+            <a:off x="3264408" y="1901952"/>
+            <a:ext cx="365760" cy="274320"/>
           </a:xfrm>
           <a:prstGeom prst="rect">
             <a:avLst/>
@@ -4478,7 +5670,7 @@
               <a:buNone/>
             </a:pPr>
             <a:r>
-              <a:rPr lang="en-US" sz="1400" b="1" dirty="0">
+              <a:rPr lang="en-US" sz="1300" b="1" dirty="0">
                 <a:solidFill>
                   <a:srgbClr val="5A6CE6"/>
                 </a:solidFill>
@@ -4488,20 +5680,20 @@
               </a:rPr>
               <a:t>→</a:t>
             </a:r>
-            <a:endParaRPr lang="en-US" sz="1400" dirty="0"/>
-          </a:p>
-        </p:txBody>
-      </p:sp>
-      <p:sp>
-        <p:nvSpPr>
-          <p:cNvPr id="8" name="Text 6"/>
-          <p:cNvSpPr/>
-          <p:nvPr/>
-        </p:nvSpPr>
-        <p:spPr>
-          <a:xfrm>
-            <a:off x="2404872" y="1938528"/>
-            <a:ext cx="1371600" cy="274320"/>
+            <a:endParaRPr lang="en-US" sz="1300" dirty="0"/>
+          </a:p>
+        </p:txBody>
+      </p:sp>
+      <p:sp>
+        <p:nvSpPr>
+          <p:cNvPr id="10" name="Text 8"/>
+          <p:cNvSpPr/>
+          <p:nvPr/>
+        </p:nvSpPr>
+        <p:spPr>
+          <a:xfrm>
+            <a:off x="3630168" y="1901952"/>
+            <a:ext cx="1280160" cy="274320"/>
           </a:xfrm>
           <a:prstGeom prst="rect">
             <a:avLst/>
@@ -4517,7 +5709,7 @@
               <a:buNone/>
             </a:pPr>
             <a:r>
-              <a:rPr lang="en-US" sz="1350" b="1" dirty="0">
+              <a:rPr lang="en-US" sz="1300" b="1" dirty="0">
                 <a:solidFill>
                   <a:srgbClr val="1B1B18"/>
                 </a:solidFill>
@@ -4525,22 +5717,22 @@
                 <a:ea typeface="Calibri" pitchFamily="34" charset="-122"/>
                 <a:cs typeface="Calibri" pitchFamily="34" charset="-120"/>
               </a:rPr>
-              <a:t>Review</a:t>
-            </a:r>
-            <a:endParaRPr lang="en-US" sz="1350" dirty="0"/>
-          </a:p>
-        </p:txBody>
-      </p:sp>
-      <p:sp>
-        <p:nvSpPr>
-          <p:cNvPr id="9" name="Text 7"/>
-          <p:cNvSpPr/>
-          <p:nvPr/>
-        </p:nvSpPr>
-        <p:spPr>
-          <a:xfrm>
-            <a:off x="3575304" y="1938528"/>
-            <a:ext cx="457200" cy="274320"/>
+              <a:t>Document</a:t>
+            </a:r>
+            <a:endParaRPr lang="en-US" sz="1300" dirty="0"/>
+          </a:p>
+        </p:txBody>
+      </p:sp>
+      <p:sp>
+        <p:nvSpPr>
+          <p:cNvPr id="11" name="Text 9"/>
+          <p:cNvSpPr/>
+          <p:nvPr/>
+        </p:nvSpPr>
+        <p:spPr>
+          <a:xfrm>
+            <a:off x="4690872" y="1901952"/>
+            <a:ext cx="365760" cy="274320"/>
           </a:xfrm>
           <a:prstGeom prst="rect">
             <a:avLst/>
@@ -4556,7 +5748,7 @@
               <a:buNone/>
             </a:pPr>
             <a:r>
-              <a:rPr lang="en-US" sz="1400" b="1" dirty="0">
+              <a:rPr lang="en-US" sz="1300" b="1" dirty="0">
                 <a:solidFill>
                   <a:srgbClr val="5A6CE6"/>
                 </a:solidFill>
@@ -4566,20 +5758,20 @@
               </a:rPr>
               <a:t>→</a:t>
             </a:r>
-            <a:endParaRPr lang="en-US" sz="1400" dirty="0"/>
-          </a:p>
-        </p:txBody>
-      </p:sp>
-      <p:sp>
-        <p:nvSpPr>
-          <p:cNvPr id="10" name="Text 8"/>
-          <p:cNvSpPr/>
-          <p:nvPr/>
-        </p:nvSpPr>
-        <p:spPr>
-          <a:xfrm>
-            <a:off x="4032504" y="1938528"/>
-            <a:ext cx="1371600" cy="274320"/>
+            <a:endParaRPr lang="en-US" sz="1300" dirty="0"/>
+          </a:p>
+        </p:txBody>
+      </p:sp>
+      <p:sp>
+        <p:nvSpPr>
+          <p:cNvPr id="12" name="Text 10"/>
+          <p:cNvSpPr/>
+          <p:nvPr/>
+        </p:nvSpPr>
+        <p:spPr>
+          <a:xfrm>
+            <a:off x="5056632" y="1901952"/>
+            <a:ext cx="1280160" cy="274320"/>
           </a:xfrm>
           <a:prstGeom prst="rect">
             <a:avLst/>
@@ -4595,7 +5787,7 @@
               <a:buNone/>
             </a:pPr>
             <a:r>
-              <a:rPr lang="en-US" sz="1350" b="1" dirty="0">
+              <a:rPr lang="en-US" sz="1300" b="1" dirty="0">
                 <a:solidFill>
                   <a:srgbClr val="1B1B18"/>
                 </a:solidFill>
@@ -4603,87 +5795,9 @@
                 <a:ea typeface="Calibri" pitchFamily="34" charset="-122"/>
                 <a:cs typeface="Calibri" pitchFamily="34" charset="-120"/>
               </a:rPr>
-              <a:t>Document</a:t>
-            </a:r>
-            <a:endParaRPr lang="en-US" sz="1350" dirty="0"/>
-          </a:p>
-        </p:txBody>
-      </p:sp>
-      <p:sp>
-        <p:nvSpPr>
-          <p:cNvPr id="11" name="Text 9"/>
-          <p:cNvSpPr/>
-          <p:nvPr/>
-        </p:nvSpPr>
-        <p:spPr>
-          <a:xfrm>
-            <a:off x="5202936" y="1938528"/>
-            <a:ext cx="457200" cy="274320"/>
-          </a:xfrm>
-          <a:prstGeom prst="rect">
-            <a:avLst/>
-          </a:prstGeom>
-          <a:noFill/>
-          <a:ln/>
-        </p:spPr>
-        <p:txBody>
-          <a:bodyPr wrap="square" lIns="0" tIns="0" rIns="0" bIns="0" rtlCol="0" anchor="t"/>
-          <a:lstStyle/>
-          <a:p>
-            <a:pPr algn="l" indent="0" marL="0">
-              <a:buNone/>
-            </a:pPr>
-            <a:r>
-              <a:rPr lang="en-US" sz="1400" b="1" dirty="0">
-                <a:solidFill>
-                  <a:srgbClr val="5A6CE6"/>
-                </a:solidFill>
-                <a:latin typeface="Calibri" pitchFamily="34" charset="0"/>
-                <a:ea typeface="Calibri" pitchFamily="34" charset="-122"/>
-                <a:cs typeface="Calibri" pitchFamily="34" charset="-120"/>
-              </a:rPr>
-              <a:t>→</a:t>
-            </a:r>
-            <a:endParaRPr lang="en-US" sz="1400" dirty="0"/>
-          </a:p>
-        </p:txBody>
-      </p:sp>
-      <p:sp>
-        <p:nvSpPr>
-          <p:cNvPr id="12" name="Text 10"/>
-          <p:cNvSpPr/>
-          <p:nvPr/>
-        </p:nvSpPr>
-        <p:spPr>
-          <a:xfrm>
-            <a:off x="5660136" y="1938528"/>
-            <a:ext cx="1371600" cy="274320"/>
-          </a:xfrm>
-          <a:prstGeom prst="rect">
-            <a:avLst/>
-          </a:prstGeom>
-          <a:noFill/>
-          <a:ln/>
-        </p:spPr>
-        <p:txBody>
-          <a:bodyPr wrap="square" lIns="0" tIns="0" rIns="0" bIns="0" rtlCol="0" anchor="t"/>
-          <a:lstStyle/>
-          <a:p>
-            <a:pPr algn="l" indent="0" marL="0">
-              <a:buNone/>
-            </a:pPr>
-            <a:r>
-              <a:rPr lang="en-US" sz="1350" b="1" dirty="0">
-                <a:solidFill>
-                  <a:srgbClr val="1B1B18"/>
-                </a:solidFill>
-                <a:latin typeface="Calibri" pitchFamily="34" charset="0"/>
-                <a:ea typeface="Calibri" pitchFamily="34" charset="-122"/>
-                <a:cs typeface="Calibri" pitchFamily="34" charset="-120"/>
-              </a:rPr>
               <a:t>Explain</a:t>
             </a:r>
-            <a:endParaRPr lang="en-US" sz="1350" dirty="0"/>
+            <a:endParaRPr lang="en-US" sz="1300" dirty="0"/>
           </a:p>
         </p:txBody>
       </p:sp>
@@ -4695,12 +5809,12 @@
         </p:nvSpPr>
         <p:spPr>
           <a:xfrm>
-            <a:off x="777240" y="2514600"/>
-            <a:ext cx="7086600" cy="3246120"/>
+            <a:off x="777240" y="2395728"/>
+            <a:ext cx="7315200" cy="3364992"/>
           </a:xfrm>
           <a:prstGeom prst="roundRect">
             <a:avLst>
-              <a:gd name="adj" fmla="val 3380"/>
+              <a:gd name="adj" fmla="val 3261"/>
             </a:avLst>
           </a:prstGeom>
           <a:solidFill>
@@ -4729,7 +5843,7 @@
         </p:nvSpPr>
         <p:spPr>
           <a:xfrm>
-            <a:off x="1106424" y="2770632"/>
+            <a:off x="1106424" y="2651760"/>
             <a:ext cx="2743200" cy="201168"/>
           </a:xfrm>
           <a:prstGeom prst="rect">
@@ -4746,7 +5860,7 @@
               <a:buNone/>
             </a:pPr>
             <a:r>
-              <a:rPr lang="en-US" sz="900" b="1" spc="130" kern="0" dirty="0">
+              <a:rPr lang="en-US" sz="950" b="1" spc="40" kern="0" dirty="0">
                 <a:solidFill>
                   <a:srgbClr val="83837B"/>
                 </a:solidFill>
@@ -4754,9 +5868,9 @@
                 <a:ea typeface="Calibri" pitchFamily="34" charset="-122"/>
                 <a:cs typeface="Calibri" pitchFamily="34" charset="-120"/>
               </a:rPr>
-              <a:t>SUGGESTED REVIEW</a:t>
-            </a:r>
-            <a:endParaRPr lang="en-US" sz="900" dirty="0"/>
+              <a:t>Suggested review</a:t>
+            </a:r>
+            <a:endParaRPr lang="en-US" sz="950" dirty="0"/>
           </a:p>
         </p:txBody>
       </p:sp>
@@ -4768,8 +5882,8 @@
         </p:nvSpPr>
         <p:spPr>
           <a:xfrm>
-            <a:off x="1106424" y="2971800"/>
-            <a:ext cx="5257800" cy="365760"/>
+            <a:off x="1106424" y="2852928"/>
+            <a:ext cx="5120640" cy="365760"/>
           </a:xfrm>
           <a:prstGeom prst="rect">
             <a:avLst/>
@@ -4807,8 +5921,8 @@
         </p:nvSpPr>
         <p:spPr>
           <a:xfrm>
-            <a:off x="6126480" y="2971800"/>
-            <a:ext cx="1408176" cy="329184"/>
+            <a:off x="5989320" y="2871216"/>
+            <a:ext cx="1773936" cy="329184"/>
           </a:xfrm>
           <a:prstGeom prst="rect">
             <a:avLst/>
@@ -4832,7 +5946,7 @@
                 <a:ea typeface="Calibri" pitchFamily="34" charset="-122"/>
                 <a:cs typeface="Calibri" pitchFamily="34" charset="-120"/>
               </a:rPr>
-              <a:t>Priority: high</a:t>
+              <a:t>Review priority: High</a:t>
             </a:r>
             <a:endParaRPr lang="en-US" sz="1050" dirty="0"/>
           </a:p>
@@ -4846,7 +5960,7 @@
         </p:nvSpPr>
         <p:spPr>
           <a:xfrm>
-            <a:off x="1106424" y="3483864"/>
+            <a:off x="1106424" y="3346704"/>
             <a:ext cx="2743200" cy="201168"/>
           </a:xfrm>
           <a:prstGeom prst="rect">
@@ -4863,7 +5977,7 @@
               <a:buNone/>
             </a:pPr>
             <a:r>
-              <a:rPr lang="en-US" sz="900" b="1" spc="130" kern="0" dirty="0">
+              <a:rPr lang="en-US" sz="950" b="1" spc="40" kern="0" dirty="0">
                 <a:solidFill>
                   <a:srgbClr val="83837B"/>
                 </a:solidFill>
@@ -4871,9 +5985,9 @@
                 <a:ea typeface="Calibri" pitchFamily="34" charset="-122"/>
                 <a:cs typeface="Calibri" pitchFamily="34" charset="-120"/>
               </a:rPr>
-              <a:t>WHY SURFACED</a:t>
-            </a:r>
-            <a:endParaRPr lang="en-US" sz="900" dirty="0"/>
+              <a:t>Why surfaced</a:t>
+            </a:r>
+            <a:endParaRPr lang="en-US" sz="950" dirty="0"/>
           </a:p>
         </p:txBody>
       </p:sp>
@@ -4885,8 +5999,8 @@
         </p:nvSpPr>
         <p:spPr>
           <a:xfrm>
-            <a:off x="1106424" y="3685032"/>
-            <a:ext cx="6428232" cy="640080"/>
+            <a:off x="1106424" y="3547872"/>
+            <a:ext cx="6656832" cy="603504"/>
           </a:xfrm>
           <a:prstGeom prst="rect">
             <a:avLst/>
@@ -4913,7 +6027,7 @@
                 <a:ea typeface="Calibri" pitchFamily="34" charset="-122"/>
                 <a:cs typeface="Calibri" pitchFamily="34" charset="-120"/>
               </a:rPr>
-              <a:t>Nighttime rising increased from 1.2 to 4.6 per night over six weeks. Staff-supported room entries increased. Two possible unwitnessed events.</a:t>
+              <a:t>Nighttime rising increased from 1.2 to 4.6 per night over six weeks. Staff-supported entries increased. Two possible unwitnessed events.</a:t>
             </a:r>
             <a:endParaRPr lang="en-US" sz="1250" dirty="0"/>
           </a:p>
@@ -4927,8 +6041,8 @@
         </p:nvSpPr>
         <p:spPr>
           <a:xfrm>
-            <a:off x="1106424" y="4343400"/>
-            <a:ext cx="6428232" cy="237744"/>
+            <a:off x="1106424" y="4187952"/>
+            <a:ext cx="6656832" cy="219456"/>
           </a:xfrm>
           <a:prstGeom prst="rect">
             <a:avLst/>
@@ -4966,8 +6080,8 @@
         </p:nvSpPr>
         <p:spPr>
           <a:xfrm>
-            <a:off x="1106424" y="4727448"/>
-            <a:ext cx="6428232" cy="0"/>
+            <a:off x="1106424" y="4572000"/>
+            <a:ext cx="6656832" cy="0"/>
           </a:xfrm>
           <a:prstGeom prst="line">
             <a:avLst/>
@@ -4989,7 +6103,7 @@
         </p:nvSpPr>
         <p:spPr>
           <a:xfrm>
-            <a:off x="1106424" y="4837176"/>
+            <a:off x="1106424" y="4681728"/>
             <a:ext cx="2743200" cy="201168"/>
           </a:xfrm>
           <a:prstGeom prst="rect">
@@ -5006,7 +6120,7 @@
               <a:buNone/>
             </a:pPr>
             <a:r>
-              <a:rPr lang="en-US" sz="900" b="1" spc="130" kern="0" dirty="0">
+              <a:rPr lang="en-US" sz="950" b="1" spc="40" kern="0" dirty="0">
                 <a:solidFill>
                   <a:srgbClr val="83837B"/>
                 </a:solidFill>
@@ -5014,9 +6128,9 @@
                 <a:ea typeface="Calibri" pitchFamily="34" charset="-122"/>
                 <a:cs typeface="Calibri" pitchFamily="34" charset="-120"/>
               </a:rPr>
-              <a:t>REVIEW DECISION</a:t>
-            </a:r>
-            <a:endParaRPr lang="en-US" sz="900" dirty="0"/>
+              <a:t>Nurse decision</a:t>
+            </a:r>
+            <a:endParaRPr lang="en-US" sz="950" dirty="0"/>
           </a:p>
         </p:txBody>
       </p:sp>
@@ -5028,7 +6142,7 @@
         </p:nvSpPr>
         <p:spPr>
           <a:xfrm>
-            <a:off x="1143000" y="5120640"/>
+            <a:off x="1143000" y="4965192"/>
             <a:ext cx="82296" cy="82296"/>
           </a:xfrm>
           <a:prstGeom prst="ellipse">
@@ -5048,8 +6162,8 @@
         </p:nvSpPr>
         <p:spPr>
           <a:xfrm>
-            <a:off x="1344168" y="5074920"/>
-            <a:ext cx="6172200" cy="219456"/>
+            <a:off x="1344168" y="4919472"/>
+            <a:ext cx="6400800" cy="219456"/>
           </a:xfrm>
           <a:prstGeom prst="rect">
             <a:avLst/>
@@ -5087,7 +6201,7 @@
         </p:nvSpPr>
         <p:spPr>
           <a:xfrm>
-            <a:off x="1143000" y="5340096"/>
+            <a:off x="1143000" y="5184648"/>
             <a:ext cx="82296" cy="82296"/>
           </a:xfrm>
           <a:prstGeom prst="ellipse">
@@ -5107,8 +6221,8 @@
         </p:nvSpPr>
         <p:spPr>
           <a:xfrm>
-            <a:off x="1344168" y="5294376"/>
-            <a:ext cx="6172200" cy="219456"/>
+            <a:off x="1344168" y="5138928"/>
+            <a:ext cx="6400800" cy="219456"/>
           </a:xfrm>
           <a:prstGeom prst="rect">
             <a:avLst/>
@@ -5146,7 +6260,7 @@
         </p:nvSpPr>
         <p:spPr>
           <a:xfrm>
-            <a:off x="1143000" y="5559552"/>
+            <a:off x="1143000" y="5404104"/>
             <a:ext cx="82296" cy="82296"/>
           </a:xfrm>
           <a:prstGeom prst="ellipse">
@@ -5166,8 +6280,8 @@
         </p:nvSpPr>
         <p:spPr>
           <a:xfrm>
-            <a:off x="1344168" y="5513832"/>
-            <a:ext cx="6172200" cy="219456"/>
+            <a:off x="1344168" y="5358384"/>
+            <a:ext cx="6400800" cy="219456"/>
           </a:xfrm>
           <a:prstGeom prst="rect">
             <a:avLst/>
@@ -5205,8 +6319,8 @@
         </p:nvSpPr>
         <p:spPr>
           <a:xfrm>
-            <a:off x="8275320" y="2770632"/>
-            <a:ext cx="3139135" cy="201168"/>
+            <a:off x="8503920" y="2651760"/>
+            <a:ext cx="2910535" cy="201168"/>
           </a:xfrm>
           <a:prstGeom prst="rect">
             <a:avLst/>
@@ -5222,7 +6336,7 @@
               <a:buNone/>
             </a:pPr>
             <a:r>
-              <a:rPr lang="en-US" sz="950" b="1" spc="130" kern="0" dirty="0">
+              <a:rPr lang="en-US" sz="950" b="1" spc="40" kern="0" dirty="0">
                 <a:solidFill>
                   <a:srgbClr val="83837B"/>
                 </a:solidFill>
@@ -5230,7 +6344,7 @@
                 <a:ea typeface="Calibri" pitchFamily="34" charset="-122"/>
                 <a:cs typeface="Calibri" pitchFamily="34" charset="-120"/>
               </a:rPr>
-              <a:t>DOCUMENTATION</a:t>
+              <a:t>Documentation</a:t>
             </a:r>
             <a:endParaRPr lang="en-US" sz="950" dirty="0"/>
           </a:p>
@@ -5244,8 +6358,8 @@
         </p:nvSpPr>
         <p:spPr>
           <a:xfrm>
-            <a:off x="8275320" y="2990088"/>
-            <a:ext cx="3139135" cy="640080"/>
+            <a:off x="8503920" y="2852928"/>
+            <a:ext cx="2910535" cy="640080"/>
           </a:xfrm>
           <a:prstGeom prst="rect">
             <a:avLst/>
@@ -5264,7 +6378,7 @@
               <a:buNone/>
             </a:pPr>
             <a:r>
-              <a:rPr lang="en-US" sz="1250" dirty="0">
+              <a:rPr lang="en-US" sz="1200" dirty="0">
                 <a:solidFill>
                   <a:srgbClr val="1B1B18"/>
                 </a:solidFill>
@@ -5272,9 +6386,9 @@
                 <a:ea typeface="Calibri" pitchFamily="34" charset="-122"/>
                 <a:cs typeface="Calibri" pitchFamily="34" charset="-120"/>
               </a:rPr>
-              <a:t>The confirmed review is written to the August Health / EHR record.</a:t>
-            </a:r>
-            <a:endParaRPr lang="en-US" sz="1250" dirty="0"/>
+              <a:t>If confirmed, the review is added to the resident record.</a:t>
+            </a:r>
+            <a:endParaRPr lang="en-US" sz="1200" dirty="0"/>
           </a:p>
         </p:txBody>
       </p:sp>
@@ -5286,8 +6400,8 @@
         </p:nvSpPr>
         <p:spPr>
           <a:xfrm>
-            <a:off x="8275320" y="3831336"/>
-            <a:ext cx="3139135" cy="0"/>
+            <a:off x="8503920" y="3602736"/>
+            <a:ext cx="2910535" cy="0"/>
           </a:xfrm>
           <a:prstGeom prst="line">
             <a:avLst/>
@@ -5309,8 +6423,8 @@
         </p:nvSpPr>
         <p:spPr>
           <a:xfrm>
-            <a:off x="8275320" y="3977640"/>
-            <a:ext cx="3139135" cy="201168"/>
+            <a:off x="8503920" y="3730752"/>
+            <a:ext cx="2910535" cy="201168"/>
           </a:xfrm>
           <a:prstGeom prst="rect">
             <a:avLst/>
@@ -5326,7 +6440,7 @@
               <a:buNone/>
             </a:pPr>
             <a:r>
-              <a:rPr lang="en-US" sz="950" b="1" spc="130" kern="0" dirty="0">
+              <a:rPr lang="en-US" sz="950" b="1" spc="40" kern="0" dirty="0">
                 <a:solidFill>
                   <a:srgbClr val="83837B"/>
                 </a:solidFill>
@@ -5334,7 +6448,7 @@
                 <a:ea typeface="Calibri" pitchFamily="34" charset="-122"/>
                 <a:cs typeface="Calibri" pitchFamily="34" charset="-120"/>
               </a:rPr>
-              <a:t>ADOPTION</a:t>
+              <a:t>Designed for adoption</a:t>
             </a:r>
             <a:endParaRPr lang="en-US" sz="950" dirty="0"/>
           </a:p>
@@ -5348,8 +6462,8 @@
         </p:nvSpPr>
         <p:spPr>
           <a:xfrm>
-            <a:off x="8275320" y="4197096"/>
-            <a:ext cx="3139135" cy="1280160"/>
+            <a:off x="8503920" y="3968496"/>
+            <a:ext cx="2910535" cy="1554480"/>
           </a:xfrm>
           <a:prstGeom prst="rect">
             <a:avLst/>
@@ -5361,14 +6475,18 @@
           <a:bodyPr wrap="square" lIns="0" tIns="0" rIns="0" bIns="0" rtlCol="0" anchor="t"/>
           <a:lstStyle/>
           <a:p>
-            <a:pPr algn="l" indent="0" marL="0">
+            <a:pPr algn="l" marL="203200" indent="-203200">
               <a:lnSpc>
-                <a:spcPct val="114000"/>
+                <a:spcPct val="128000"/>
               </a:lnSpc>
-              <a:buNone/>
-            </a:pPr>
-            <a:r>
-              <a:rPr lang="en-US" sz="1250" dirty="0">
+              <a:spcAft>
+                <a:spcPts val="300"/>
+              </a:spcAft>
+              <a:buSzPct val="100000"/>
+              <a:buChar char="•"/>
+            </a:pPr>
+            <a:r>
+              <a:rPr lang="en-US" sz="1200" dirty="0">
                 <a:solidFill>
                   <a:srgbClr val="1B1B18"/>
                 </a:solidFill>
@@ -5376,15 +6494,126 @@
                 <a:ea typeface="Calibri" pitchFamily="34" charset="-122"/>
                 <a:cs typeface="Calibri" pitchFamily="34" charset="-120"/>
               </a:rPr>
-              <a:t>One clinical owner. One existing cadence. Not a new dashboard for every floor caregiver.</a:t>
-            </a:r>
-            <a:endParaRPr lang="en-US" sz="1250" dirty="0"/>
+              <a:t>One clinical owner</a:t>
+            </a:r>
+            <a:endParaRPr lang="en-US" sz="1200" dirty="0"/>
+          </a:p>
+          <a:p>
+            <a:pPr algn="l" marL="203200" indent="-203200">
+              <a:lnSpc>
+                <a:spcPct val="128000"/>
+              </a:lnSpc>
+              <a:spcAft>
+                <a:spcPts val="300"/>
+              </a:spcAft>
+              <a:buSzPct val="100000"/>
+              <a:buChar char="•"/>
+            </a:pPr>
+            <a:r>
+              <a:rPr lang="en-US" sz="1200" dirty="0">
+                <a:solidFill>
+                  <a:srgbClr val="1B1B18"/>
+                </a:solidFill>
+                <a:latin typeface="Calibri" pitchFamily="34" charset="0"/>
+                <a:ea typeface="Calibri" pitchFamily="34" charset="-122"/>
+                <a:cs typeface="Calibri" pitchFamily="34" charset="-120"/>
+              </a:rPr>
+              <a:t>One existing cadence</a:t>
+            </a:r>
+            <a:endParaRPr lang="en-US" sz="1200" dirty="0"/>
+          </a:p>
+          <a:p>
+            <a:pPr algn="l" marL="203200" indent="-203200">
+              <a:lnSpc>
+                <a:spcPct val="128000"/>
+              </a:lnSpc>
+              <a:spcAft>
+                <a:spcPts val="300"/>
+              </a:spcAft>
+              <a:buSzPct val="100000"/>
+              <a:buChar char="•"/>
+            </a:pPr>
+            <a:r>
+              <a:rPr lang="en-US" sz="1200" dirty="0">
+                <a:solidFill>
+                  <a:srgbClr val="1B1B18"/>
+                </a:solidFill>
+                <a:latin typeface="Calibri" pitchFamily="34" charset="0"/>
+                <a:ea typeface="Calibri" pitchFamily="34" charset="-122"/>
+                <a:cs typeface="Calibri" pitchFamily="34" charset="-120"/>
+              </a:rPr>
+              <a:t>Two to three candidates a week</a:t>
+            </a:r>
+            <a:endParaRPr lang="en-US" sz="1200" dirty="0"/>
+          </a:p>
+          <a:p>
+            <a:pPr algn="l" marL="203200" indent="-203200">
+              <a:lnSpc>
+                <a:spcPct val="128000"/>
+              </a:lnSpc>
+              <a:spcAft>
+                <a:spcPts val="300"/>
+              </a:spcAft>
+              <a:buSzPct val="100000"/>
+              <a:buChar char="•"/>
+            </a:pPr>
+            <a:r>
+              <a:rPr lang="en-US" sz="1200" dirty="0">
+                <a:solidFill>
+                  <a:srgbClr val="1B1B18"/>
+                </a:solidFill>
+                <a:latin typeface="Calibri" pitchFamily="34" charset="0"/>
+                <a:ea typeface="Calibri" pitchFamily="34" charset="-122"/>
+                <a:cs typeface="Calibri" pitchFamily="34" charset="-120"/>
+              </a:rPr>
+              <a:t>Not a new dashboard for every caregiver</a:t>
+            </a:r>
+            <a:endParaRPr lang="en-US" sz="1200" dirty="0"/>
           </a:p>
         </p:txBody>
       </p:sp>
       <p:sp>
         <p:nvSpPr>
           <p:cNvPr id="33" name="Text 31"/>
+          <p:cNvSpPr/>
+          <p:nvPr/>
+        </p:nvSpPr>
+        <p:spPr>
+          <a:xfrm>
+            <a:off x="777240" y="5815584"/>
+            <a:ext cx="7315200" cy="219456"/>
+          </a:xfrm>
+          <a:prstGeom prst="rect">
+            <a:avLst/>
+          </a:prstGeom>
+          <a:noFill/>
+          <a:ln/>
+        </p:spPr>
+        <p:txBody>
+          <a:bodyPr wrap="square" lIns="0" tIns="0" rIns="0" bIns="0" rtlCol="0" anchor="t"/>
+          <a:lstStyle/>
+          <a:p>
+            <a:pPr algn="l" indent="0" marL="0">
+              <a:buNone/>
+            </a:pPr>
+            <a:r>
+              <a:rPr lang="en-US" sz="950" i="1" dirty="0">
+                <a:solidFill>
+                  <a:srgbClr val="83837B"/>
+                </a:solidFill>
+                <a:latin typeface="Calibri" pitchFamily="34" charset="0"/>
+                <a:ea typeface="Calibri" pitchFamily="34" charset="-122"/>
+                <a:cs typeface="Calibri" pitchFamily="34" charset="-120"/>
+              </a:rPr>
+              <a:t>Family summaries are generated only after staff confirmation.</a:t>
+            </a:r>
+            <a:endParaRPr lang="en-US" sz="950" dirty="0"/>
+          </a:p>
+        </p:txBody>
+      </p:sp>
+      <p:sp>
+        <p:nvSpPr>
+          <p:cNvPr id="34" name="Text 32"/>
           <p:cNvSpPr/>
           <p:nvPr/>
         </p:nvSpPr>
@@ -5423,7 +6652,7 @@
       </p:sp>
       <p:sp>
         <p:nvSpPr>
-          <p:cNvPr id="34" name="Text 32"/>
+          <p:cNvPr id="35" name="Text 33"/>
           <p:cNvSpPr/>
           <p:nvPr/>
         </p:nvSpPr>
@@ -5560,7 +6789,7 @@
         <p:spPr>
           <a:xfrm>
             <a:off x="777240" y="676656"/>
-            <a:ext cx="10332720" cy="822960"/>
+            <a:ext cx="10424160" cy="822960"/>
           </a:xfrm>
           <a:prstGeom prst="rect">
             <a:avLst/>
@@ -5579,7 +6808,7 @@
               <a:buNone/>
             </a:pPr>
             <a:r>
-              <a:rPr lang="en-US" sz="2500" b="1" dirty="0">
+              <a:rPr lang="en-US" sz="2400" b="1" dirty="0">
                 <a:solidFill>
                   <a:srgbClr val="1B1B18"/>
                 </a:solidFill>
@@ -5589,7 +6818,7 @@
               </a:rPr>
               <a:t>What must be true before we scale the build</a:t>
             </a:r>
-            <a:endParaRPr lang="en-US" sz="2500" dirty="0"/>
+            <a:endParaRPr lang="en-US" sz="2400" dirty="0"/>
           </a:p>
         </p:txBody>
       </p:sp>
@@ -5601,8 +6830,8 @@
         </p:nvSpPr>
         <p:spPr>
           <a:xfrm>
-            <a:off x="777240" y="1481328"/>
-            <a:ext cx="9875520" cy="502920"/>
+            <a:off x="777240" y="1463040"/>
+            <a:ext cx="10058400" cy="457200"/>
           </a:xfrm>
           <a:prstGeom prst="rect">
             <a:avLst/>
@@ -5621,7 +6850,7 @@
               <a:buNone/>
             </a:pPr>
             <a:r>
-              <a:rPr lang="en-US" sz="1300" dirty="0">
+              <a:rPr lang="en-US" sz="1250" dirty="0">
                 <a:solidFill>
                   <a:srgbClr val="83837B"/>
                 </a:solidFill>
@@ -5631,20 +6860,120 @@
               </a:rPr>
               <a:t>Signal quality gates the bet. Workflow fit shapes the product. Behavior change proves value.</a:t>
             </a:r>
+            <a:endParaRPr lang="en-US" sz="1250" dirty="0"/>
+          </a:p>
+        </p:txBody>
+      </p:sp>
+      <p:sp>
+        <p:nvSpPr>
+          <p:cNvPr id="6" name="Shape 4"/>
+          <p:cNvSpPr/>
+          <p:nvPr/>
+        </p:nvSpPr>
+        <p:spPr>
+          <a:xfrm>
+            <a:off x="777240" y="1874520"/>
+            <a:ext cx="10637215" cy="1371600"/>
+          </a:xfrm>
+          <a:prstGeom prst="roundRect">
+            <a:avLst>
+              <a:gd name="adj" fmla="val 6667"/>
+            </a:avLst>
+          </a:prstGeom>
+          <a:solidFill>
+            <a:srgbClr val="EBEEFB"/>
+          </a:solidFill>
+          <a:ln/>
+        </p:spPr>
+      </p:sp>
+      <p:sp>
+        <p:nvSpPr>
+          <p:cNvPr id="7" name="Text 5"/>
+          <p:cNvSpPr/>
+          <p:nvPr/>
+        </p:nvSpPr>
+        <p:spPr>
+          <a:xfrm>
+            <a:off x="1051560" y="2112264"/>
+            <a:ext cx="640080" cy="457200"/>
+          </a:xfrm>
+          <a:prstGeom prst="rect">
+            <a:avLst/>
+          </a:prstGeom>
+          <a:noFill/>
+          <a:ln/>
+        </p:spPr>
+        <p:txBody>
+          <a:bodyPr wrap="square" lIns="0" tIns="0" rIns="0" bIns="0" rtlCol="0" anchor="t"/>
+          <a:lstStyle/>
+          <a:p>
+            <a:pPr algn="l" indent="0" marL="0">
+              <a:buNone/>
+            </a:pPr>
+            <a:r>
+              <a:rPr lang="en-US" sz="3000" b="1" dirty="0">
+                <a:solidFill>
+                  <a:srgbClr val="5A6CE6"/>
+                </a:solidFill>
+                <a:latin typeface="Calibri" pitchFamily="34" charset="0"/>
+                <a:ea typeface="Calibri" pitchFamily="34" charset="-122"/>
+                <a:cs typeface="Calibri" pitchFamily="34" charset="-120"/>
+              </a:rPr>
+              <a:t>1</a:t>
+            </a:r>
+            <a:endParaRPr lang="en-US" sz="3000" dirty="0"/>
+          </a:p>
+        </p:txBody>
+      </p:sp>
+      <p:sp>
+        <p:nvSpPr>
+          <p:cNvPr id="8" name="Text 6"/>
+          <p:cNvSpPr/>
+          <p:nvPr/>
+        </p:nvSpPr>
+        <p:spPr>
+          <a:xfrm>
+            <a:off x="1691640" y="2185416"/>
+            <a:ext cx="1554480" cy="274320"/>
+          </a:xfrm>
+          <a:prstGeom prst="rect">
+            <a:avLst/>
+          </a:prstGeom>
+          <a:noFill/>
+          <a:ln/>
+        </p:spPr>
+        <p:txBody>
+          <a:bodyPr wrap="square" lIns="0" tIns="0" rIns="0" bIns="0" rtlCol="0" anchor="t"/>
+          <a:lstStyle/>
+          <a:p>
+            <a:pPr algn="l" indent="0" marL="0">
+              <a:buNone/>
+            </a:pPr>
+            <a:r>
+              <a:rPr lang="en-US" sz="1300" b="1" dirty="0">
+                <a:solidFill>
+                  <a:srgbClr val="1B1B18"/>
+                </a:solidFill>
+                <a:latin typeface="Calibri" pitchFamily="34" charset="0"/>
+                <a:ea typeface="Calibri" pitchFamily="34" charset="-122"/>
+                <a:cs typeface="Calibri" pitchFamily="34" charset="-120"/>
+              </a:rPr>
+              <a:t>Signal quality</a:t>
+            </a:r>
             <a:endParaRPr lang="en-US" sz="1300" dirty="0"/>
           </a:p>
         </p:txBody>
       </p:sp>
       <p:sp>
         <p:nvSpPr>
-          <p:cNvPr id="6" name="Text 4"/>
-          <p:cNvSpPr/>
-          <p:nvPr/>
-        </p:nvSpPr>
-        <p:spPr>
-          <a:xfrm>
-            <a:off x="777240" y="2011680"/>
-            <a:ext cx="457200" cy="365760"/>
+          <p:cNvPr id="9" name="Text 7"/>
+          <p:cNvSpPr/>
+          <p:nvPr/>
+        </p:nvSpPr>
+        <p:spPr>
+          <a:xfrm>
+            <a:off x="1691640" y="2441448"/>
+            <a:ext cx="1828800" cy="219456"/>
           </a:xfrm>
           <a:prstGeom prst="rect">
             <a:avLst/>
@@ -5660,7 +6989,7 @@
               <a:buNone/>
             </a:pPr>
             <a:r>
-              <a:rPr lang="en-US" sz="2000" b="1" dirty="0">
+              <a:rPr lang="en-US" sz="900" b="1" i="1" dirty="0">
                 <a:solidFill>
                   <a:srgbClr val="5A6CE6"/>
                 </a:solidFill>
@@ -5668,61 +6997,22 @@
                 <a:ea typeface="Calibri" pitchFamily="34" charset="-122"/>
                 <a:cs typeface="Calibri" pitchFamily="34" charset="-120"/>
               </a:rPr>
-              <a:t>1</a:t>
-            </a:r>
-            <a:endParaRPr lang="en-US" sz="2000" dirty="0"/>
-          </a:p>
-        </p:txBody>
-      </p:sp>
-      <p:sp>
-        <p:nvSpPr>
-          <p:cNvPr id="7" name="Text 5"/>
-          <p:cNvSpPr/>
-          <p:nvPr/>
-        </p:nvSpPr>
-        <p:spPr>
-          <a:xfrm>
-            <a:off x="1234440" y="2103120"/>
-            <a:ext cx="3179978" cy="201168"/>
-          </a:xfrm>
-          <a:prstGeom prst="rect">
-            <a:avLst/>
-          </a:prstGeom>
-          <a:noFill/>
-          <a:ln/>
-        </p:spPr>
-        <p:txBody>
-          <a:bodyPr wrap="square" lIns="0" tIns="0" rIns="0" bIns="0" rtlCol="0" anchor="ctr"/>
-          <a:lstStyle/>
-          <a:p>
-            <a:pPr algn="l" indent="0" marL="0">
-              <a:buNone/>
-            </a:pPr>
-            <a:r>
-              <a:rPr lang="en-US" sz="950" b="1" spc="130" kern="0" dirty="0">
-                <a:solidFill>
-                  <a:srgbClr val="83837B"/>
-                </a:solidFill>
-                <a:latin typeface="Calibri" pitchFamily="34" charset="0"/>
-                <a:ea typeface="Calibri" pitchFamily="34" charset="-122"/>
-                <a:cs typeface="Calibri" pitchFamily="34" charset="-120"/>
-              </a:rPr>
-              <a:t>GATE · SIGNAL</a:t>
-            </a:r>
-            <a:endParaRPr lang="en-US" sz="950" dirty="0"/>
-          </a:p>
-        </p:txBody>
-      </p:sp>
-      <p:sp>
-        <p:nvSpPr>
-          <p:cNvPr id="8" name="Text 6"/>
-          <p:cNvSpPr/>
-          <p:nvPr/>
-        </p:nvSpPr>
-        <p:spPr>
-          <a:xfrm>
-            <a:off x="777240" y="2542032"/>
-            <a:ext cx="3179978" cy="731520"/>
+              <a:t>Gates the entire bet</a:t>
+            </a:r>
+            <a:endParaRPr lang="en-US" sz="900" dirty="0"/>
+          </a:p>
+        </p:txBody>
+      </p:sp>
+      <p:sp>
+        <p:nvSpPr>
+          <p:cNvPr id="10" name="Text 8"/>
+          <p:cNvSpPr/>
+          <p:nvPr/>
+        </p:nvSpPr>
+        <p:spPr>
+          <a:xfrm>
+            <a:off x="3383280" y="2093976"/>
+            <a:ext cx="2926080" cy="640080"/>
           </a:xfrm>
           <a:prstGeom prst="rect">
             <a:avLst/>
@@ -5741,7 +7031,7 @@
               <a:buNone/>
             </a:pPr>
             <a:r>
-              <a:rPr lang="en-US" sz="1350" b="1" dirty="0">
+              <a:rPr lang="en-US" sz="1250" b="1" dirty="0">
                 <a:solidFill>
                   <a:srgbClr val="1B1B18"/>
                 </a:solidFill>
@@ -5749,22 +7039,22 @@
                 <a:ea typeface="Calibri" pitchFamily="34" charset="-122"/>
                 <a:cs typeface="Calibri" pitchFamily="34" charset="-120"/>
               </a:rPr>
-              <a:t>Can Teton identify meaningful decline weeks before a crisis?</a:t>
-            </a:r>
-            <a:endParaRPr lang="en-US" sz="1350" dirty="0"/>
-          </a:p>
-        </p:txBody>
-      </p:sp>
-      <p:sp>
-        <p:nvSpPr>
-          <p:cNvPr id="9" name="Text 7"/>
-          <p:cNvSpPr/>
-          <p:nvPr/>
-        </p:nvSpPr>
-        <p:spPr>
-          <a:xfrm>
-            <a:off x="777240" y="3364992"/>
-            <a:ext cx="3179978" cy="201168"/>
+              <a:t>Can Teton identify meaningful decline weeks before crisis?</a:t>
+            </a:r>
+            <a:endParaRPr lang="en-US" sz="1250" dirty="0"/>
+          </a:p>
+        </p:txBody>
+      </p:sp>
+      <p:sp>
+        <p:nvSpPr>
+          <p:cNvPr id="11" name="Text 9"/>
+          <p:cNvSpPr/>
+          <p:nvPr/>
+        </p:nvSpPr>
+        <p:spPr>
+          <a:xfrm>
+            <a:off x="6446520" y="2112264"/>
+            <a:ext cx="2377440" cy="201168"/>
           </a:xfrm>
           <a:prstGeom prst="rect">
             <a:avLst/>
@@ -5780,7 +7070,7 @@
               <a:buNone/>
             </a:pPr>
             <a:r>
-              <a:rPr lang="en-US" sz="850" b="1" spc="130" kern="0" dirty="0">
+              <a:rPr lang="en-US" sz="850" b="1" spc="40" kern="0" dirty="0">
                 <a:solidFill>
                   <a:srgbClr val="83837B"/>
                 </a:solidFill>
@@ -5788,7 +7078,7 @@
                 <a:ea typeface="Calibri" pitchFamily="34" charset="-122"/>
                 <a:cs typeface="Calibri" pitchFamily="34" charset="-120"/>
               </a:rPr>
-              <a:t>TEST</a:t>
+              <a:t>Test</a:t>
             </a:r>
             <a:endParaRPr lang="en-US" sz="850" dirty="0"/>
           </a:p>
@@ -5796,14 +7086,14 @@
       </p:sp>
       <p:sp>
         <p:nvSpPr>
-          <p:cNvPr id="10" name="Text 8"/>
-          <p:cNvSpPr/>
-          <p:nvPr/>
-        </p:nvSpPr>
-        <p:spPr>
-          <a:xfrm>
-            <a:off x="777240" y="3566160"/>
-            <a:ext cx="3179978" cy="914400"/>
+          <p:cNvPr id="12" name="Text 10"/>
+          <p:cNvSpPr/>
+          <p:nvPr/>
+        </p:nvSpPr>
+        <p:spPr>
+          <a:xfrm>
+            <a:off x="6446520" y="2295144"/>
+            <a:ext cx="2331720" cy="1005840"/>
           </a:xfrm>
           <a:prstGeom prst="rect">
             <a:avLst/>
@@ -5817,12 +7107,12 @@
           <a:p>
             <a:pPr algn="l" indent="0" marL="0">
               <a:lnSpc>
-                <a:spcPct val="110000"/>
+                <a:spcPct val="108000"/>
               </a:lnSpc>
               <a:buNone/>
             </a:pPr>
             <a:r>
-              <a:rPr lang="en-US" sz="1100" dirty="0">
+              <a:rPr lang="en-US" sz="950" dirty="0">
                 <a:solidFill>
                   <a:srgbClr val="83837B"/>
                 </a:solidFill>
@@ -5832,20 +7122,20 @@
               </a:rPr>
               <a:t>Retrospective review of care-level changes, falls, hospitalizations, and change-of-condition events across two to three buildings.</a:t>
             </a:r>
-            <a:endParaRPr lang="en-US" sz="1100" dirty="0"/>
-          </a:p>
-        </p:txBody>
-      </p:sp>
-      <p:sp>
-        <p:nvSpPr>
-          <p:cNvPr id="11" name="Text 9"/>
-          <p:cNvSpPr/>
-          <p:nvPr/>
-        </p:nvSpPr>
-        <p:spPr>
-          <a:xfrm>
-            <a:off x="777240" y="4498848"/>
-            <a:ext cx="3179978" cy="201168"/>
+            <a:endParaRPr lang="en-US" sz="950" dirty="0"/>
+          </a:p>
+        </p:txBody>
+      </p:sp>
+      <p:sp>
+        <p:nvSpPr>
+          <p:cNvPr id="13" name="Text 11"/>
+          <p:cNvSpPr/>
+          <p:nvPr/>
+        </p:nvSpPr>
+        <p:spPr>
+          <a:xfrm>
+            <a:off x="9098280" y="2112264"/>
+            <a:ext cx="2316175" cy="201168"/>
           </a:xfrm>
           <a:prstGeom prst="rect">
             <a:avLst/>
@@ -5861,7 +7151,7 @@
               <a:buNone/>
             </a:pPr>
             <a:r>
-              <a:rPr lang="en-US" sz="850" b="1" spc="130" kern="0" dirty="0">
+              <a:rPr lang="en-US" sz="850" b="1" spc="40" kern="0" dirty="0">
                 <a:solidFill>
                   <a:srgbClr val="5A6CE6"/>
                 </a:solidFill>
@@ -5869,7 +7159,7 @@
                 <a:ea typeface="Calibri" pitchFamily="34" charset="-122"/>
                 <a:cs typeface="Calibri" pitchFamily="34" charset="-120"/>
               </a:rPr>
-              <a:t>PROCEED IF</a:t>
+              <a:t>Proceed if</a:t>
             </a:r>
             <a:endParaRPr lang="en-US" sz="850" dirty="0"/>
           </a:p>
@@ -5877,14 +7167,14 @@
       </p:sp>
       <p:sp>
         <p:nvSpPr>
-          <p:cNvPr id="12" name="Text 10"/>
-          <p:cNvSpPr/>
-          <p:nvPr/>
-        </p:nvSpPr>
-        <p:spPr>
-          <a:xfrm>
-            <a:off x="777240" y="4700016"/>
-            <a:ext cx="3179978" cy="731520"/>
+          <p:cNvPr id="14" name="Text 12"/>
+          <p:cNvSpPr/>
+          <p:nvPr/>
+        </p:nvSpPr>
+        <p:spPr>
+          <a:xfrm>
+            <a:off x="9098280" y="2295144"/>
+            <a:ext cx="2041855" cy="1005840"/>
           </a:xfrm>
           <a:prstGeom prst="rect">
             <a:avLst/>
@@ -5898,12 +7188,12 @@
           <a:p>
             <a:pPr algn="l" indent="0" marL="0">
               <a:lnSpc>
-                <a:spcPct val="110000"/>
+                <a:spcPct val="108000"/>
               </a:lnSpc>
               <a:buNone/>
             </a:pPr>
             <a:r>
-              <a:rPr lang="en-US" sz="1100" dirty="0">
+              <a:rPr lang="en-US" sz="950" dirty="0">
                 <a:solidFill>
                   <a:srgbClr val="1B1B18"/>
                 </a:solidFill>
@@ -5913,20 +7203,20 @@
               </a:rPr>
               <a:t>Clinical reviewers agree the signal would have warranted earlier review.</a:t>
             </a:r>
-            <a:endParaRPr lang="en-US" sz="1100" dirty="0"/>
-          </a:p>
-        </p:txBody>
-      </p:sp>
-      <p:sp>
-        <p:nvSpPr>
-          <p:cNvPr id="13" name="Shape 11"/>
-          <p:cNvSpPr/>
-          <p:nvPr/>
-        </p:nvSpPr>
-        <p:spPr>
-          <a:xfrm>
-            <a:off x="4231538" y="2011680"/>
-            <a:ext cx="0" cy="2926080"/>
+            <a:endParaRPr lang="en-US" sz="950" dirty="0"/>
+          </a:p>
+        </p:txBody>
+      </p:sp>
+      <p:sp>
+        <p:nvSpPr>
+          <p:cNvPr id="15" name="Shape 13"/>
+          <p:cNvSpPr/>
+          <p:nvPr/>
+        </p:nvSpPr>
+        <p:spPr>
+          <a:xfrm>
+            <a:off x="777240" y="3401568"/>
+            <a:ext cx="10637215" cy="0"/>
           </a:xfrm>
           <a:prstGeom prst="line">
             <a:avLst/>
@@ -5942,14 +7232,14 @@
       </p:sp>
       <p:sp>
         <p:nvSpPr>
-          <p:cNvPr id="14" name="Text 12"/>
-          <p:cNvSpPr/>
-          <p:nvPr/>
-        </p:nvSpPr>
-        <p:spPr>
-          <a:xfrm>
-            <a:off x="4505858" y="2011680"/>
-            <a:ext cx="457200" cy="365760"/>
+          <p:cNvPr id="16" name="Text 14"/>
+          <p:cNvSpPr/>
+          <p:nvPr/>
+        </p:nvSpPr>
+        <p:spPr>
+          <a:xfrm>
+            <a:off x="777240" y="3566160"/>
+            <a:ext cx="640080" cy="457200"/>
           </a:xfrm>
           <a:prstGeom prst="rect">
             <a:avLst/>
@@ -5965,7 +7255,7 @@
               <a:buNone/>
             </a:pPr>
             <a:r>
-              <a:rPr lang="en-US" sz="2000" b="1" dirty="0">
+              <a:rPr lang="en-US" sz="2200" b="1" dirty="0">
                 <a:solidFill>
                   <a:srgbClr val="5A6CE6"/>
                 </a:solidFill>
@@ -5975,59 +7265,59 @@
               </a:rPr>
               <a:t>2</a:t>
             </a:r>
-            <a:endParaRPr lang="en-US" sz="2000" dirty="0"/>
-          </a:p>
-        </p:txBody>
-      </p:sp>
-      <p:sp>
-        <p:nvSpPr>
-          <p:cNvPr id="15" name="Text 13"/>
-          <p:cNvSpPr/>
-          <p:nvPr/>
-        </p:nvSpPr>
-        <p:spPr>
-          <a:xfrm>
-            <a:off x="4963058" y="2103120"/>
-            <a:ext cx="3179978" cy="201168"/>
-          </a:xfrm>
-          <a:prstGeom prst="rect">
-            <a:avLst/>
-          </a:prstGeom>
-          <a:noFill/>
-          <a:ln/>
-        </p:spPr>
-        <p:txBody>
-          <a:bodyPr wrap="square" lIns="0" tIns="0" rIns="0" bIns="0" rtlCol="0" anchor="ctr"/>
-          <a:lstStyle/>
-          <a:p>
-            <a:pPr algn="l" indent="0" marL="0">
-              <a:buNone/>
-            </a:pPr>
-            <a:r>
-              <a:rPr lang="en-US" sz="950" b="1" spc="130" kern="0" dirty="0">
-                <a:solidFill>
-                  <a:srgbClr val="83837B"/>
-                </a:solidFill>
-                <a:latin typeface="Calibri" pitchFamily="34" charset="0"/>
-                <a:ea typeface="Calibri" pitchFamily="34" charset="-122"/>
-                <a:cs typeface="Calibri" pitchFamily="34" charset="-120"/>
-              </a:rPr>
-              <a:t>GATE · WORKFLOW</a:t>
-            </a:r>
-            <a:endParaRPr lang="en-US" sz="950" dirty="0"/>
-          </a:p>
-        </p:txBody>
-      </p:sp>
-      <p:sp>
-        <p:nvSpPr>
-          <p:cNvPr id="16" name="Text 14"/>
-          <p:cNvSpPr/>
-          <p:nvPr/>
-        </p:nvSpPr>
-        <p:spPr>
-          <a:xfrm>
-            <a:off x="4505858" y="2542032"/>
-            <a:ext cx="3179978" cy="731520"/>
+            <a:endParaRPr lang="en-US" sz="2200" dirty="0"/>
+          </a:p>
+        </p:txBody>
+      </p:sp>
+      <p:sp>
+        <p:nvSpPr>
+          <p:cNvPr id="17" name="Text 15"/>
+          <p:cNvSpPr/>
+          <p:nvPr/>
+        </p:nvSpPr>
+        <p:spPr>
+          <a:xfrm>
+            <a:off x="1417320" y="3593592"/>
+            <a:ext cx="1554480" cy="274320"/>
+          </a:xfrm>
+          <a:prstGeom prst="rect">
+            <a:avLst/>
+          </a:prstGeom>
+          <a:noFill/>
+          <a:ln/>
+        </p:spPr>
+        <p:txBody>
+          <a:bodyPr wrap="square" lIns="0" tIns="0" rIns="0" bIns="0" rtlCol="0" anchor="t"/>
+          <a:lstStyle/>
+          <a:p>
+            <a:pPr algn="l" indent="0" marL="0">
+              <a:buNone/>
+            </a:pPr>
+            <a:r>
+              <a:rPr lang="en-US" sz="1300" b="1" dirty="0">
+                <a:solidFill>
+                  <a:srgbClr val="1B1B18"/>
+                </a:solidFill>
+                <a:latin typeface="Calibri" pitchFamily="34" charset="0"/>
+                <a:ea typeface="Calibri" pitchFamily="34" charset="-122"/>
+                <a:cs typeface="Calibri" pitchFamily="34" charset="-120"/>
+              </a:rPr>
+              <a:t>Workflow fit</a:t>
+            </a:r>
+            <a:endParaRPr lang="en-US" sz="1300" dirty="0"/>
+          </a:p>
+        </p:txBody>
+      </p:sp>
+      <p:sp>
+        <p:nvSpPr>
+          <p:cNvPr id="18" name="Text 16"/>
+          <p:cNvSpPr/>
+          <p:nvPr/>
+        </p:nvSpPr>
+        <p:spPr>
+          <a:xfrm>
+            <a:off x="3108960" y="3547872"/>
+            <a:ext cx="2926080" cy="640080"/>
           </a:xfrm>
           <a:prstGeom prst="rect">
             <a:avLst/>
@@ -6046,7 +7336,7 @@
               <a:buNone/>
             </a:pPr>
             <a:r>
-              <a:rPr lang="en-US" sz="1350" b="1" dirty="0">
+              <a:rPr lang="en-US" sz="1250" b="1" dirty="0">
                 <a:solidFill>
                   <a:srgbClr val="1B1B18"/>
                 </a:solidFill>
@@ -6054,22 +7344,22 @@
                 <a:ea typeface="Calibri" pitchFamily="34" charset="-122"/>
                 <a:cs typeface="Calibri" pitchFamily="34" charset="-120"/>
               </a:rPr>
-              <a:t>Can one named role review candidates inside an existing cadence?</a:t>
-            </a:r>
-            <a:endParaRPr lang="en-US" sz="1350" dirty="0"/>
-          </a:p>
-        </p:txBody>
-      </p:sp>
-      <p:sp>
-        <p:nvSpPr>
-          <p:cNvPr id="17" name="Text 15"/>
-          <p:cNvSpPr/>
-          <p:nvPr/>
-        </p:nvSpPr>
-        <p:spPr>
-          <a:xfrm>
-            <a:off x="4505858" y="3364992"/>
-            <a:ext cx="3179978" cy="201168"/>
+              <a:t>Can one role own the review inside an existing cadence?</a:t>
+            </a:r>
+            <a:endParaRPr lang="en-US" sz="1250" dirty="0"/>
+          </a:p>
+        </p:txBody>
+      </p:sp>
+      <p:sp>
+        <p:nvSpPr>
+          <p:cNvPr id="19" name="Text 17"/>
+          <p:cNvSpPr/>
+          <p:nvPr/>
+        </p:nvSpPr>
+        <p:spPr>
+          <a:xfrm>
+            <a:off x="6172200" y="3566160"/>
+            <a:ext cx="2377440" cy="201168"/>
           </a:xfrm>
           <a:prstGeom prst="rect">
             <a:avLst/>
@@ -6085,7 +7375,7 @@
               <a:buNone/>
             </a:pPr>
             <a:r>
-              <a:rPr lang="en-US" sz="850" b="1" spc="130" kern="0" dirty="0">
+              <a:rPr lang="en-US" sz="850" b="1" spc="40" kern="0" dirty="0">
                 <a:solidFill>
                   <a:srgbClr val="83837B"/>
                 </a:solidFill>
@@ -6093,7 +7383,7 @@
                 <a:ea typeface="Calibri" pitchFamily="34" charset="-122"/>
                 <a:cs typeface="Calibri" pitchFamily="34" charset="-120"/>
               </a:rPr>
-              <a:t>TEST</a:t>
+              <a:t>Test</a:t>
             </a:r>
             <a:endParaRPr lang="en-US" sz="850" dirty="0"/>
           </a:p>
@@ -6101,14 +7391,14 @@
       </p:sp>
       <p:sp>
         <p:nvSpPr>
-          <p:cNvPr id="18" name="Text 16"/>
-          <p:cNvSpPr/>
-          <p:nvPr/>
-        </p:nvSpPr>
-        <p:spPr>
-          <a:xfrm>
-            <a:off x="4505858" y="3566160"/>
-            <a:ext cx="3179978" cy="914400"/>
+          <p:cNvPr id="20" name="Text 18"/>
+          <p:cNvSpPr/>
+          <p:nvPr/>
+        </p:nvSpPr>
+        <p:spPr>
+          <a:xfrm>
+            <a:off x="6172200" y="3749040"/>
+            <a:ext cx="2331720" cy="548640"/>
           </a:xfrm>
           <a:prstGeom prst="rect">
             <a:avLst/>
@@ -6122,12 +7412,12 @@
           <a:p>
             <a:pPr algn="l" indent="0" marL="0">
               <a:lnSpc>
-                <a:spcPct val="110000"/>
+                <a:spcPct val="108000"/>
               </a:lnSpc>
               <a:buNone/>
             </a:pPr>
             <a:r>
-              <a:rPr lang="en-US" sz="1100" dirty="0">
+              <a:rPr lang="en-US" sz="950" dirty="0">
                 <a:solidFill>
                   <a:srgbClr val="83837B"/>
                 </a:solidFill>
@@ -6135,22 +7425,22 @@
                 <a:ea typeface="Calibri" pitchFamily="34" charset="-122"/>
                 <a:cs typeface="Calibri" pitchFamily="34" charset="-120"/>
               </a:rPr>
-              <a:t>Shadow huddles, reassessments, and family-conference prep to see where review would fit.</a:t>
-            </a:r>
-            <a:endParaRPr lang="en-US" sz="1100" dirty="0"/>
-          </a:p>
-        </p:txBody>
-      </p:sp>
-      <p:sp>
-        <p:nvSpPr>
-          <p:cNvPr id="19" name="Text 17"/>
-          <p:cNvSpPr/>
-          <p:nvPr/>
-        </p:nvSpPr>
-        <p:spPr>
-          <a:xfrm>
-            <a:off x="4505858" y="4498848"/>
-            <a:ext cx="3179978" cy="201168"/>
+              <a:t>Shadow huddles, reassessments, and family-conference prep to see where review fits.</a:t>
+            </a:r>
+            <a:endParaRPr lang="en-US" sz="950" dirty="0"/>
+          </a:p>
+        </p:txBody>
+      </p:sp>
+      <p:sp>
+        <p:nvSpPr>
+          <p:cNvPr id="21" name="Text 19"/>
+          <p:cNvSpPr/>
+          <p:nvPr/>
+        </p:nvSpPr>
+        <p:spPr>
+          <a:xfrm>
+            <a:off x="8686800" y="3566160"/>
+            <a:ext cx="2727655" cy="201168"/>
           </a:xfrm>
           <a:prstGeom prst="rect">
             <a:avLst/>
@@ -6166,7 +7456,7 @@
               <a:buNone/>
             </a:pPr>
             <a:r>
-              <a:rPr lang="en-US" sz="850" b="1" spc="130" kern="0" dirty="0">
+              <a:rPr lang="en-US" sz="850" b="1" spc="40" kern="0" dirty="0">
                 <a:solidFill>
                   <a:srgbClr val="5A6CE6"/>
                 </a:solidFill>
@@ -6174,7 +7464,7 @@
                 <a:ea typeface="Calibri" pitchFamily="34" charset="-122"/>
                 <a:cs typeface="Calibri" pitchFamily="34" charset="-120"/>
               </a:rPr>
-              <a:t>PROCEED IF</a:t>
+              <a:t>Proceed if</a:t>
             </a:r>
             <a:endParaRPr lang="en-US" sz="850" dirty="0"/>
           </a:p>
@@ -6182,14 +7472,14 @@
       </p:sp>
       <p:sp>
         <p:nvSpPr>
-          <p:cNvPr id="20" name="Text 18"/>
-          <p:cNvSpPr/>
-          <p:nvPr/>
-        </p:nvSpPr>
-        <p:spPr>
-          <a:xfrm>
-            <a:off x="4505858" y="4700016"/>
-            <a:ext cx="3179978" cy="731520"/>
+          <p:cNvPr id="22" name="Text 20"/>
+          <p:cNvSpPr/>
+          <p:nvPr/>
+        </p:nvSpPr>
+        <p:spPr>
+          <a:xfrm>
+            <a:off x="8686800" y="3749040"/>
+            <a:ext cx="2727655" cy="548640"/>
           </a:xfrm>
           <a:prstGeom prst="rect">
             <a:avLst/>
@@ -6203,12 +7493,12 @@
           <a:p>
             <a:pPr algn="l" indent="0" marL="0">
               <a:lnSpc>
-                <a:spcPct val="110000"/>
+                <a:spcPct val="108000"/>
               </a:lnSpc>
               <a:buNone/>
             </a:pPr>
             <a:r>
-              <a:rPr lang="en-US" sz="1100" dirty="0">
+              <a:rPr lang="en-US" sz="950" dirty="0">
                 <a:solidFill>
                   <a:srgbClr val="1B1B18"/>
                 </a:solidFill>
@@ -6218,20 +7508,20 @@
               </a:rPr>
               <a:t>A clinical owner reviews a small shortlist without creating another inbox.</a:t>
             </a:r>
-            <a:endParaRPr lang="en-US" sz="1100" dirty="0"/>
-          </a:p>
-        </p:txBody>
-      </p:sp>
-      <p:sp>
-        <p:nvSpPr>
-          <p:cNvPr id="21" name="Shape 19"/>
-          <p:cNvSpPr/>
-          <p:nvPr/>
-        </p:nvSpPr>
-        <p:spPr>
-          <a:xfrm>
-            <a:off x="7960157" y="2011680"/>
-            <a:ext cx="0" cy="2926080"/>
+            <a:endParaRPr lang="en-US" sz="950" dirty="0"/>
+          </a:p>
+        </p:txBody>
+      </p:sp>
+      <p:sp>
+        <p:nvSpPr>
+          <p:cNvPr id="23" name="Shape 21"/>
+          <p:cNvSpPr/>
+          <p:nvPr/>
+        </p:nvSpPr>
+        <p:spPr>
+          <a:xfrm>
+            <a:off x="777240" y="4407408"/>
+            <a:ext cx="10637215" cy="0"/>
           </a:xfrm>
           <a:prstGeom prst="line">
             <a:avLst/>
@@ -6247,14 +7537,14 @@
       </p:sp>
       <p:sp>
         <p:nvSpPr>
-          <p:cNvPr id="22" name="Text 20"/>
-          <p:cNvSpPr/>
-          <p:nvPr/>
-        </p:nvSpPr>
-        <p:spPr>
-          <a:xfrm>
-            <a:off x="8234477" y="2011680"/>
-            <a:ext cx="457200" cy="365760"/>
+          <p:cNvPr id="24" name="Text 22"/>
+          <p:cNvSpPr/>
+          <p:nvPr/>
+        </p:nvSpPr>
+        <p:spPr>
+          <a:xfrm>
+            <a:off x="777240" y="4572000"/>
+            <a:ext cx="640080" cy="457200"/>
           </a:xfrm>
           <a:prstGeom prst="rect">
             <a:avLst/>
@@ -6270,7 +7560,7 @@
               <a:buNone/>
             </a:pPr>
             <a:r>
-              <a:rPr lang="en-US" sz="2000" b="1" dirty="0">
+              <a:rPr lang="en-US" sz="2200" b="1" dirty="0">
                 <a:solidFill>
                   <a:srgbClr val="5A6CE6"/>
                 </a:solidFill>
@@ -6280,59 +7570,59 @@
               </a:rPr>
               <a:t>3</a:t>
             </a:r>
-            <a:endParaRPr lang="en-US" sz="2000" dirty="0"/>
-          </a:p>
-        </p:txBody>
-      </p:sp>
-      <p:sp>
-        <p:nvSpPr>
-          <p:cNvPr id="23" name="Text 21"/>
-          <p:cNvSpPr/>
-          <p:nvPr/>
-        </p:nvSpPr>
-        <p:spPr>
-          <a:xfrm>
-            <a:off x="8691677" y="2103120"/>
-            <a:ext cx="3179978" cy="201168"/>
-          </a:xfrm>
-          <a:prstGeom prst="rect">
-            <a:avLst/>
-          </a:prstGeom>
-          <a:noFill/>
-          <a:ln/>
-        </p:spPr>
-        <p:txBody>
-          <a:bodyPr wrap="square" lIns="0" tIns="0" rIns="0" bIns="0" rtlCol="0" anchor="ctr"/>
-          <a:lstStyle/>
-          <a:p>
-            <a:pPr algn="l" indent="0" marL="0">
-              <a:buNone/>
-            </a:pPr>
-            <a:r>
-              <a:rPr lang="en-US" sz="950" b="1" spc="130" kern="0" dirty="0">
-                <a:solidFill>
-                  <a:srgbClr val="83837B"/>
-                </a:solidFill>
-                <a:latin typeface="Calibri" pitchFamily="34" charset="0"/>
-                <a:ea typeface="Calibri" pitchFamily="34" charset="-122"/>
-                <a:cs typeface="Calibri" pitchFamily="34" charset="-120"/>
-              </a:rPr>
-              <a:t>GATE · ACTION</a:t>
-            </a:r>
-            <a:endParaRPr lang="en-US" sz="950" dirty="0"/>
-          </a:p>
-        </p:txBody>
-      </p:sp>
-      <p:sp>
-        <p:nvSpPr>
-          <p:cNvPr id="24" name="Text 22"/>
-          <p:cNvSpPr/>
-          <p:nvPr/>
-        </p:nvSpPr>
-        <p:spPr>
-          <a:xfrm>
-            <a:off x="8234477" y="2542032"/>
-            <a:ext cx="3179978" cy="731520"/>
+            <a:endParaRPr lang="en-US" sz="2200" dirty="0"/>
+          </a:p>
+        </p:txBody>
+      </p:sp>
+      <p:sp>
+        <p:nvSpPr>
+          <p:cNvPr id="25" name="Text 23"/>
+          <p:cNvSpPr/>
+          <p:nvPr/>
+        </p:nvSpPr>
+        <p:spPr>
+          <a:xfrm>
+            <a:off x="1417320" y="4599432"/>
+            <a:ext cx="1554480" cy="274320"/>
+          </a:xfrm>
+          <a:prstGeom prst="rect">
+            <a:avLst/>
+          </a:prstGeom>
+          <a:noFill/>
+          <a:ln/>
+        </p:spPr>
+        <p:txBody>
+          <a:bodyPr wrap="square" lIns="0" tIns="0" rIns="0" bIns="0" rtlCol="0" anchor="t"/>
+          <a:lstStyle/>
+          <a:p>
+            <a:pPr algn="l" indent="0" marL="0">
+              <a:buNone/>
+            </a:pPr>
+            <a:r>
+              <a:rPr lang="en-US" sz="1300" b="1" dirty="0">
+                <a:solidFill>
+                  <a:srgbClr val="1B1B18"/>
+                </a:solidFill>
+                <a:latin typeface="Calibri" pitchFamily="34" charset="0"/>
+                <a:ea typeface="Calibri" pitchFamily="34" charset="-122"/>
+                <a:cs typeface="Calibri" pitchFamily="34" charset="-120"/>
+              </a:rPr>
+              <a:t>Behavior change</a:t>
+            </a:r>
+            <a:endParaRPr lang="en-US" sz="1300" dirty="0"/>
+          </a:p>
+        </p:txBody>
+      </p:sp>
+      <p:sp>
+        <p:nvSpPr>
+          <p:cNvPr id="26" name="Text 24"/>
+          <p:cNvSpPr/>
+          <p:nvPr/>
+        </p:nvSpPr>
+        <p:spPr>
+          <a:xfrm>
+            <a:off x="3108960" y="4553712"/>
+            <a:ext cx="2926080" cy="640080"/>
           </a:xfrm>
           <a:prstGeom prst="rect">
             <a:avLst/>
@@ -6351,7 +7641,7 @@
               <a:buNone/>
             </a:pPr>
             <a:r>
-              <a:rPr lang="en-US" sz="1350" b="1" dirty="0">
+              <a:rPr lang="en-US" sz="1250" b="1" dirty="0">
                 <a:solidFill>
                   <a:srgbClr val="1B1B18"/>
                 </a:solidFill>
@@ -6359,22 +7649,22 @@
                 <a:ea typeface="Calibri" pitchFamily="34" charset="-122"/>
                 <a:cs typeface="Calibri" pitchFamily="34" charset="-120"/>
               </a:rPr>
-              <a:t>Does reviewed evidence change what staff do?</a:t>
-            </a:r>
-            <a:endParaRPr lang="en-US" sz="1350" dirty="0"/>
-          </a:p>
-        </p:txBody>
-      </p:sp>
-      <p:sp>
-        <p:nvSpPr>
-          <p:cNvPr id="25" name="Text 23"/>
-          <p:cNvSpPr/>
-          <p:nvPr/>
-        </p:nvSpPr>
-        <p:spPr>
-          <a:xfrm>
-            <a:off x="8234477" y="3364992"/>
-            <a:ext cx="3179978" cy="201168"/>
+              <a:t>Does reviewed evidence change staff action?</a:t>
+            </a:r>
+            <a:endParaRPr lang="en-US" sz="1250" dirty="0"/>
+          </a:p>
+        </p:txBody>
+      </p:sp>
+      <p:sp>
+        <p:nvSpPr>
+          <p:cNvPr id="27" name="Text 25"/>
+          <p:cNvSpPr/>
+          <p:nvPr/>
+        </p:nvSpPr>
+        <p:spPr>
+          <a:xfrm>
+            <a:off x="6172200" y="4572000"/>
+            <a:ext cx="2377440" cy="201168"/>
           </a:xfrm>
           <a:prstGeom prst="rect">
             <a:avLst/>
@@ -6390,7 +7680,7 @@
               <a:buNone/>
             </a:pPr>
             <a:r>
-              <a:rPr lang="en-US" sz="850" b="1" spc="130" kern="0" dirty="0">
+              <a:rPr lang="en-US" sz="850" b="1" spc="40" kern="0" dirty="0">
                 <a:solidFill>
                   <a:srgbClr val="83837B"/>
                 </a:solidFill>
@@ -6398,7 +7688,7 @@
                 <a:ea typeface="Calibri" pitchFamily="34" charset="-122"/>
                 <a:cs typeface="Calibri" pitchFamily="34" charset="-120"/>
               </a:rPr>
-              <a:t>TEST</a:t>
+              <a:t>Test</a:t>
             </a:r>
             <a:endParaRPr lang="en-US" sz="850" dirty="0"/>
           </a:p>
@@ -6406,14 +7696,14 @@
       </p:sp>
       <p:sp>
         <p:nvSpPr>
-          <p:cNvPr id="26" name="Text 24"/>
-          <p:cNvSpPr/>
-          <p:nvPr/>
-        </p:nvSpPr>
-        <p:spPr>
-          <a:xfrm>
-            <a:off x="8234477" y="3566160"/>
-            <a:ext cx="3179978" cy="914400"/>
+          <p:cNvPr id="28" name="Text 26"/>
+          <p:cNvSpPr/>
+          <p:nvPr/>
+        </p:nvSpPr>
+        <p:spPr>
+          <a:xfrm>
+            <a:off x="6172200" y="4754880"/>
+            <a:ext cx="2331720" cy="548640"/>
           </a:xfrm>
           <a:prstGeom prst="rect">
             <a:avLst/>
@@ -6427,12 +7717,12 @@
           <a:p>
             <a:pPr algn="l" indent="0" marL="0">
               <a:lnSpc>
-                <a:spcPct val="110000"/>
+                <a:spcPct val="108000"/>
               </a:lnSpc>
               <a:buNone/>
             </a:pPr>
             <a:r>
-              <a:rPr lang="en-US" sz="1100" dirty="0">
+              <a:rPr lang="en-US" sz="950" dirty="0">
                 <a:solidFill>
                   <a:srgbClr val="83837B"/>
                 </a:solidFill>
@@ -6442,20 +7732,20 @@
               </a:rPr>
               <a:t>Concierge pilot with hand-built weekly candidates in one to two communities.</a:t>
             </a:r>
-            <a:endParaRPr lang="en-US" sz="1100" dirty="0"/>
-          </a:p>
-        </p:txBody>
-      </p:sp>
-      <p:sp>
-        <p:nvSpPr>
-          <p:cNvPr id="27" name="Text 25"/>
-          <p:cNvSpPr/>
-          <p:nvPr/>
-        </p:nvSpPr>
-        <p:spPr>
-          <a:xfrm>
-            <a:off x="8234477" y="4498848"/>
-            <a:ext cx="3179978" cy="201168"/>
+            <a:endParaRPr lang="en-US" sz="950" dirty="0"/>
+          </a:p>
+        </p:txBody>
+      </p:sp>
+      <p:sp>
+        <p:nvSpPr>
+          <p:cNvPr id="29" name="Text 27"/>
+          <p:cNvSpPr/>
+          <p:nvPr/>
+        </p:nvSpPr>
+        <p:spPr>
+          <a:xfrm>
+            <a:off x="8686800" y="4572000"/>
+            <a:ext cx="2727655" cy="201168"/>
           </a:xfrm>
           <a:prstGeom prst="rect">
             <a:avLst/>
@@ -6471,7 +7761,7 @@
               <a:buNone/>
             </a:pPr>
             <a:r>
-              <a:rPr lang="en-US" sz="850" b="1" spc="130" kern="0" dirty="0">
+              <a:rPr lang="en-US" sz="850" b="1" spc="40" kern="0" dirty="0">
                 <a:solidFill>
                   <a:srgbClr val="5A6CE6"/>
                 </a:solidFill>
@@ -6479,7 +7769,7 @@
                 <a:ea typeface="Calibri" pitchFamily="34" charset="-122"/>
                 <a:cs typeface="Calibri" pitchFamily="34" charset="-120"/>
               </a:rPr>
-              <a:t>PROCEED IF</a:t>
+              <a:t>Proceed if</a:t>
             </a:r>
             <a:endParaRPr lang="en-US" sz="850" dirty="0"/>
           </a:p>
@@ -6487,14 +7777,14 @@
       </p:sp>
       <p:sp>
         <p:nvSpPr>
-          <p:cNvPr id="28" name="Text 26"/>
-          <p:cNvSpPr/>
-          <p:nvPr/>
-        </p:nvSpPr>
-        <p:spPr>
-          <a:xfrm>
-            <a:off x="8234477" y="4700016"/>
-            <a:ext cx="3179978" cy="731520"/>
+          <p:cNvPr id="30" name="Text 28"/>
+          <p:cNvSpPr/>
+          <p:nvPr/>
+        </p:nvSpPr>
+        <p:spPr>
+          <a:xfrm>
+            <a:off x="8686800" y="4754880"/>
+            <a:ext cx="2727655" cy="548640"/>
           </a:xfrm>
           <a:prstGeom prst="rect">
             <a:avLst/>
@@ -6508,12 +7798,12 @@
           <a:p>
             <a:pPr algn="l" indent="0" marL="0">
               <a:lnSpc>
-                <a:spcPct val="110000"/>
+                <a:spcPct val="108000"/>
               </a:lnSpc>
               <a:buNone/>
             </a:pPr>
             <a:r>
-              <a:rPr lang="en-US" sz="1100" dirty="0">
+              <a:rPr lang="en-US" sz="950" dirty="0">
                 <a:solidFill>
                   <a:srgbClr val="1B1B18"/>
                 </a:solidFill>
@@ -6521,45 +7811,44 @@
                 <a:ea typeface="Calibri" pitchFamily="34" charset="-122"/>
                 <a:cs typeface="Calibri" pitchFamily="34" charset="-120"/>
               </a:rPr>
-              <a:t>Candidates are resolved, and a meaningful share leads to monitoring, intervention, reassessment, or documentation.</a:t>
-            </a:r>
-            <a:endParaRPr lang="en-US" sz="1100" dirty="0"/>
-          </a:p>
-        </p:txBody>
-      </p:sp>
-      <p:sp>
-        <p:nvSpPr>
-          <p:cNvPr id="29" name="Shape 27"/>
-          <p:cNvSpPr/>
-          <p:nvPr/>
-        </p:nvSpPr>
-        <p:spPr>
-          <a:xfrm>
-            <a:off x="777240" y="5669280"/>
-            <a:ext cx="10637215" cy="0"/>
-          </a:xfrm>
-          <a:prstGeom prst="line">
-            <a:avLst/>
-          </a:prstGeom>
-          <a:noFill/>
-          <a:ln w="9525">
-            <a:solidFill>
-              <a:srgbClr val="E2E2DC"/>
-            </a:solidFill>
-            <a:prstDash val="solid"/>
-          </a:ln>
-        </p:spPr>
-      </p:sp>
-      <p:sp>
-        <p:nvSpPr>
-          <p:cNvPr id="30" name="Text 28"/>
-          <p:cNvSpPr/>
-          <p:nvPr/>
-        </p:nvSpPr>
-        <p:spPr>
-          <a:xfrm>
-            <a:off x="777240" y="5797296"/>
-            <a:ext cx="10637215" cy="457200"/>
+              <a:t>Reviews lead to monitoring, intervention, reassessment, or documentation.</a:t>
+            </a:r>
+            <a:endParaRPr lang="en-US" sz="950" dirty="0"/>
+          </a:p>
+        </p:txBody>
+      </p:sp>
+      <p:sp>
+        <p:nvSpPr>
+          <p:cNvPr id="31" name="Shape 29"/>
+          <p:cNvSpPr/>
+          <p:nvPr/>
+        </p:nvSpPr>
+        <p:spPr>
+          <a:xfrm>
+            <a:off x="777240" y="5440680"/>
+            <a:ext cx="10637215" cy="786384"/>
+          </a:xfrm>
+          <a:prstGeom prst="roundRect">
+            <a:avLst>
+              <a:gd name="adj" fmla="val 11628"/>
+            </a:avLst>
+          </a:prstGeom>
+          <a:solidFill>
+            <a:srgbClr val="EEEEE9"/>
+          </a:solidFill>
+          <a:ln/>
+        </p:spPr>
+      </p:sp>
+      <p:sp>
+        <p:nvSpPr>
+          <p:cNvPr id="32" name="Text 30"/>
+          <p:cNvSpPr/>
+          <p:nvPr/>
+        </p:nvSpPr>
+        <p:spPr>
+          <a:xfrm>
+            <a:off x="1051560" y="5596128"/>
+            <a:ext cx="2743200" cy="201168"/>
           </a:xfrm>
           <a:prstGeom prst="rect">
             <a:avLst/>
@@ -6575,7 +7864,46 @@
               <a:buNone/>
             </a:pPr>
             <a:r>
-              <a:rPr lang="en-US" sz="1100" b="1" dirty="0">
+              <a:rPr lang="en-US" sz="950" b="1" spc="40" kern="0" dirty="0">
+                <a:solidFill>
+                  <a:srgbClr val="83837B"/>
+                </a:solidFill>
+                <a:latin typeface="Calibri" pitchFamily="34" charset="0"/>
+                <a:ea typeface="Calibri" pitchFamily="34" charset="-122"/>
+                <a:cs typeface="Calibri" pitchFamily="34" charset="-120"/>
+              </a:rPr>
+              <a:t>If a gate fails</a:t>
+            </a:r>
+            <a:endParaRPr lang="en-US" sz="950" dirty="0"/>
+          </a:p>
+        </p:txBody>
+      </p:sp>
+      <p:sp>
+        <p:nvSpPr>
+          <p:cNvPr id="33" name="Text 31"/>
+          <p:cNvSpPr/>
+          <p:nvPr/>
+        </p:nvSpPr>
+        <p:spPr>
+          <a:xfrm>
+            <a:off x="1051560" y="5815584"/>
+            <a:ext cx="3179978" cy="310896"/>
+          </a:xfrm>
+          <a:prstGeom prst="rect">
+            <a:avLst/>
+          </a:prstGeom>
+          <a:noFill/>
+          <a:ln/>
+        </p:spPr>
+        <p:txBody>
+          <a:bodyPr wrap="square" lIns="0" tIns="0" rIns="0" bIns="0" rtlCol="0" anchor="ctr"/>
+          <a:lstStyle/>
+          <a:p>
+            <a:pPr algn="l" indent="0" marL="0">
+              <a:buNone/>
+            </a:pPr>
+            <a:r>
+              <a:rPr lang="en-US" sz="1050" b="1" dirty="0">
                 <a:solidFill>
                   <a:srgbClr val="1B1B18"/>
                 </a:solidFill>
@@ -6583,13 +7911,13 @@
                 <a:ea typeface="Calibri" pitchFamily="34" charset="-122"/>
                 <a:cs typeface="Calibri" pitchFamily="34" charset="-120"/>
               </a:rPr>
-              <a:t>If a gate fails   </a:t>
-            </a:r>
-            <a:pPr algn="l" indent="0" marL="0">
-              <a:buNone/>
-            </a:pPr>
-            <a:r>
-              <a:rPr lang="en-US" sz="1100" dirty="0">
+              <a:t>Weak signal  →  </a:t>
+            </a:r>
+            <a:pPr algn="l" indent="0" marL="0">
+              <a:buNone/>
+            </a:pPr>
+            <a:r>
+              <a:rPr lang="en-US" sz="1050" dirty="0">
                 <a:solidFill>
                   <a:srgbClr val="83837B"/>
                 </a:solidFill>
@@ -6597,15 +7925,121 @@
                 <a:ea typeface="Calibri" pitchFamily="34" charset="-122"/>
                 <a:cs typeface="Calibri" pitchFamily="34" charset="-120"/>
               </a:rPr>
-              <a:t>weak signal → stay closer to fall documentation  ·  weak workflow fit → attach evidence to scheduled reassessments  ·  too much volume → raise the threshold</a:t>
-            </a:r>
-            <a:endParaRPr lang="en-US" sz="1100" dirty="0"/>
-          </a:p>
-        </p:txBody>
-      </p:sp>
-      <p:sp>
-        <p:nvSpPr>
-          <p:cNvPr id="31" name="Text 29"/>
+              <a:t>stay closer to fall documentation</a:t>
+            </a:r>
+            <a:endParaRPr lang="en-US" sz="1050" dirty="0"/>
+          </a:p>
+        </p:txBody>
+      </p:sp>
+      <p:sp>
+        <p:nvSpPr>
+          <p:cNvPr id="34" name="Text 32"/>
+          <p:cNvSpPr/>
+          <p:nvPr/>
+        </p:nvSpPr>
+        <p:spPr>
+          <a:xfrm>
+            <a:off x="4414418" y="5815584"/>
+            <a:ext cx="3179978" cy="310896"/>
+          </a:xfrm>
+          <a:prstGeom prst="rect">
+            <a:avLst/>
+          </a:prstGeom>
+          <a:noFill/>
+          <a:ln/>
+        </p:spPr>
+        <p:txBody>
+          <a:bodyPr wrap="square" lIns="0" tIns="0" rIns="0" bIns="0" rtlCol="0" anchor="ctr"/>
+          <a:lstStyle/>
+          <a:p>
+            <a:pPr algn="l" indent="0" marL="0">
+              <a:buNone/>
+            </a:pPr>
+            <a:r>
+              <a:rPr lang="en-US" sz="1050" b="1" dirty="0">
+                <a:solidFill>
+                  <a:srgbClr val="1B1B18"/>
+                </a:solidFill>
+                <a:latin typeface="Calibri" pitchFamily="34" charset="0"/>
+                <a:ea typeface="Calibri" pitchFamily="34" charset="-122"/>
+                <a:cs typeface="Calibri" pitchFamily="34" charset="-120"/>
+              </a:rPr>
+              <a:t>Weak workflow fit  →  </a:t>
+            </a:r>
+            <a:pPr algn="l" indent="0" marL="0">
+              <a:buNone/>
+            </a:pPr>
+            <a:r>
+              <a:rPr lang="en-US" sz="1050" dirty="0">
+                <a:solidFill>
+                  <a:srgbClr val="83837B"/>
+                </a:solidFill>
+                <a:latin typeface="Calibri" pitchFamily="34" charset="0"/>
+                <a:ea typeface="Calibri" pitchFamily="34" charset="-122"/>
+                <a:cs typeface="Calibri" pitchFamily="34" charset="-120"/>
+              </a:rPr>
+              <a:t>attach evidence to scheduled reassessments</a:t>
+            </a:r>
+            <a:endParaRPr lang="en-US" sz="1050" dirty="0"/>
+          </a:p>
+        </p:txBody>
+      </p:sp>
+      <p:sp>
+        <p:nvSpPr>
+          <p:cNvPr id="35" name="Text 33"/>
+          <p:cNvSpPr/>
+          <p:nvPr/>
+        </p:nvSpPr>
+        <p:spPr>
+          <a:xfrm>
+            <a:off x="7777277" y="5815584"/>
+            <a:ext cx="3179978" cy="310896"/>
+          </a:xfrm>
+          <a:prstGeom prst="rect">
+            <a:avLst/>
+          </a:prstGeom>
+          <a:noFill/>
+          <a:ln/>
+        </p:spPr>
+        <p:txBody>
+          <a:bodyPr wrap="square" lIns="0" tIns="0" rIns="0" bIns="0" rtlCol="0" anchor="ctr"/>
+          <a:lstStyle/>
+          <a:p>
+            <a:pPr algn="l" indent="0" marL="0">
+              <a:buNone/>
+            </a:pPr>
+            <a:r>
+              <a:rPr lang="en-US" sz="1050" b="1" dirty="0">
+                <a:solidFill>
+                  <a:srgbClr val="1B1B18"/>
+                </a:solidFill>
+                <a:latin typeface="Calibri" pitchFamily="34" charset="0"/>
+                <a:ea typeface="Calibri" pitchFamily="34" charset="-122"/>
+                <a:cs typeface="Calibri" pitchFamily="34" charset="-120"/>
+              </a:rPr>
+              <a:t>Too much volume  →  </a:t>
+            </a:r>
+            <a:pPr algn="l" indent="0" marL="0">
+              <a:buNone/>
+            </a:pPr>
+            <a:r>
+              <a:rPr lang="en-US" sz="1050" dirty="0">
+                <a:solidFill>
+                  <a:srgbClr val="83837B"/>
+                </a:solidFill>
+                <a:latin typeface="Calibri" pitchFamily="34" charset="0"/>
+                <a:ea typeface="Calibri" pitchFamily="34" charset="-122"/>
+                <a:cs typeface="Calibri" pitchFamily="34" charset="-120"/>
+              </a:rPr>
+              <a:t>raise the threshold</a:t>
+            </a:r>
+            <a:endParaRPr lang="en-US" sz="1050" dirty="0"/>
+          </a:p>
+        </p:txBody>
+      </p:sp>
+      <p:sp>
+        <p:nvSpPr>
+          <p:cNvPr id="36" name="Text 34"/>
           <p:cNvSpPr/>
           <p:nvPr/>
         </p:nvSpPr>
@@ -6644,7 +8078,7 @@
       </p:sp>
       <p:sp>
         <p:nvSpPr>
-          <p:cNvPr id="32" name="Text 30"/>
+          <p:cNvPr id="37" name="Text 35"/>
           <p:cNvSpPr/>
           <p:nvPr/>
         </p:nvSpPr>
@@ -6766,7 +8200,7 @@
                 <a:ea typeface="Calibri" pitchFamily="34" charset="-122"/>
                 <a:cs typeface="Calibri" pitchFamily="34" charset="-120"/>
               </a:rPr>
-              <a:t>VALIDATION PLAN</a:t>
+              <a:t>SIX-MONTH PLAN</a:t>
             </a:r>
             <a:endParaRPr lang="en-US" sz="1050" dirty="0"/>
           </a:p>
@@ -6781,7 +8215,7 @@
         <p:spPr>
           <a:xfrm>
             <a:off x="777240" y="676656"/>
-            <a:ext cx="10332720" cy="822960"/>
+            <a:ext cx="10424160" cy="822960"/>
           </a:xfrm>
           <a:prstGeom prst="rect">
             <a:avLst/>
@@ -6800,7 +8234,7 @@
               <a:buNone/>
             </a:pPr>
             <a:r>
-              <a:rPr lang="en-US" sz="2500" b="1" dirty="0">
+              <a:rPr lang="en-US" sz="2400" b="1" dirty="0">
                 <a:solidFill>
                   <a:srgbClr val="1B1B18"/>
                 </a:solidFill>
@@ -6808,9 +8242,9 @@
                 <a:ea typeface="Calibri" pitchFamily="34" charset="-122"/>
                 <a:cs typeface="Calibri" pitchFamily="34" charset="-120"/>
               </a:rPr>
-              <a:t>Six months to prove reviewed signals lead to earlier action</a:t>
-            </a:r>
-            <a:endParaRPr lang="en-US" sz="2500" dirty="0"/>
+              <a:t>Six months to prove earlier reviewed action</a:t>
+            </a:r>
+            <a:endParaRPr lang="en-US" sz="2400" dirty="0"/>
           </a:p>
         </p:txBody>
       </p:sp>
@@ -6822,8 +8256,8 @@
         </p:nvSpPr>
         <p:spPr>
           <a:xfrm>
-            <a:off x="777240" y="1481328"/>
-            <a:ext cx="9875520" cy="502920"/>
+            <a:off x="777240" y="1463040"/>
+            <a:ext cx="10058400" cy="457200"/>
           </a:xfrm>
           <a:prstGeom prst="rect">
             <a:avLst/>
@@ -6842,7 +8276,7 @@
               <a:buNone/>
             </a:pPr>
             <a:r>
-              <a:rPr lang="en-US" sz="1300" dirty="0">
+              <a:rPr lang="en-US" sz="1250" dirty="0">
                 <a:solidFill>
                   <a:srgbClr val="83837B"/>
                 </a:solidFill>
@@ -6850,9 +8284,9 @@
                 <a:ea typeface="Calibri" pitchFamily="34" charset="-122"/>
                 <a:cs typeface="Calibri" pitchFamily="34" charset="-120"/>
               </a:rPr>
-              <a:t>Validate on history, pilot by hand, then automate the workflow that changes care behavior.</a:t>
-            </a:r>
-            <a:endParaRPr lang="en-US" sz="1300" dirty="0"/>
+              <a:t>Validate on history, pilot by hand, then automate the workflow that earns renewal confidence.</a:t>
+            </a:r>
+            <a:endParaRPr lang="en-US" sz="1250" dirty="0"/>
           </a:p>
         </p:txBody>
       </p:sp>
@@ -6864,8 +8298,620 @@
         </p:nvSpPr>
         <p:spPr>
           <a:xfrm>
-            <a:off x="868680" y="2148840"/>
-            <a:ext cx="10454335" cy="0"/>
+            <a:off x="777240" y="1883664"/>
+            <a:ext cx="137160" cy="137160"/>
+          </a:xfrm>
+          <a:prstGeom prst="ellipse">
+            <a:avLst/>
+          </a:prstGeom>
+          <a:solidFill>
+            <a:srgbClr val="5A6CE6"/>
+          </a:solidFill>
+          <a:ln/>
+        </p:spPr>
+      </p:sp>
+      <p:sp>
+        <p:nvSpPr>
+          <p:cNvPr id="7" name="Text 5"/>
+          <p:cNvSpPr/>
+          <p:nvPr/>
+        </p:nvSpPr>
+        <p:spPr>
+          <a:xfrm>
+            <a:off x="1033272" y="1847088"/>
+            <a:ext cx="3362858" cy="219456"/>
+          </a:xfrm>
+          <a:prstGeom prst="rect">
+            <a:avLst/>
+          </a:prstGeom>
+          <a:noFill/>
+          <a:ln/>
+        </p:spPr>
+        <p:txBody>
+          <a:bodyPr wrap="square" lIns="0" tIns="0" rIns="0" bIns="0" rtlCol="0" anchor="t"/>
+          <a:lstStyle/>
+          <a:p>
+            <a:pPr algn="l" indent="0" marL="0">
+              <a:buNone/>
+            </a:pPr>
+            <a:r>
+              <a:rPr lang="en-US" sz="1000" b="1" dirty="0">
+                <a:solidFill>
+                  <a:srgbClr val="5A6CE6"/>
+                </a:solidFill>
+                <a:latin typeface="Calibri" pitchFamily="34" charset="0"/>
+                <a:ea typeface="Calibri" pitchFamily="34" charset="-122"/>
+                <a:cs typeface="Calibri" pitchFamily="34" charset="-120"/>
+              </a:rPr>
+              <a:t>Months 1–2</a:t>
+            </a:r>
+            <a:endParaRPr lang="en-US" sz="1000" dirty="0"/>
+          </a:p>
+        </p:txBody>
+      </p:sp>
+      <p:sp>
+        <p:nvSpPr>
+          <p:cNvPr id="8" name="Text 6"/>
+          <p:cNvSpPr/>
+          <p:nvPr/>
+        </p:nvSpPr>
+        <p:spPr>
+          <a:xfrm>
+            <a:off x="777240" y="2139696"/>
+            <a:ext cx="3362858" cy="274320"/>
+          </a:xfrm>
+          <a:prstGeom prst="rect">
+            <a:avLst/>
+          </a:prstGeom>
+          <a:noFill/>
+          <a:ln/>
+        </p:spPr>
+        <p:txBody>
+          <a:bodyPr wrap="square" lIns="0" tIns="0" rIns="0" bIns="0" rtlCol="0" anchor="t"/>
+          <a:lstStyle/>
+          <a:p>
+            <a:pPr algn="l" indent="0" marL="0">
+              <a:buNone/>
+            </a:pPr>
+            <a:r>
+              <a:rPr lang="en-US" sz="1400" b="1" dirty="0">
+                <a:solidFill>
+                  <a:srgbClr val="1B1B18"/>
+                </a:solidFill>
+                <a:latin typeface="Calibri" pitchFamily="34" charset="0"/>
+                <a:ea typeface="Calibri" pitchFamily="34" charset="-122"/>
+                <a:cs typeface="Calibri" pitchFamily="34" charset="-120"/>
+              </a:rPr>
+              <a:t>Prove signal on history</a:t>
+            </a:r>
+            <a:endParaRPr lang="en-US" sz="1400" dirty="0"/>
+          </a:p>
+        </p:txBody>
+      </p:sp>
+      <p:sp>
+        <p:nvSpPr>
+          <p:cNvPr id="9" name="Text 7"/>
+          <p:cNvSpPr/>
+          <p:nvPr/>
+        </p:nvSpPr>
+        <p:spPr>
+          <a:xfrm>
+            <a:off x="777240" y="2450592"/>
+            <a:ext cx="3362858" cy="548640"/>
+          </a:xfrm>
+          <a:prstGeom prst="rect">
+            <a:avLst/>
+          </a:prstGeom>
+          <a:noFill/>
+          <a:ln/>
+        </p:spPr>
+        <p:txBody>
+          <a:bodyPr wrap="square" lIns="0" tIns="0" rIns="0" bIns="0" rtlCol="0" anchor="t"/>
+          <a:lstStyle/>
+          <a:p>
+            <a:pPr algn="l" indent="0" marL="0">
+              <a:lnSpc>
+                <a:spcPct val="108000"/>
+              </a:lnSpc>
+              <a:buNone/>
+            </a:pPr>
+            <a:r>
+              <a:rPr lang="en-US" sz="1000" dirty="0">
+                <a:solidFill>
+                  <a:srgbClr val="83837B"/>
+                </a:solidFill>
+                <a:latin typeface="Calibri" pitchFamily="34" charset="0"/>
+                <a:ea typeface="Calibri" pitchFamily="34" charset="-122"/>
+                <a:cs typeface="Calibri" pitchFamily="34" charset="-120"/>
+              </a:rPr>
+              <a:t>Find historical cases where Teton saw decline before it was documented.</a:t>
+            </a:r>
+            <a:endParaRPr lang="en-US" sz="1000" dirty="0"/>
+          </a:p>
+        </p:txBody>
+      </p:sp>
+      <p:sp>
+        <p:nvSpPr>
+          <p:cNvPr id="10" name="Shape 8"/>
+          <p:cNvSpPr/>
+          <p:nvPr/>
+        </p:nvSpPr>
+        <p:spPr>
+          <a:xfrm>
+            <a:off x="4414418" y="1883664"/>
+            <a:ext cx="137160" cy="137160"/>
+          </a:xfrm>
+          <a:prstGeom prst="ellipse">
+            <a:avLst/>
+          </a:prstGeom>
+          <a:solidFill>
+            <a:srgbClr val="5A6CE6"/>
+          </a:solidFill>
+          <a:ln/>
+        </p:spPr>
+      </p:sp>
+      <p:sp>
+        <p:nvSpPr>
+          <p:cNvPr id="11" name="Text 9"/>
+          <p:cNvSpPr/>
+          <p:nvPr/>
+        </p:nvSpPr>
+        <p:spPr>
+          <a:xfrm>
+            <a:off x="4670450" y="1847088"/>
+            <a:ext cx="3362858" cy="219456"/>
+          </a:xfrm>
+          <a:prstGeom prst="rect">
+            <a:avLst/>
+          </a:prstGeom>
+          <a:noFill/>
+          <a:ln/>
+        </p:spPr>
+        <p:txBody>
+          <a:bodyPr wrap="square" lIns="0" tIns="0" rIns="0" bIns="0" rtlCol="0" anchor="t"/>
+          <a:lstStyle/>
+          <a:p>
+            <a:pPr algn="l" indent="0" marL="0">
+              <a:buNone/>
+            </a:pPr>
+            <a:r>
+              <a:rPr lang="en-US" sz="1000" b="1" dirty="0">
+                <a:solidFill>
+                  <a:srgbClr val="5A6CE6"/>
+                </a:solidFill>
+                <a:latin typeface="Calibri" pitchFamily="34" charset="0"/>
+                <a:ea typeface="Calibri" pitchFamily="34" charset="-122"/>
+                <a:cs typeface="Calibri" pitchFamily="34" charset="-120"/>
+              </a:rPr>
+              <a:t>Months 2–4</a:t>
+            </a:r>
+            <a:endParaRPr lang="en-US" sz="1000" dirty="0"/>
+          </a:p>
+        </p:txBody>
+      </p:sp>
+      <p:sp>
+        <p:nvSpPr>
+          <p:cNvPr id="12" name="Text 10"/>
+          <p:cNvSpPr/>
+          <p:nvPr/>
+        </p:nvSpPr>
+        <p:spPr>
+          <a:xfrm>
+            <a:off x="4414418" y="2139696"/>
+            <a:ext cx="3362858" cy="274320"/>
+          </a:xfrm>
+          <a:prstGeom prst="rect">
+            <a:avLst/>
+          </a:prstGeom>
+          <a:noFill/>
+          <a:ln/>
+        </p:spPr>
+        <p:txBody>
+          <a:bodyPr wrap="square" lIns="0" tIns="0" rIns="0" bIns="0" rtlCol="0" anchor="t"/>
+          <a:lstStyle/>
+          <a:p>
+            <a:pPr algn="l" indent="0" marL="0">
+              <a:buNone/>
+            </a:pPr>
+            <a:r>
+              <a:rPr lang="en-US" sz="1400" b="1" dirty="0">
+                <a:solidFill>
+                  <a:srgbClr val="1B1B18"/>
+                </a:solidFill>
+                <a:latin typeface="Calibri" pitchFamily="34" charset="0"/>
+                <a:ea typeface="Calibri" pitchFamily="34" charset="-122"/>
+                <a:cs typeface="Calibri" pitchFamily="34" charset="-120"/>
+              </a:rPr>
+              <a:t>Pilot by hand</a:t>
+            </a:r>
+            <a:endParaRPr lang="en-US" sz="1400" dirty="0"/>
+          </a:p>
+        </p:txBody>
+      </p:sp>
+      <p:sp>
+        <p:nvSpPr>
+          <p:cNvPr id="13" name="Text 11"/>
+          <p:cNvSpPr/>
+          <p:nvPr/>
+        </p:nvSpPr>
+        <p:spPr>
+          <a:xfrm>
+            <a:off x="4414418" y="2450592"/>
+            <a:ext cx="3362858" cy="548640"/>
+          </a:xfrm>
+          <a:prstGeom prst="rect">
+            <a:avLst/>
+          </a:prstGeom>
+          <a:noFill/>
+          <a:ln/>
+        </p:spPr>
+        <p:txBody>
+          <a:bodyPr wrap="square" lIns="0" tIns="0" rIns="0" bIns="0" rtlCol="0" anchor="t"/>
+          <a:lstStyle/>
+          <a:p>
+            <a:pPr algn="l" indent="0" marL="0">
+              <a:lnSpc>
+                <a:spcPct val="108000"/>
+              </a:lnSpc>
+              <a:buNone/>
+            </a:pPr>
+            <a:r>
+              <a:rPr lang="en-US" sz="1000" dirty="0">
+                <a:solidFill>
+                  <a:srgbClr val="83837B"/>
+                </a:solidFill>
+                <a:latin typeface="Calibri" pitchFamily="34" charset="0"/>
+                <a:ea typeface="Calibri" pitchFamily="34" charset="-122"/>
+                <a:cs typeface="Calibri" pitchFamily="34" charset="-120"/>
+              </a:rPr>
+              <a:t>Run weekly review candidates with one to two design partners.</a:t>
+            </a:r>
+            <a:endParaRPr lang="en-US" sz="1000" dirty="0"/>
+          </a:p>
+        </p:txBody>
+      </p:sp>
+      <p:sp>
+        <p:nvSpPr>
+          <p:cNvPr id="14" name="Shape 12"/>
+          <p:cNvSpPr/>
+          <p:nvPr/>
+        </p:nvSpPr>
+        <p:spPr>
+          <a:xfrm>
+            <a:off x="8051597" y="1883664"/>
+            <a:ext cx="137160" cy="137160"/>
+          </a:xfrm>
+          <a:prstGeom prst="ellipse">
+            <a:avLst/>
+          </a:prstGeom>
+          <a:solidFill>
+            <a:srgbClr val="5A6CE6"/>
+          </a:solidFill>
+          <a:ln/>
+        </p:spPr>
+      </p:sp>
+      <p:sp>
+        <p:nvSpPr>
+          <p:cNvPr id="15" name="Text 13"/>
+          <p:cNvSpPr/>
+          <p:nvPr/>
+        </p:nvSpPr>
+        <p:spPr>
+          <a:xfrm>
+            <a:off x="8307629" y="1847088"/>
+            <a:ext cx="3362858" cy="219456"/>
+          </a:xfrm>
+          <a:prstGeom prst="rect">
+            <a:avLst/>
+          </a:prstGeom>
+          <a:noFill/>
+          <a:ln/>
+        </p:spPr>
+        <p:txBody>
+          <a:bodyPr wrap="square" lIns="0" tIns="0" rIns="0" bIns="0" rtlCol="0" anchor="t"/>
+          <a:lstStyle/>
+          <a:p>
+            <a:pPr algn="l" indent="0" marL="0">
+              <a:buNone/>
+            </a:pPr>
+            <a:r>
+              <a:rPr lang="en-US" sz="1000" b="1" dirty="0">
+                <a:solidFill>
+                  <a:srgbClr val="5A6CE6"/>
+                </a:solidFill>
+                <a:latin typeface="Calibri" pitchFamily="34" charset="0"/>
+                <a:ea typeface="Calibri" pitchFamily="34" charset="-122"/>
+                <a:cs typeface="Calibri" pitchFamily="34" charset="-120"/>
+              </a:rPr>
+              <a:t>Months 4–6</a:t>
+            </a:r>
+            <a:endParaRPr lang="en-US" sz="1000" dirty="0"/>
+          </a:p>
+        </p:txBody>
+      </p:sp>
+      <p:sp>
+        <p:nvSpPr>
+          <p:cNvPr id="16" name="Text 14"/>
+          <p:cNvSpPr/>
+          <p:nvPr/>
+        </p:nvSpPr>
+        <p:spPr>
+          <a:xfrm>
+            <a:off x="8051597" y="2139696"/>
+            <a:ext cx="3362858" cy="274320"/>
+          </a:xfrm>
+          <a:prstGeom prst="rect">
+            <a:avLst/>
+          </a:prstGeom>
+          <a:noFill/>
+          <a:ln/>
+        </p:spPr>
+        <p:txBody>
+          <a:bodyPr wrap="square" lIns="0" tIns="0" rIns="0" bIns="0" rtlCol="0" anchor="t"/>
+          <a:lstStyle/>
+          <a:p>
+            <a:pPr algn="l" indent="0" marL="0">
+              <a:buNone/>
+            </a:pPr>
+            <a:r>
+              <a:rPr lang="en-US" sz="1400" b="1" dirty="0">
+                <a:solidFill>
+                  <a:srgbClr val="1B1B18"/>
+                </a:solidFill>
+                <a:latin typeface="Calibri" pitchFamily="34" charset="0"/>
+                <a:ea typeface="Calibri" pitchFamily="34" charset="-122"/>
+                <a:cs typeface="Calibri" pitchFamily="34" charset="-120"/>
+              </a:rPr>
+              <a:t>Automate what worked</a:t>
+            </a:r>
+            <a:endParaRPr lang="en-US" sz="1400" dirty="0"/>
+          </a:p>
+        </p:txBody>
+      </p:sp>
+      <p:sp>
+        <p:nvSpPr>
+          <p:cNvPr id="17" name="Text 15"/>
+          <p:cNvSpPr/>
+          <p:nvPr/>
+        </p:nvSpPr>
+        <p:spPr>
+          <a:xfrm>
+            <a:off x="8051597" y="2450592"/>
+            <a:ext cx="3362858" cy="548640"/>
+          </a:xfrm>
+          <a:prstGeom prst="rect">
+            <a:avLst/>
+          </a:prstGeom>
+          <a:noFill/>
+          <a:ln/>
+        </p:spPr>
+        <p:txBody>
+          <a:bodyPr wrap="square" lIns="0" tIns="0" rIns="0" bIns="0" rtlCol="0" anchor="t"/>
+          <a:lstStyle/>
+          <a:p>
+            <a:pPr algn="l" indent="0" marL="0">
+              <a:lnSpc>
+                <a:spcPct val="108000"/>
+              </a:lnSpc>
+              <a:buNone/>
+            </a:pPr>
+            <a:r>
+              <a:rPr lang="en-US" sz="1000" dirty="0">
+                <a:solidFill>
+                  <a:srgbClr val="83837B"/>
+                </a:solidFill>
+                <a:latin typeface="Calibri" pitchFamily="34" charset="0"/>
+                <a:ea typeface="Calibri" pitchFamily="34" charset="-122"/>
+                <a:cs typeface="Calibri" pitchFamily="34" charset="-120"/>
+              </a:rPr>
+              <a:t>Launch candidate generation, review actions, and documentation.</a:t>
+            </a:r>
+            <a:endParaRPr lang="en-US" sz="1000" dirty="0"/>
+          </a:p>
+        </p:txBody>
+      </p:sp>
+      <p:sp>
+        <p:nvSpPr>
+          <p:cNvPr id="18" name="Shape 16"/>
+          <p:cNvSpPr/>
+          <p:nvPr/>
+        </p:nvSpPr>
+        <p:spPr>
+          <a:xfrm>
+            <a:off x="777240" y="3090672"/>
+            <a:ext cx="10637215" cy="1024128"/>
+          </a:xfrm>
+          <a:prstGeom prst="roundRect">
+            <a:avLst>
+              <a:gd name="adj" fmla="val 10714"/>
+            </a:avLst>
+          </a:prstGeom>
+          <a:solidFill>
+            <a:srgbClr val="EBEEFB"/>
+          </a:solidFill>
+          <a:ln/>
+        </p:spPr>
+      </p:sp>
+      <p:sp>
+        <p:nvSpPr>
+          <p:cNvPr id="19" name="Text 17"/>
+          <p:cNvSpPr/>
+          <p:nvPr/>
+        </p:nvSpPr>
+        <p:spPr>
+          <a:xfrm>
+            <a:off x="1143000" y="3255264"/>
+            <a:ext cx="3657600" cy="201168"/>
+          </a:xfrm>
+          <a:prstGeom prst="rect">
+            <a:avLst/>
+          </a:prstGeom>
+          <a:noFill/>
+          <a:ln/>
+        </p:spPr>
+        <p:txBody>
+          <a:bodyPr wrap="square" lIns="0" tIns="0" rIns="0" bIns="0" rtlCol="0" anchor="ctr"/>
+          <a:lstStyle/>
+          <a:p>
+            <a:pPr algn="l" indent="0" marL="0">
+              <a:buNone/>
+            </a:pPr>
+            <a:r>
+              <a:rPr lang="en-US" sz="950" b="1" spc="40" kern="0" dirty="0">
+                <a:solidFill>
+                  <a:srgbClr val="5A6CE6"/>
+                </a:solidFill>
+                <a:latin typeface="Calibri" pitchFamily="34" charset="0"/>
+                <a:ea typeface="Calibri" pitchFamily="34" charset="-122"/>
+                <a:cs typeface="Calibri" pitchFamily="34" charset="-120"/>
+              </a:rPr>
+              <a:t>North Star</a:t>
+            </a:r>
+            <a:endParaRPr lang="en-US" sz="950" dirty="0"/>
+          </a:p>
+        </p:txBody>
+      </p:sp>
+      <p:sp>
+        <p:nvSpPr>
+          <p:cNvPr id="20" name="Text 18"/>
+          <p:cNvSpPr/>
+          <p:nvPr/>
+        </p:nvSpPr>
+        <p:spPr>
+          <a:xfrm>
+            <a:off x="1143000" y="3456432"/>
+            <a:ext cx="9905695" cy="365760"/>
+          </a:xfrm>
+          <a:prstGeom prst="rect">
+            <a:avLst/>
+          </a:prstGeom>
+          <a:noFill/>
+          <a:ln/>
+        </p:spPr>
+        <p:txBody>
+          <a:bodyPr wrap="square" lIns="0" tIns="0" rIns="0" bIns="0" rtlCol="0" anchor="t"/>
+          <a:lstStyle/>
+          <a:p>
+            <a:pPr algn="l" indent="0" marL="0">
+              <a:buNone/>
+            </a:pPr>
+            <a:r>
+              <a:rPr lang="en-US" sz="2200" b="1" dirty="0">
+                <a:solidFill>
+                  <a:srgbClr val="1B1B18"/>
+                </a:solidFill>
+                <a:latin typeface="Calibri" pitchFamily="34" charset="0"/>
+                <a:ea typeface="Calibri" pitchFamily="34" charset="-122"/>
+                <a:cs typeface="Calibri" pitchFamily="34" charset="-120"/>
+              </a:rPr>
+              <a:t>Median weeks earlier that meaningful decline is reviewed</a:t>
+            </a:r>
+            <a:endParaRPr lang="en-US" sz="2200" dirty="0"/>
+          </a:p>
+        </p:txBody>
+      </p:sp>
+      <p:sp>
+        <p:nvSpPr>
+          <p:cNvPr id="21" name="Text 19"/>
+          <p:cNvSpPr/>
+          <p:nvPr/>
+        </p:nvSpPr>
+        <p:spPr>
+          <a:xfrm>
+            <a:off x="1143000" y="3858768"/>
+            <a:ext cx="9905695" cy="256032"/>
+          </a:xfrm>
+          <a:prstGeom prst="rect">
+            <a:avLst/>
+          </a:prstGeom>
+          <a:noFill/>
+          <a:ln/>
+        </p:spPr>
+        <p:txBody>
+          <a:bodyPr wrap="square" lIns="0" tIns="0" rIns="0" bIns="0" rtlCol="0" anchor="ctr"/>
+          <a:lstStyle/>
+          <a:p>
+            <a:pPr algn="l" indent="0" marL="0">
+              <a:buNone/>
+            </a:pPr>
+            <a:r>
+              <a:rPr lang="en-US" sz="1400" dirty="0">
+                <a:solidFill>
+                  <a:srgbClr val="1B1B18"/>
+                </a:solidFill>
+                <a:latin typeface="Calibri" pitchFamily="34" charset="0"/>
+                <a:ea typeface="Calibri" pitchFamily="34" charset="-122"/>
+                <a:cs typeface="Calibri" pitchFamily="34" charset="-120"/>
+              </a:rPr>
+              <a:t>The goal is </a:t>
+            </a:r>
+            <a:pPr algn="l" indent="0" marL="0">
+              <a:buNone/>
+            </a:pPr>
+            <a:r>
+              <a:rPr lang="en-US" sz="1400" b="1" dirty="0">
+                <a:solidFill>
+                  <a:srgbClr val="5A6CE6"/>
+                </a:solidFill>
+                <a:latin typeface="Calibri" pitchFamily="34" charset="0"/>
+                <a:ea typeface="Calibri" pitchFamily="34" charset="-122"/>
+                <a:cs typeface="Calibri" pitchFamily="34" charset="-120"/>
+              </a:rPr>
+              <a:t>Week 2, not Week 12.</a:t>
+            </a:r>
+            <a:endParaRPr lang="en-US" sz="1400" dirty="0"/>
+          </a:p>
+        </p:txBody>
+      </p:sp>
+      <p:sp>
+        <p:nvSpPr>
+          <p:cNvPr id="22" name="Text 20"/>
+          <p:cNvSpPr/>
+          <p:nvPr/>
+        </p:nvSpPr>
+        <p:spPr>
+          <a:xfrm>
+            <a:off x="777240" y="4334256"/>
+            <a:ext cx="3240938" cy="274320"/>
+          </a:xfrm>
+          <a:prstGeom prst="rect">
+            <a:avLst/>
+          </a:prstGeom>
+          <a:noFill/>
+          <a:ln/>
+        </p:spPr>
+        <p:txBody>
+          <a:bodyPr wrap="square" lIns="0" tIns="0" rIns="0" bIns="0" rtlCol="0" anchor="t"/>
+          <a:lstStyle/>
+          <a:p>
+            <a:pPr algn="l" indent="0" marL="0">
+              <a:buNone/>
+            </a:pPr>
+            <a:r>
+              <a:rPr lang="en-US" sz="1400" b="1" dirty="0">
+                <a:solidFill>
+                  <a:srgbClr val="1B1B18"/>
+                </a:solidFill>
+                <a:latin typeface="Calibri" pitchFamily="34" charset="0"/>
+                <a:ea typeface="Calibri" pitchFamily="34" charset="-122"/>
+                <a:cs typeface="Calibri" pitchFamily="34" charset="-120"/>
+              </a:rPr>
+              <a:t>Reviewed</a:t>
+            </a:r>
+            <a:endParaRPr lang="en-US" sz="1400" dirty="0"/>
+          </a:p>
+        </p:txBody>
+      </p:sp>
+      <p:sp>
+        <p:nvSpPr>
+          <p:cNvPr id="23" name="Shape 21"/>
+          <p:cNvSpPr/>
+          <p:nvPr/>
+        </p:nvSpPr>
+        <p:spPr>
+          <a:xfrm>
+            <a:off x="777240" y="4663440"/>
+            <a:ext cx="3240938" cy="0"/>
           </a:xfrm>
           <a:prstGeom prst="line">
             <a:avLst/>
@@ -6881,112 +8927,14 @@
       </p:sp>
       <p:sp>
         <p:nvSpPr>
-          <p:cNvPr id="7" name="Shape 5"/>
-          <p:cNvSpPr/>
-          <p:nvPr/>
-        </p:nvSpPr>
-        <p:spPr>
-          <a:xfrm>
-            <a:off x="868680" y="2075688"/>
-            <a:ext cx="146304" cy="146304"/>
-          </a:xfrm>
-          <a:prstGeom prst="ellipse">
-            <a:avLst/>
-          </a:prstGeom>
-          <a:solidFill>
-            <a:srgbClr val="5A6CE6"/>
-          </a:solidFill>
-          <a:ln/>
-        </p:spPr>
-      </p:sp>
-      <p:sp>
-        <p:nvSpPr>
-          <p:cNvPr id="8" name="Text 6"/>
-          <p:cNvSpPr/>
-          <p:nvPr/>
-        </p:nvSpPr>
-        <p:spPr>
-          <a:xfrm>
-            <a:off x="1143000" y="2093976"/>
-            <a:ext cx="3301898" cy="201168"/>
-          </a:xfrm>
-          <a:prstGeom prst="rect">
-            <a:avLst/>
-          </a:prstGeom>
-          <a:noFill/>
-          <a:ln/>
-        </p:spPr>
-        <p:txBody>
-          <a:bodyPr wrap="square" lIns="0" tIns="0" rIns="0" bIns="0" rtlCol="0" anchor="ctr"/>
-          <a:lstStyle/>
-          <a:p>
-            <a:pPr algn="l" indent="0" marL="0">
-              <a:buNone/>
-            </a:pPr>
-            <a:r>
-              <a:rPr lang="en-US" sz="950" b="1" spc="130" kern="0" dirty="0">
-                <a:solidFill>
-                  <a:srgbClr val="5A6CE6"/>
-                </a:solidFill>
-                <a:latin typeface="Calibri" pitchFamily="34" charset="0"/>
-                <a:ea typeface="Calibri" pitchFamily="34" charset="-122"/>
-                <a:cs typeface="Calibri" pitchFamily="34" charset="-120"/>
-              </a:rPr>
-              <a:t>MONTHS 1–2</a:t>
-            </a:r>
-            <a:endParaRPr lang="en-US" sz="950" dirty="0"/>
-          </a:p>
-        </p:txBody>
-      </p:sp>
-      <p:sp>
-        <p:nvSpPr>
-          <p:cNvPr id="9" name="Text 7"/>
-          <p:cNvSpPr/>
-          <p:nvPr/>
-        </p:nvSpPr>
-        <p:spPr>
-          <a:xfrm>
-            <a:off x="777240" y="2395728"/>
-            <a:ext cx="3301898" cy="310896"/>
-          </a:xfrm>
-          <a:prstGeom prst="rect">
-            <a:avLst/>
-          </a:prstGeom>
-          <a:noFill/>
-          <a:ln/>
-        </p:spPr>
-        <p:txBody>
-          <a:bodyPr wrap="square" lIns="0" tIns="0" rIns="0" bIns="0" rtlCol="0" anchor="t"/>
-          <a:lstStyle/>
-          <a:p>
-            <a:pPr algn="l" indent="0" marL="0">
-              <a:buNone/>
-            </a:pPr>
-            <a:r>
-              <a:rPr lang="en-US" sz="1500" b="1" dirty="0">
-                <a:solidFill>
-                  <a:srgbClr val="1B1B18"/>
-                </a:solidFill>
-                <a:latin typeface="Calibri" pitchFamily="34" charset="0"/>
-                <a:ea typeface="Calibri" pitchFamily="34" charset="-122"/>
-                <a:cs typeface="Calibri" pitchFamily="34" charset="-120"/>
-              </a:rPr>
-              <a:t>Retrospective proof</a:t>
-            </a:r>
-            <a:endParaRPr lang="en-US" sz="1500" dirty="0"/>
-          </a:p>
-        </p:txBody>
-      </p:sp>
-      <p:sp>
-        <p:nvSpPr>
-          <p:cNvPr id="10" name="Text 8"/>
-          <p:cNvSpPr/>
-          <p:nvPr/>
-        </p:nvSpPr>
-        <p:spPr>
-          <a:xfrm>
-            <a:off x="777240" y="2743200"/>
-            <a:ext cx="3301898" cy="640080"/>
+          <p:cNvPr id="24" name="Text 22"/>
+          <p:cNvSpPr/>
+          <p:nvPr/>
+        </p:nvSpPr>
+        <p:spPr>
+          <a:xfrm>
+            <a:off x="777240" y="4754880"/>
+            <a:ext cx="3240938" cy="548640"/>
           </a:xfrm>
           <a:prstGeom prst="rect">
             <a:avLst/>
@@ -7005,7 +8953,7 @@
               <a:buNone/>
             </a:pPr>
             <a:r>
-              <a:rPr lang="en-US" sz="1100" dirty="0">
+              <a:rPr lang="en-US" sz="1000" dirty="0">
                 <a:solidFill>
                   <a:srgbClr val="83837B"/>
                 </a:solidFill>
@@ -7013,81 +8961,22 @@
                 <a:ea typeface="Calibri" pitchFamily="34" charset="-122"/>
                 <a:cs typeface="Calibri" pitchFamily="34" charset="-120"/>
               </a:rPr>
-              <a:t>Find historical cases where Teton signals appeared before documented decline.</a:t>
-            </a:r>
-            <a:endParaRPr lang="en-US" sz="1100" dirty="0"/>
-          </a:p>
-        </p:txBody>
-      </p:sp>
-      <p:sp>
-        <p:nvSpPr>
-          <p:cNvPr id="11" name="Shape 9"/>
-          <p:cNvSpPr/>
-          <p:nvPr/>
-        </p:nvSpPr>
-        <p:spPr>
-          <a:xfrm>
-            <a:off x="4536338" y="2075688"/>
-            <a:ext cx="146304" cy="146304"/>
-          </a:xfrm>
-          <a:prstGeom prst="ellipse">
-            <a:avLst/>
-          </a:prstGeom>
-          <a:solidFill>
-            <a:srgbClr val="5A6CE6"/>
-          </a:solidFill>
-          <a:ln/>
-        </p:spPr>
-      </p:sp>
-      <p:sp>
-        <p:nvSpPr>
-          <p:cNvPr id="12" name="Text 10"/>
-          <p:cNvSpPr/>
-          <p:nvPr/>
-        </p:nvSpPr>
-        <p:spPr>
-          <a:xfrm>
-            <a:off x="4810658" y="2093976"/>
-            <a:ext cx="3301898" cy="201168"/>
-          </a:xfrm>
-          <a:prstGeom prst="rect">
-            <a:avLst/>
-          </a:prstGeom>
-          <a:noFill/>
-          <a:ln/>
-        </p:spPr>
-        <p:txBody>
-          <a:bodyPr wrap="square" lIns="0" tIns="0" rIns="0" bIns="0" rtlCol="0" anchor="ctr"/>
-          <a:lstStyle/>
-          <a:p>
-            <a:pPr algn="l" indent="0" marL="0">
-              <a:buNone/>
-            </a:pPr>
-            <a:r>
-              <a:rPr lang="en-US" sz="950" b="1" spc="130" kern="0" dirty="0">
-                <a:solidFill>
-                  <a:srgbClr val="5A6CE6"/>
-                </a:solidFill>
-                <a:latin typeface="Calibri" pitchFamily="34" charset="0"/>
-                <a:ea typeface="Calibri" pitchFamily="34" charset="-122"/>
-                <a:cs typeface="Calibri" pitchFamily="34" charset="-120"/>
-              </a:rPr>
-              <a:t>MONTHS 2–4</a:t>
-            </a:r>
-            <a:endParaRPr lang="en-US" sz="950" dirty="0"/>
-          </a:p>
-        </p:txBody>
-      </p:sp>
-      <p:sp>
-        <p:nvSpPr>
-          <p:cNvPr id="13" name="Text 11"/>
-          <p:cNvSpPr/>
-          <p:nvPr/>
-        </p:nvSpPr>
-        <p:spPr>
-          <a:xfrm>
-            <a:off x="4444898" y="2395728"/>
-            <a:ext cx="3301898" cy="310896"/>
+              <a:t>Resolved in cadence · confirmed meaningful · time from signal to review</a:t>
+            </a:r>
+            <a:endParaRPr lang="en-US" sz="1000" dirty="0"/>
+          </a:p>
+        </p:txBody>
+      </p:sp>
+      <p:sp>
+        <p:nvSpPr>
+          <p:cNvPr id="25" name="Text 23"/>
+          <p:cNvSpPr/>
+          <p:nvPr/>
+        </p:nvSpPr>
+        <p:spPr>
+          <a:xfrm>
+            <a:off x="4475378" y="4334256"/>
+            <a:ext cx="3240938" cy="274320"/>
           </a:xfrm>
           <a:prstGeom prst="rect">
             <a:avLst/>
@@ -7103,7 +8992,7 @@
               <a:buNone/>
             </a:pPr>
             <a:r>
-              <a:rPr lang="en-US" sz="1500" b="1" dirty="0">
+              <a:rPr lang="en-US" sz="1400" b="1" dirty="0">
                 <a:solidFill>
                   <a:srgbClr val="1B1B18"/>
                 </a:solidFill>
@@ -7111,242 +9000,21 @@
                 <a:ea typeface="Calibri" pitchFamily="34" charset="-122"/>
                 <a:cs typeface="Calibri" pitchFamily="34" charset="-120"/>
               </a:rPr>
-              <a:t>Concierge pilot</a:t>
-            </a:r>
-            <a:endParaRPr lang="en-US" sz="1500" dirty="0"/>
-          </a:p>
-        </p:txBody>
-      </p:sp>
-      <p:sp>
-        <p:nvSpPr>
-          <p:cNvPr id="14" name="Text 12"/>
-          <p:cNvSpPr/>
-          <p:nvPr/>
-        </p:nvSpPr>
-        <p:spPr>
-          <a:xfrm>
-            <a:off x="4444898" y="2743200"/>
-            <a:ext cx="3301898" cy="640080"/>
-          </a:xfrm>
-          <a:prstGeom prst="rect">
-            <a:avLst/>
-          </a:prstGeom>
-          <a:noFill/>
-          <a:ln/>
-        </p:spPr>
-        <p:txBody>
-          <a:bodyPr wrap="square" lIns="0" tIns="0" rIns="0" bIns="0" rtlCol="0" anchor="t"/>
-          <a:lstStyle/>
-          <a:p>
-            <a:pPr algn="l" indent="0" marL="0">
-              <a:lnSpc>
-                <a:spcPct val="110000"/>
-              </a:lnSpc>
-              <a:buNone/>
-            </a:pPr>
-            <a:r>
-              <a:rPr lang="en-US" sz="1100" dirty="0">
-                <a:solidFill>
-                  <a:srgbClr val="83837B"/>
-                </a:solidFill>
-                <a:latin typeface="Calibri" pitchFamily="34" charset="0"/>
-                <a:ea typeface="Calibri" pitchFamily="34" charset="-122"/>
-                <a:cs typeface="Calibri" pitchFamily="34" charset="-120"/>
-              </a:rPr>
-              <a:t>Manually run weekly review candidates in one to two communities.</a:t>
-            </a:r>
-            <a:endParaRPr lang="en-US" sz="1100" dirty="0"/>
-          </a:p>
-        </p:txBody>
-      </p:sp>
-      <p:sp>
-        <p:nvSpPr>
-          <p:cNvPr id="15" name="Shape 13"/>
-          <p:cNvSpPr/>
-          <p:nvPr/>
-        </p:nvSpPr>
-        <p:spPr>
-          <a:xfrm>
-            <a:off x="8203997" y="2075688"/>
-            <a:ext cx="146304" cy="146304"/>
-          </a:xfrm>
-          <a:prstGeom prst="ellipse">
-            <a:avLst/>
-          </a:prstGeom>
-          <a:solidFill>
-            <a:srgbClr val="5A6CE6"/>
-          </a:solidFill>
-          <a:ln/>
-        </p:spPr>
-      </p:sp>
-      <p:sp>
-        <p:nvSpPr>
-          <p:cNvPr id="16" name="Text 14"/>
-          <p:cNvSpPr/>
-          <p:nvPr/>
-        </p:nvSpPr>
-        <p:spPr>
-          <a:xfrm>
-            <a:off x="8478317" y="2093976"/>
-            <a:ext cx="3301898" cy="201168"/>
-          </a:xfrm>
-          <a:prstGeom prst="rect">
-            <a:avLst/>
-          </a:prstGeom>
-          <a:noFill/>
-          <a:ln/>
-        </p:spPr>
-        <p:txBody>
-          <a:bodyPr wrap="square" lIns="0" tIns="0" rIns="0" bIns="0" rtlCol="0" anchor="ctr"/>
-          <a:lstStyle/>
-          <a:p>
-            <a:pPr algn="l" indent="0" marL="0">
-              <a:buNone/>
-            </a:pPr>
-            <a:r>
-              <a:rPr lang="en-US" sz="950" b="1" spc="130" kern="0" dirty="0">
-                <a:solidFill>
-                  <a:srgbClr val="5A6CE6"/>
-                </a:solidFill>
-                <a:latin typeface="Calibri" pitchFamily="34" charset="0"/>
-                <a:ea typeface="Calibri" pitchFamily="34" charset="-122"/>
-                <a:cs typeface="Calibri" pitchFamily="34" charset="-120"/>
-              </a:rPr>
-              <a:t>MONTHS 4–6</a:t>
-            </a:r>
-            <a:endParaRPr lang="en-US" sz="950" dirty="0"/>
-          </a:p>
-        </p:txBody>
-      </p:sp>
-      <p:sp>
-        <p:nvSpPr>
-          <p:cNvPr id="17" name="Text 15"/>
-          <p:cNvSpPr/>
-          <p:nvPr/>
-        </p:nvSpPr>
-        <p:spPr>
-          <a:xfrm>
-            <a:off x="8112557" y="2395728"/>
-            <a:ext cx="3301898" cy="310896"/>
-          </a:xfrm>
-          <a:prstGeom prst="rect">
-            <a:avLst/>
-          </a:prstGeom>
-          <a:noFill/>
-          <a:ln/>
-        </p:spPr>
-        <p:txBody>
-          <a:bodyPr wrap="square" lIns="0" tIns="0" rIns="0" bIns="0" rtlCol="0" anchor="t"/>
-          <a:lstStyle/>
-          <a:p>
-            <a:pPr algn="l" indent="0" marL="0">
-              <a:buNone/>
-            </a:pPr>
-            <a:r>
-              <a:rPr lang="en-US" sz="1500" b="1" dirty="0">
-                <a:solidFill>
-                  <a:srgbClr val="1B1B18"/>
-                </a:solidFill>
-                <a:latin typeface="Calibri" pitchFamily="34" charset="0"/>
-                <a:ea typeface="Calibri" pitchFamily="34" charset="-122"/>
-                <a:cs typeface="Calibri" pitchFamily="34" charset="-120"/>
-              </a:rPr>
-              <a:t>MVP launch</a:t>
-            </a:r>
-            <a:endParaRPr lang="en-US" sz="1500" dirty="0"/>
-          </a:p>
-        </p:txBody>
-      </p:sp>
-      <p:sp>
-        <p:nvSpPr>
-          <p:cNvPr id="18" name="Text 16"/>
-          <p:cNvSpPr/>
-          <p:nvPr/>
-        </p:nvSpPr>
-        <p:spPr>
-          <a:xfrm>
-            <a:off x="8112557" y="2743200"/>
-            <a:ext cx="3301898" cy="640080"/>
-          </a:xfrm>
-          <a:prstGeom prst="rect">
-            <a:avLst/>
-          </a:prstGeom>
-          <a:noFill/>
-          <a:ln/>
-        </p:spPr>
-        <p:txBody>
-          <a:bodyPr wrap="square" lIns="0" tIns="0" rIns="0" bIns="0" rtlCol="0" anchor="t"/>
-          <a:lstStyle/>
-          <a:p>
-            <a:pPr algn="l" indent="0" marL="0">
-              <a:lnSpc>
-                <a:spcPct val="110000"/>
-              </a:lnSpc>
-              <a:buNone/>
-            </a:pPr>
-            <a:r>
-              <a:rPr lang="en-US" sz="1100" dirty="0">
-                <a:solidFill>
-                  <a:srgbClr val="83837B"/>
-                </a:solidFill>
-                <a:latin typeface="Calibri" pitchFamily="34" charset="0"/>
-                <a:ea typeface="Calibri" pitchFamily="34" charset="-122"/>
-                <a:cs typeface="Calibri" pitchFamily="34" charset="-120"/>
-              </a:rPr>
-              <a:t>Automate candidate generation, review actions, and documentation with two to three design partners.</a:t>
-            </a:r>
-            <a:endParaRPr lang="en-US" sz="1100" dirty="0"/>
-          </a:p>
-        </p:txBody>
-      </p:sp>
-      <p:sp>
-        <p:nvSpPr>
-          <p:cNvPr id="19" name="Text 17"/>
-          <p:cNvSpPr/>
-          <p:nvPr/>
-        </p:nvSpPr>
-        <p:spPr>
-          <a:xfrm>
-            <a:off x="777240" y="3675888"/>
-            <a:ext cx="3240938" cy="310896"/>
-          </a:xfrm>
-          <a:prstGeom prst="rect">
-            <a:avLst/>
-          </a:prstGeom>
-          <a:noFill/>
-          <a:ln/>
-        </p:spPr>
-        <p:txBody>
-          <a:bodyPr wrap="square" lIns="0" tIns="0" rIns="0" bIns="0" rtlCol="0" anchor="t"/>
-          <a:lstStyle/>
-          <a:p>
-            <a:pPr algn="l" indent="0" marL="0">
-              <a:buNone/>
-            </a:pPr>
-            <a:r>
-              <a:rPr lang="en-US" sz="1500" b="1" dirty="0">
-                <a:solidFill>
-                  <a:srgbClr val="1B1B18"/>
-                </a:solidFill>
-                <a:latin typeface="Calibri" pitchFamily="34" charset="0"/>
-                <a:ea typeface="Calibri" pitchFamily="34" charset="-122"/>
-                <a:cs typeface="Calibri" pitchFamily="34" charset="-120"/>
-              </a:rPr>
-              <a:t>Reviewed</a:t>
-            </a:r>
-            <a:endParaRPr lang="en-US" sz="1500" dirty="0"/>
-          </a:p>
-        </p:txBody>
-      </p:sp>
-      <p:sp>
-        <p:nvSpPr>
-          <p:cNvPr id="20" name="Shape 18"/>
-          <p:cNvSpPr/>
-          <p:nvPr/>
-        </p:nvSpPr>
-        <p:spPr>
-          <a:xfrm>
-            <a:off x="777240" y="4059936"/>
+              <a:t>Acted on</a:t>
+            </a:r>
+            <a:endParaRPr lang="en-US" sz="1400" dirty="0"/>
+          </a:p>
+        </p:txBody>
+      </p:sp>
+      <p:sp>
+        <p:nvSpPr>
+          <p:cNvPr id="26" name="Shape 24"/>
+          <p:cNvSpPr/>
+          <p:nvPr/>
+        </p:nvSpPr>
+        <p:spPr>
+          <a:xfrm>
+            <a:off x="4475378" y="4663440"/>
             <a:ext cx="3240938" cy="0"/>
           </a:xfrm>
           <a:prstGeom prst="line">
@@ -7363,34 +9031,14 @@
       </p:sp>
       <p:sp>
         <p:nvSpPr>
-          <p:cNvPr id="21" name="Shape 19"/>
-          <p:cNvSpPr/>
-          <p:nvPr/>
-        </p:nvSpPr>
-        <p:spPr>
-          <a:xfrm>
-            <a:off x="795528" y="4288536"/>
-            <a:ext cx="64008" cy="64008"/>
-          </a:xfrm>
-          <a:prstGeom prst="ellipse">
-            <a:avLst/>
-          </a:prstGeom>
-          <a:solidFill>
-            <a:srgbClr val="C7C7C1"/>
-          </a:solidFill>
-          <a:ln/>
-        </p:spPr>
-      </p:sp>
-      <p:sp>
-        <p:nvSpPr>
-          <p:cNvPr id="22" name="Text 20"/>
-          <p:cNvSpPr/>
-          <p:nvPr/>
-        </p:nvSpPr>
-        <p:spPr>
-          <a:xfrm>
-            <a:off x="996696" y="4224528"/>
-            <a:ext cx="3021482" cy="457200"/>
+          <p:cNvPr id="27" name="Text 25"/>
+          <p:cNvSpPr/>
+          <p:nvPr/>
+        </p:nvSpPr>
+        <p:spPr>
+          <a:xfrm>
+            <a:off x="4475378" y="4754880"/>
+            <a:ext cx="3240938" cy="548640"/>
           </a:xfrm>
           <a:prstGeom prst="rect">
             <a:avLst/>
@@ -7404,12 +9052,12 @@
           <a:p>
             <a:pPr algn="l" indent="0" marL="0">
               <a:lnSpc>
-                <a:spcPct val="106000"/>
+                <a:spcPct val="110000"/>
               </a:lnSpc>
               <a:buNone/>
             </a:pPr>
             <a:r>
-              <a:rPr lang="en-US" sz="1100" dirty="0">
+              <a:rPr lang="en-US" sz="1000" dirty="0">
                 <a:solidFill>
                   <a:srgbClr val="83837B"/>
                 </a:solidFill>
@@ -7417,42 +9065,22 @@
                 <a:ea typeface="Calibri" pitchFamily="34" charset="-122"/>
                 <a:cs typeface="Calibri" pitchFamily="34" charset="-120"/>
               </a:rPr>
-              <a:t>Candidates resolved in cadence</a:t>
-            </a:r>
-            <a:endParaRPr lang="en-US" sz="1100" dirty="0"/>
-          </a:p>
-        </p:txBody>
-      </p:sp>
-      <p:sp>
-        <p:nvSpPr>
-          <p:cNvPr id="23" name="Shape 21"/>
-          <p:cNvSpPr/>
-          <p:nvPr/>
-        </p:nvSpPr>
-        <p:spPr>
-          <a:xfrm>
-            <a:off x="795528" y="4791456"/>
-            <a:ext cx="64008" cy="64008"/>
-          </a:xfrm>
-          <a:prstGeom prst="ellipse">
-            <a:avLst/>
-          </a:prstGeom>
-          <a:solidFill>
-            <a:srgbClr val="C7C7C1"/>
-          </a:solidFill>
-          <a:ln/>
-        </p:spPr>
-      </p:sp>
-      <p:sp>
-        <p:nvSpPr>
-          <p:cNvPr id="24" name="Text 22"/>
-          <p:cNvSpPr/>
-          <p:nvPr/>
-        </p:nvSpPr>
-        <p:spPr>
-          <a:xfrm>
-            <a:off x="996696" y="4727448"/>
-            <a:ext cx="3021482" cy="457200"/>
+              <a:t>Monitoring, intervention, reassessment, or documentation started</a:t>
+            </a:r>
+            <a:endParaRPr lang="en-US" sz="1000" dirty="0"/>
+          </a:p>
+        </p:txBody>
+      </p:sp>
+      <p:sp>
+        <p:nvSpPr>
+          <p:cNvPr id="28" name="Text 26"/>
+          <p:cNvSpPr/>
+          <p:nvPr/>
+        </p:nvSpPr>
+        <p:spPr>
+          <a:xfrm>
+            <a:off x="8173517" y="4334256"/>
+            <a:ext cx="3240938" cy="274320"/>
           </a:xfrm>
           <a:prstGeom prst="rect">
             <a:avLst/>
@@ -7465,149 +9093,22 @@
           <a:lstStyle/>
           <a:p>
             <a:pPr algn="l" indent="0" marL="0">
-              <a:lnSpc>
-                <a:spcPct val="106000"/>
-              </a:lnSpc>
-              <a:buNone/>
-            </a:pPr>
-            <a:r>
-              <a:rPr lang="en-US" sz="1100" dirty="0">
-                <a:solidFill>
-                  <a:srgbClr val="83837B"/>
-                </a:solidFill>
-                <a:latin typeface="Calibri" pitchFamily="34" charset="0"/>
-                <a:ea typeface="Calibri" pitchFamily="34" charset="-122"/>
-                <a:cs typeface="Calibri" pitchFamily="34" charset="-120"/>
-              </a:rPr>
-              <a:t>Confirmed meaningful by reviewers</a:t>
-            </a:r>
-            <a:endParaRPr lang="en-US" sz="1100" dirty="0"/>
-          </a:p>
-        </p:txBody>
-      </p:sp>
-      <p:sp>
-        <p:nvSpPr>
-          <p:cNvPr id="25" name="Shape 23"/>
-          <p:cNvSpPr/>
-          <p:nvPr/>
-        </p:nvSpPr>
-        <p:spPr>
-          <a:xfrm>
-            <a:off x="795528" y="5294376"/>
-            <a:ext cx="64008" cy="64008"/>
-          </a:xfrm>
-          <a:prstGeom prst="ellipse">
-            <a:avLst/>
-          </a:prstGeom>
-          <a:solidFill>
-            <a:srgbClr val="C7C7C1"/>
-          </a:solidFill>
-          <a:ln/>
-        </p:spPr>
-      </p:sp>
-      <p:sp>
-        <p:nvSpPr>
-          <p:cNvPr id="26" name="Text 24"/>
-          <p:cNvSpPr/>
-          <p:nvPr/>
-        </p:nvSpPr>
-        <p:spPr>
-          <a:xfrm>
-            <a:off x="996696" y="5230368"/>
-            <a:ext cx="3021482" cy="457200"/>
-          </a:xfrm>
-          <a:prstGeom prst="rect">
-            <a:avLst/>
-          </a:prstGeom>
-          <a:noFill/>
-          <a:ln/>
-        </p:spPr>
-        <p:txBody>
-          <a:bodyPr wrap="square" lIns="0" tIns="0" rIns="0" bIns="0" rtlCol="0" anchor="t"/>
-          <a:lstStyle/>
-          <a:p>
-            <a:pPr algn="l" indent="0" marL="0">
-              <a:lnSpc>
-                <a:spcPct val="106000"/>
-              </a:lnSpc>
-              <a:buNone/>
-            </a:pPr>
-            <a:r>
-              <a:rPr lang="en-US" sz="1100" dirty="0">
-                <a:solidFill>
-                  <a:srgbClr val="83837B"/>
-                </a:solidFill>
-                <a:latin typeface="Calibri" pitchFamily="34" charset="0"/>
-                <a:ea typeface="Calibri" pitchFamily="34" charset="-122"/>
-                <a:cs typeface="Calibri" pitchFamily="34" charset="-120"/>
-              </a:rPr>
-              <a:t>Time from signal to review</a:t>
-            </a:r>
-            <a:endParaRPr lang="en-US" sz="1100" dirty="0"/>
-          </a:p>
-        </p:txBody>
-      </p:sp>
-      <p:sp>
-        <p:nvSpPr>
-          <p:cNvPr id="27" name="Text 25"/>
-          <p:cNvSpPr/>
-          <p:nvPr/>
-        </p:nvSpPr>
-        <p:spPr>
-          <a:xfrm>
-            <a:off x="4475378" y="3675888"/>
-            <a:ext cx="3240938" cy="310896"/>
-          </a:xfrm>
-          <a:prstGeom prst="rect">
-            <a:avLst/>
-          </a:prstGeom>
-          <a:noFill/>
-          <a:ln/>
-        </p:spPr>
-        <p:txBody>
-          <a:bodyPr wrap="square" lIns="0" tIns="0" rIns="0" bIns="0" rtlCol="0" anchor="t"/>
-          <a:lstStyle/>
-          <a:p>
-            <a:pPr algn="l" indent="0" marL="0">
-              <a:buNone/>
-            </a:pPr>
-            <a:r>
-              <a:rPr lang="en-US" sz="1500" b="1" dirty="0">
-                <a:solidFill>
-                  <a:srgbClr val="1B1B18"/>
-                </a:solidFill>
-                <a:latin typeface="Calibri" pitchFamily="34" charset="0"/>
-                <a:ea typeface="Calibri" pitchFamily="34" charset="-122"/>
-                <a:cs typeface="Calibri" pitchFamily="34" charset="-120"/>
-              </a:rPr>
-              <a:t>Acted on</a:t>
-            </a:r>
-            <a:endParaRPr lang="en-US" sz="1500" dirty="0"/>
-          </a:p>
-        </p:txBody>
-      </p:sp>
-      <p:sp>
-        <p:nvSpPr>
-          <p:cNvPr id="28" name="Shape 26"/>
-          <p:cNvSpPr/>
-          <p:nvPr/>
-        </p:nvSpPr>
-        <p:spPr>
-          <a:xfrm>
-            <a:off x="4475378" y="4059936"/>
-            <a:ext cx="3240938" cy="0"/>
-          </a:xfrm>
-          <a:prstGeom prst="line">
-            <a:avLst/>
-          </a:prstGeom>
-          <a:noFill/>
-          <a:ln w="9525">
-            <a:solidFill>
-              <a:srgbClr val="E2E2DC"/>
-            </a:solidFill>
-            <a:prstDash val="solid"/>
-          </a:ln>
-        </p:spPr>
+              <a:buNone/>
+            </a:pPr>
+            <a:r>
+              <a:rPr lang="en-US" sz="1400" b="1" dirty="0">
+                <a:solidFill>
+                  <a:srgbClr val="5A6CE6"/>
+                </a:solidFill>
+                <a:latin typeface="Calibri" pitchFamily="34" charset="0"/>
+                <a:ea typeface="Calibri" pitchFamily="34" charset="-122"/>
+                <a:cs typeface="Calibri" pitchFamily="34" charset="-120"/>
+              </a:rPr>
+              <a:t>Earlier</a:t>
+            </a:r>
+            <a:endParaRPr lang="en-US" sz="1400" dirty="0"/>
+          </a:p>
+        </p:txBody>
       </p:sp>
       <p:sp>
         <p:nvSpPr>
@@ -7617,232 +9118,7 @@
         </p:nvSpPr>
         <p:spPr>
           <a:xfrm>
-            <a:off x="4493666" y="4288536"/>
-            <a:ext cx="64008" cy="64008"/>
-          </a:xfrm>
-          <a:prstGeom prst="ellipse">
-            <a:avLst/>
-          </a:prstGeom>
-          <a:solidFill>
-            <a:srgbClr val="C7C7C1"/>
-          </a:solidFill>
-          <a:ln/>
-        </p:spPr>
-      </p:sp>
-      <p:sp>
-        <p:nvSpPr>
-          <p:cNvPr id="30" name="Text 28"/>
-          <p:cNvSpPr/>
-          <p:nvPr/>
-        </p:nvSpPr>
-        <p:spPr>
-          <a:xfrm>
-            <a:off x="4694834" y="4224528"/>
-            <a:ext cx="3021482" cy="457200"/>
-          </a:xfrm>
-          <a:prstGeom prst="rect">
-            <a:avLst/>
-          </a:prstGeom>
-          <a:noFill/>
-          <a:ln/>
-        </p:spPr>
-        <p:txBody>
-          <a:bodyPr wrap="square" lIns="0" tIns="0" rIns="0" bIns="0" rtlCol="0" anchor="t"/>
-          <a:lstStyle/>
-          <a:p>
-            <a:pPr algn="l" indent="0" marL="0">
-              <a:lnSpc>
-                <a:spcPct val="106000"/>
-              </a:lnSpc>
-              <a:buNone/>
-            </a:pPr>
-            <a:r>
-              <a:rPr lang="en-US" sz="1100" dirty="0">
-                <a:solidFill>
-                  <a:srgbClr val="83837B"/>
-                </a:solidFill>
-                <a:latin typeface="Calibri" pitchFamily="34" charset="0"/>
-                <a:ea typeface="Calibri" pitchFamily="34" charset="-122"/>
-                <a:cs typeface="Calibri" pitchFamily="34" charset="-120"/>
-              </a:rPr>
-              <a:t>Monitoring, intervention, reassessment, or documentation started</a:t>
-            </a:r>
-            <a:endParaRPr lang="en-US" sz="1100" dirty="0"/>
-          </a:p>
-        </p:txBody>
-      </p:sp>
-      <p:sp>
-        <p:nvSpPr>
-          <p:cNvPr id="31" name="Shape 29"/>
-          <p:cNvSpPr/>
-          <p:nvPr/>
-        </p:nvSpPr>
-        <p:spPr>
-          <a:xfrm>
-            <a:off x="4493666" y="4791456"/>
-            <a:ext cx="64008" cy="64008"/>
-          </a:xfrm>
-          <a:prstGeom prst="ellipse">
-            <a:avLst/>
-          </a:prstGeom>
-          <a:solidFill>
-            <a:srgbClr val="C7C7C1"/>
-          </a:solidFill>
-          <a:ln/>
-        </p:spPr>
-      </p:sp>
-      <p:sp>
-        <p:nvSpPr>
-          <p:cNvPr id="32" name="Text 30"/>
-          <p:cNvSpPr/>
-          <p:nvPr/>
-        </p:nvSpPr>
-        <p:spPr>
-          <a:xfrm>
-            <a:off x="4694834" y="4727448"/>
-            <a:ext cx="3021482" cy="457200"/>
-          </a:xfrm>
-          <a:prstGeom prst="rect">
-            <a:avLst/>
-          </a:prstGeom>
-          <a:noFill/>
-          <a:ln/>
-        </p:spPr>
-        <p:txBody>
-          <a:bodyPr wrap="square" lIns="0" tIns="0" rIns="0" bIns="0" rtlCol="0" anchor="t"/>
-          <a:lstStyle/>
-          <a:p>
-            <a:pPr algn="l" indent="0" marL="0">
-              <a:lnSpc>
-                <a:spcPct val="106000"/>
-              </a:lnSpc>
-              <a:buNone/>
-            </a:pPr>
-            <a:r>
-              <a:rPr lang="en-US" sz="1100" dirty="0">
-                <a:solidFill>
-                  <a:srgbClr val="83837B"/>
-                </a:solidFill>
-                <a:latin typeface="Calibri" pitchFamily="34" charset="0"/>
-                <a:ea typeface="Calibri" pitchFamily="34" charset="-122"/>
-                <a:cs typeface="Calibri" pitchFamily="34" charset="-120"/>
-              </a:rPr>
-              <a:t>Family conversations supported by approved evidence</a:t>
-            </a:r>
-            <a:endParaRPr lang="en-US" sz="1100" dirty="0"/>
-          </a:p>
-        </p:txBody>
-      </p:sp>
-      <p:sp>
-        <p:nvSpPr>
-          <p:cNvPr id="33" name="Shape 31"/>
-          <p:cNvSpPr/>
-          <p:nvPr/>
-        </p:nvSpPr>
-        <p:spPr>
-          <a:xfrm>
-            <a:off x="4493666" y="5294376"/>
-            <a:ext cx="64008" cy="64008"/>
-          </a:xfrm>
-          <a:prstGeom prst="ellipse">
-            <a:avLst/>
-          </a:prstGeom>
-          <a:solidFill>
-            <a:srgbClr val="C7C7C1"/>
-          </a:solidFill>
-          <a:ln/>
-        </p:spPr>
-      </p:sp>
-      <p:sp>
-        <p:nvSpPr>
-          <p:cNvPr id="34" name="Text 32"/>
-          <p:cNvSpPr/>
-          <p:nvPr/>
-        </p:nvSpPr>
-        <p:spPr>
-          <a:xfrm>
-            <a:off x="4694834" y="5230368"/>
-            <a:ext cx="3021482" cy="457200"/>
-          </a:xfrm>
-          <a:prstGeom prst="rect">
-            <a:avLst/>
-          </a:prstGeom>
-          <a:noFill/>
-          <a:ln/>
-        </p:spPr>
-        <p:txBody>
-          <a:bodyPr wrap="square" lIns="0" tIns="0" rIns="0" bIns="0" rtlCol="0" anchor="t"/>
-          <a:lstStyle/>
-          <a:p>
-            <a:pPr algn="l" indent="0" marL="0">
-              <a:lnSpc>
-                <a:spcPct val="106000"/>
-              </a:lnSpc>
-              <a:buNone/>
-            </a:pPr>
-            <a:r>
-              <a:rPr lang="en-US" sz="1100" dirty="0">
-                <a:solidFill>
-                  <a:srgbClr val="83837B"/>
-                </a:solidFill>
-                <a:latin typeface="Calibri" pitchFamily="34" charset="0"/>
-                <a:ea typeface="Calibri" pitchFamily="34" charset="-122"/>
-                <a:cs typeface="Calibri" pitchFamily="34" charset="-120"/>
-              </a:rPr>
-              <a:t>Care-plan decisions backed by Teton evidence</a:t>
-            </a:r>
-            <a:endParaRPr lang="en-US" sz="1100" dirty="0"/>
-          </a:p>
-        </p:txBody>
-      </p:sp>
-      <p:sp>
-        <p:nvSpPr>
-          <p:cNvPr id="35" name="Text 33"/>
-          <p:cNvSpPr/>
-          <p:nvPr/>
-        </p:nvSpPr>
-        <p:spPr>
-          <a:xfrm>
-            <a:off x="8173517" y="3675888"/>
-            <a:ext cx="3240938" cy="310896"/>
-          </a:xfrm>
-          <a:prstGeom prst="rect">
-            <a:avLst/>
-          </a:prstGeom>
-          <a:noFill/>
-          <a:ln/>
-        </p:spPr>
-        <p:txBody>
-          <a:bodyPr wrap="square" lIns="0" tIns="0" rIns="0" bIns="0" rtlCol="0" anchor="t"/>
-          <a:lstStyle/>
-          <a:p>
-            <a:pPr algn="l" indent="0" marL="0">
-              <a:buNone/>
-            </a:pPr>
-            <a:r>
-              <a:rPr lang="en-US" sz="1500" b="1" dirty="0">
-                <a:solidFill>
-                  <a:srgbClr val="5A6CE6"/>
-                </a:solidFill>
-                <a:latin typeface="Calibri" pitchFamily="34" charset="0"/>
-                <a:ea typeface="Calibri" pitchFamily="34" charset="-122"/>
-                <a:cs typeface="Calibri" pitchFamily="34" charset="-120"/>
-              </a:rPr>
-              <a:t>Earlier</a:t>
-            </a:r>
-            <a:endParaRPr lang="en-US" sz="1500" dirty="0"/>
-          </a:p>
-        </p:txBody>
-      </p:sp>
-      <p:sp>
-        <p:nvSpPr>
-          <p:cNvPr id="36" name="Shape 34"/>
-          <p:cNvSpPr/>
-          <p:nvPr/>
-        </p:nvSpPr>
-        <p:spPr>
-          <a:xfrm>
-            <a:off x="8173517" y="4059936"/>
+            <a:off x="8173517" y="4663440"/>
             <a:ext cx="3240938" cy="0"/>
           </a:xfrm>
           <a:prstGeom prst="line">
@@ -7859,53 +9135,114 @@
       </p:sp>
       <p:sp>
         <p:nvSpPr>
-          <p:cNvPr id="37" name="Shape 35"/>
-          <p:cNvSpPr/>
-          <p:nvPr/>
-        </p:nvSpPr>
-        <p:spPr>
-          <a:xfrm>
-            <a:off x="8191805" y="4288536"/>
-            <a:ext cx="64008" cy="64008"/>
-          </a:xfrm>
-          <a:prstGeom prst="ellipse">
-            <a:avLst/>
+          <p:cNvPr id="30" name="Text 28"/>
+          <p:cNvSpPr/>
+          <p:nvPr/>
+        </p:nvSpPr>
+        <p:spPr>
+          <a:xfrm>
+            <a:off x="8173517" y="4754880"/>
+            <a:ext cx="3240938" cy="548640"/>
+          </a:xfrm>
+          <a:prstGeom prst="rect">
+            <a:avLst/>
+          </a:prstGeom>
+          <a:noFill/>
+          <a:ln/>
+        </p:spPr>
+        <p:txBody>
+          <a:bodyPr wrap="square" lIns="0" tIns="0" rIns="0" bIns="0" rtlCol="0" anchor="t"/>
+          <a:lstStyle/>
+          <a:p>
+            <a:pPr algn="l" indent="0" marL="0">
+              <a:lnSpc>
+                <a:spcPct val="110000"/>
+              </a:lnSpc>
+              <a:buNone/>
+            </a:pPr>
+            <a:r>
+              <a:rPr lang="en-US" sz="1000" dirty="0">
+                <a:solidFill>
+                  <a:srgbClr val="83837B"/>
+                </a:solidFill>
+                <a:latin typeface="Calibri" pitchFamily="34" charset="0"/>
+                <a:ea typeface="Calibri" pitchFamily="34" charset="-122"/>
+                <a:cs typeface="Calibri" pitchFamily="34" charset="-120"/>
+              </a:rPr>
+              <a:t>Weeks-earlier detection · fewer delayed reassessments · early directional signal on incidents</a:t>
+            </a:r>
+            <a:endParaRPr lang="en-US" sz="1000" dirty="0"/>
+          </a:p>
+        </p:txBody>
+      </p:sp>
+      <p:sp>
+        <p:nvSpPr>
+          <p:cNvPr id="31" name="Shape 29"/>
+          <p:cNvSpPr/>
+          <p:nvPr/>
+        </p:nvSpPr>
+        <p:spPr>
+          <a:xfrm>
+            <a:off x="777240" y="5504688"/>
+            <a:ext cx="10637215" cy="749808"/>
+          </a:xfrm>
+          <a:prstGeom prst="roundRect">
+            <a:avLst>
+              <a:gd name="adj" fmla="val 12195"/>
+            </a:avLst>
           </a:prstGeom>
           <a:solidFill>
-            <a:srgbClr val="5A6CE6"/>
+            <a:srgbClr val="EEEEE9"/>
           </a:solidFill>
           <a:ln/>
         </p:spPr>
       </p:sp>
       <p:sp>
         <p:nvSpPr>
-          <p:cNvPr id="38" name="Text 36"/>
-          <p:cNvSpPr/>
-          <p:nvPr/>
-        </p:nvSpPr>
-        <p:spPr>
-          <a:xfrm>
-            <a:off x="8392973" y="4224528"/>
-            <a:ext cx="3021482" cy="457200"/>
-          </a:xfrm>
-          <a:prstGeom prst="rect">
-            <a:avLst/>
-          </a:prstGeom>
-          <a:noFill/>
-          <a:ln/>
-        </p:spPr>
-        <p:txBody>
-          <a:bodyPr wrap="square" lIns="0" tIns="0" rIns="0" bIns="0" rtlCol="0" anchor="t"/>
+          <p:cNvPr id="32" name="Text 30"/>
+          <p:cNvSpPr/>
+          <p:nvPr/>
+        </p:nvSpPr>
+        <p:spPr>
+          <a:xfrm>
+            <a:off x="1069848" y="5504688"/>
+            <a:ext cx="10051999" cy="749808"/>
+          </a:xfrm>
+          <a:prstGeom prst="rect">
+            <a:avLst/>
+          </a:prstGeom>
+          <a:noFill/>
+          <a:ln/>
+        </p:spPr>
+        <p:txBody>
+          <a:bodyPr wrap="square" lIns="0" tIns="0" rIns="0" bIns="0" rtlCol="0" anchor="ctr"/>
           <a:lstStyle/>
           <a:p>
             <a:pPr algn="l" indent="0" marL="0">
               <a:lnSpc>
-                <a:spcPct val="106000"/>
+                <a:spcPct val="108000"/>
               </a:lnSpc>
               <a:buNone/>
             </a:pPr>
             <a:r>
-              <a:rPr lang="en-US" sz="1100" b="1" dirty="0">
+              <a:rPr lang="en-US" sz="1150" b="1" dirty="0">
+                <a:solidFill>
+                  <a:srgbClr val="5A6CE6"/>
+                </a:solidFill>
+                <a:latin typeface="Calibri" pitchFamily="34" charset="0"/>
+                <a:ea typeface="Calibri" pitchFamily="34" charset="-122"/>
+                <a:cs typeface="Calibri" pitchFamily="34" charset="-120"/>
+              </a:rPr>
+              <a:t>Renewal story   </a:t>
+            </a:r>
+            <a:pPr algn="l" indent="0" marL="0">
+              <a:lnSpc>
+                <a:spcPct val="108000"/>
+              </a:lnSpc>
+              <a:buNone/>
+            </a:pPr>
+            <a:r>
+              <a:rPr lang="en-US" sz="1150" dirty="0">
                 <a:solidFill>
                   <a:srgbClr val="1B1B18"/>
                 </a:solidFill>
@@ -7913,206 +9250,6 @@
                 <a:ea typeface="Calibri" pitchFamily="34" charset="-122"/>
                 <a:cs typeface="Calibri" pitchFamily="34" charset="-120"/>
               </a:rPr>
-              <a:t>Median weeks-earlier detection</a:t>
-            </a:r>
-            <a:endParaRPr lang="en-US" sz="1100" dirty="0"/>
-          </a:p>
-        </p:txBody>
-      </p:sp>
-      <p:sp>
-        <p:nvSpPr>
-          <p:cNvPr id="39" name="Shape 37"/>
-          <p:cNvSpPr/>
-          <p:nvPr/>
-        </p:nvSpPr>
-        <p:spPr>
-          <a:xfrm>
-            <a:off x="8191805" y="4791456"/>
-            <a:ext cx="64008" cy="64008"/>
-          </a:xfrm>
-          <a:prstGeom prst="ellipse">
-            <a:avLst/>
-          </a:prstGeom>
-          <a:solidFill>
-            <a:srgbClr val="C7C7C1"/>
-          </a:solidFill>
-          <a:ln/>
-        </p:spPr>
-      </p:sp>
-      <p:sp>
-        <p:nvSpPr>
-          <p:cNvPr id="40" name="Text 38"/>
-          <p:cNvSpPr/>
-          <p:nvPr/>
-        </p:nvSpPr>
-        <p:spPr>
-          <a:xfrm>
-            <a:off x="8392973" y="4727448"/>
-            <a:ext cx="3021482" cy="457200"/>
-          </a:xfrm>
-          <a:prstGeom prst="rect">
-            <a:avLst/>
-          </a:prstGeom>
-          <a:noFill/>
-          <a:ln/>
-        </p:spPr>
-        <p:txBody>
-          <a:bodyPr wrap="square" lIns="0" tIns="0" rIns="0" bIns="0" rtlCol="0" anchor="t"/>
-          <a:lstStyle/>
-          <a:p>
-            <a:pPr algn="l" indent="0" marL="0">
-              <a:lnSpc>
-                <a:spcPct val="106000"/>
-              </a:lnSpc>
-              <a:buNone/>
-            </a:pPr>
-            <a:r>
-              <a:rPr lang="en-US" sz="1100" dirty="0">
-                <a:solidFill>
-                  <a:srgbClr val="83837B"/>
-                </a:solidFill>
-                <a:latin typeface="Calibri" pitchFamily="34" charset="0"/>
-                <a:ea typeface="Calibri" pitchFamily="34" charset="-122"/>
-                <a:cs typeface="Calibri" pitchFamily="34" charset="-120"/>
-              </a:rPr>
-              <a:t>Fewer delayed reassessments</a:t>
-            </a:r>
-            <a:endParaRPr lang="en-US" sz="1100" dirty="0"/>
-          </a:p>
-        </p:txBody>
-      </p:sp>
-      <p:sp>
-        <p:nvSpPr>
-          <p:cNvPr id="41" name="Shape 39"/>
-          <p:cNvSpPr/>
-          <p:nvPr/>
-        </p:nvSpPr>
-        <p:spPr>
-          <a:xfrm>
-            <a:off x="8191805" y="5294376"/>
-            <a:ext cx="64008" cy="64008"/>
-          </a:xfrm>
-          <a:prstGeom prst="ellipse">
-            <a:avLst/>
-          </a:prstGeom>
-          <a:solidFill>
-            <a:srgbClr val="C7C7C1"/>
-          </a:solidFill>
-          <a:ln/>
-        </p:spPr>
-      </p:sp>
-      <p:sp>
-        <p:nvSpPr>
-          <p:cNvPr id="42" name="Text 40"/>
-          <p:cNvSpPr/>
-          <p:nvPr/>
-        </p:nvSpPr>
-        <p:spPr>
-          <a:xfrm>
-            <a:off x="8392973" y="5230368"/>
-            <a:ext cx="3021482" cy="457200"/>
-          </a:xfrm>
-          <a:prstGeom prst="rect">
-            <a:avLst/>
-          </a:prstGeom>
-          <a:noFill/>
-          <a:ln/>
-        </p:spPr>
-        <p:txBody>
-          <a:bodyPr wrap="square" lIns="0" tIns="0" rIns="0" bIns="0" rtlCol="0" anchor="t"/>
-          <a:lstStyle/>
-          <a:p>
-            <a:pPr algn="l" indent="0" marL="0">
-              <a:lnSpc>
-                <a:spcPct val="106000"/>
-              </a:lnSpc>
-              <a:buNone/>
-            </a:pPr>
-            <a:r>
-              <a:rPr lang="en-US" sz="1100" dirty="0">
-                <a:solidFill>
-                  <a:srgbClr val="83837B"/>
-                </a:solidFill>
-                <a:latin typeface="Calibri" pitchFamily="34" charset="0"/>
-                <a:ea typeface="Calibri" pitchFamily="34" charset="-122"/>
-                <a:cs typeface="Calibri" pitchFamily="34" charset="-120"/>
-              </a:rPr>
-              <a:t>Directional improvement in incidents or escalations</a:t>
-            </a:r>
-            <a:endParaRPr lang="en-US" sz="1100" dirty="0"/>
-          </a:p>
-        </p:txBody>
-      </p:sp>
-      <p:sp>
-        <p:nvSpPr>
-          <p:cNvPr id="43" name="Shape 41"/>
-          <p:cNvSpPr/>
-          <p:nvPr/>
-        </p:nvSpPr>
-        <p:spPr>
-          <a:xfrm>
-            <a:off x="777240" y="5742432"/>
-            <a:ext cx="10637215" cy="0"/>
-          </a:xfrm>
-          <a:prstGeom prst="line">
-            <a:avLst/>
-          </a:prstGeom>
-          <a:noFill/>
-          <a:ln w="9525">
-            <a:solidFill>
-              <a:srgbClr val="E2E2DC"/>
-            </a:solidFill>
-            <a:prstDash val="solid"/>
-          </a:ln>
-        </p:spPr>
-      </p:sp>
-      <p:sp>
-        <p:nvSpPr>
-          <p:cNvPr id="44" name="Text 42"/>
-          <p:cNvSpPr/>
-          <p:nvPr/>
-        </p:nvSpPr>
-        <p:spPr>
-          <a:xfrm>
-            <a:off x="777240" y="5870448"/>
-            <a:ext cx="10637215" cy="457200"/>
-          </a:xfrm>
-          <a:prstGeom prst="rect">
-            <a:avLst/>
-          </a:prstGeom>
-          <a:noFill/>
-          <a:ln/>
-        </p:spPr>
-        <p:txBody>
-          <a:bodyPr wrap="square" lIns="0" tIns="0" rIns="0" bIns="0" rtlCol="0" anchor="ctr"/>
-          <a:lstStyle/>
-          <a:p>
-            <a:pPr algn="l" indent="0" marL="0">
-              <a:buNone/>
-            </a:pPr>
-            <a:r>
-              <a:rPr lang="en-US" sz="1150" b="1" dirty="0">
-                <a:solidFill>
-                  <a:srgbClr val="5A6CE6"/>
-                </a:solidFill>
-                <a:latin typeface="Calibri" pitchFamily="34" charset="0"/>
-                <a:ea typeface="Calibri" pitchFamily="34" charset="-122"/>
-                <a:cs typeface="Calibri" pitchFamily="34" charset="-120"/>
-              </a:rPr>
-              <a:t>Renewal story   </a:t>
-            </a:r>
-            <a:pPr algn="l" indent="0" marL="0">
-              <a:buNone/>
-            </a:pPr>
-            <a:r>
-              <a:rPr lang="en-US" sz="1150" dirty="0">
-                <a:solidFill>
-                  <a:srgbClr val="1B1B18"/>
-                </a:solidFill>
-                <a:latin typeface="Calibri" pitchFamily="34" charset="0"/>
-                <a:ea typeface="Calibri" pitchFamily="34" charset="-122"/>
-                <a:cs typeface="Calibri" pitchFamily="34" charset="-120"/>
-              </a:rPr>
               <a:t>Teton helped identify N residents earlier, supported M documented reassessments, and gave operators a care-quality ROI story beyond fall response.</a:t>
             </a:r>
             <a:endParaRPr lang="en-US" sz="1150" dirty="0"/>
@@ -8121,7 +9258,7 @@
       </p:sp>
       <p:sp>
         <p:nvSpPr>
-          <p:cNvPr id="45" name="Text 43"/>
+          <p:cNvPr id="33" name="Text 31"/>
           <p:cNvSpPr/>
           <p:nvPr/>
         </p:nvSpPr>
@@ -8160,7 +9297,7 @@
       </p:sp>
       <p:sp>
         <p:nvSpPr>
-          <p:cNvPr id="46" name="Text 44"/>
+          <p:cNvPr id="34" name="Text 32"/>
           <p:cNvSpPr/>
           <p:nvPr/>
         </p:nvSpPr>
